--- a/docs/运营平台功能架构图.pptx
+++ b/docs/运营平台功能架构图.pptx
@@ -1,15 +1,16 @@
 
 <file path=ppt/presentation.xml><?xml version="1.0" encoding="utf-8"?>
-<p:presentation xmlns:a="http://schemas.openxmlformats.org/drawingml/2006/main" xmlns:r="http://schemas.openxmlformats.org/officeDocument/2006/relationships" xmlns:p="http://schemas.openxmlformats.org/presentationml/2006/main" saveSubsetFonts="1" autoCompressPictures="0">
+<p:presentation xmlns:a="http://schemas.openxmlformats.org/drawingml/2006/main" xmlns:r="http://schemas.openxmlformats.org/officeDocument/2006/relationships" xmlns:p="http://schemas.openxmlformats.org/presentationml/2006/main" autoCompressPictures="0">
   <p:sldMasterIdLst>
     <p:sldMasterId id="2147483648" r:id="rId1"/>
   </p:sldMasterIdLst>
+  <p:notesMasterIdLst>
+    <p:notesMasterId r:id="rId4"/>
+  </p:notesMasterIdLst>
   <p:sldIdLst>
-    <p:sldId id="256" r:id="rId2"/>
+    <p:sldId id="256" r:id="rId3"/>
+    <p:sldId id="257" r:id="rId5"/>
   </p:sldIdLst>
-  <p:notesMasterIdLst>
-    <p:notesMasterId r:id="rId3"/>
-  </p:notesMasterIdLst>
   <p:sldSz cx="12192000" cy="6858000"/>
   <p:notesSz cx="6858000" cy="12192000"/>
   <p:defaultTextStyle>
@@ -189,7 +190,6 @@
           <a:p>
             <a:fld id="{5282F153-3F37-0F45-9E97-73ACFA13230C}" type="datetimeFigureOut">
               <a:rPr lang="en-US"/>
-              <a:t>7/23/19</a:t>
             </a:fld>
             <a:endParaRPr lang="en-US"/>
           </a:p>
@@ -256,6 +256,7 @@
               <a:rPr lang="en-US"/>
               <a:t>Click to edit Master text styles</a:t>
             </a:r>
+            <a:endParaRPr lang="en-US"/>
           </a:p>
           <a:p>
             <a:pPr lvl="1"/>
@@ -263,6 +264,7 @@
               <a:rPr lang="en-US"/>
               <a:t>Second level</a:t>
             </a:r>
+            <a:endParaRPr lang="en-US"/>
           </a:p>
           <a:p>
             <a:pPr lvl="2"/>
@@ -270,6 +272,7 @@
               <a:rPr lang="en-US"/>
               <a:t>Third level</a:t>
             </a:r>
+            <a:endParaRPr lang="en-US"/>
           </a:p>
           <a:p>
             <a:pPr lvl="3"/>
@@ -277,6 +280,7 @@
               <a:rPr lang="en-US"/>
               <a:t>Fourth level</a:t>
             </a:r>
+            <a:endParaRPr lang="en-US"/>
           </a:p>
           <a:p>
             <a:pPr lvl="4"/>
@@ -284,6 +288,7 @@
               <a:rPr lang="en-US"/>
               <a:t>Fifth level</a:t>
             </a:r>
+            <a:endParaRPr lang="en-US"/>
           </a:p>
         </p:txBody>
       </p:sp>
@@ -347,18 +352,12 @@
           <a:p>
             <a:fld id="{CE5E9CC1-C706-0F49-92D6-E571CC5EEA8F}" type="slidenum">
               <a:rPr lang="en-US"/>
-              <a:t>‹#›</a:t>
             </a:fld>
             <a:endParaRPr lang="en-US"/>
           </a:p>
         </p:txBody>
       </p:sp>
     </p:spTree>
-    <p:extLst>
-      <p:ext uri="{BB962C8B-B14F-4D97-AF65-F5344CB8AC3E}">
-        <p14:creationId xmlns:p14="http://schemas.microsoft.com/office/powerpoint/2010/main" val="1024086991"/>
-      </p:ext>
-    </p:extLst>
   </p:cSld>
   <p:clrMap bg1="lt1" tx1="dk1" bg2="lt2" tx2="dk2" accent1="accent1" accent2="accent2" accent3="accent3" accent4="accent4" accent5="accent5" accent6="accent6" hlink="hlink" folHlink="folHlink"/>
   <p:notesStyle>
@@ -500,10 +499,6 @@
           <a:bodyPr/>
           <a:lstStyle/>
           <a:p>
-            <a:r>
-              <a:rPr lang="en-US" dirty="0"/>
-              <a:t/>
-            </a:r>
             <a:endParaRPr lang="en-US" dirty="0"/>
           </a:p>
         </p:txBody>
@@ -525,18 +520,90 @@
           <a:p>
             <a:fld id="{F7021451-1387-4CA6-816F-3879F97B5CBC}" type="slidenum">
               <a:rPr lang="en-US"/>
-              <a:t>1</a:t>
             </a:fld>
             <a:endParaRPr lang="en-US"/>
           </a:p>
         </p:txBody>
       </p:sp>
     </p:spTree>
-    <p:extLst>
-      <p:ext uri="{BB962C8B-B14F-4D97-AF65-F5344CB8AC3E}">
-        <p14:creationId xmlns:p14="http://schemas.microsoft.com/office/powerpoint/2010/main" val="1024086991"/>
-      </p:ext>
-    </p:extLst>
+  </p:cSld>
+  <p:clrMapOvr>
+    <a:masterClrMapping/>
+  </p:clrMapOvr>
+</p:notes>
+</file>
+
+<file path=ppt/notesSlides/notesSlide2.xml><?xml version="1.0" encoding="utf-8"?>
+<p:notes xmlns:a="http://schemas.openxmlformats.org/drawingml/2006/main" xmlns:r="http://schemas.openxmlformats.org/officeDocument/2006/relationships" xmlns:p="http://schemas.openxmlformats.org/presentationml/2006/main">
+  <p:cSld>
+    <p:spTree>
+      <p:nvGrpSpPr>
+        <p:cNvPr id="1" name=""/>
+        <p:cNvGrpSpPr/>
+        <p:nvPr/>
+      </p:nvGrpSpPr>
+      <p:grpSpPr>
+        <a:xfrm>
+          <a:off x="0" y="0"/>
+          <a:ext cx="0" cy="0"/>
+          <a:chOff x="0" y="0"/>
+          <a:chExt cx="0" cy="0"/>
+        </a:xfrm>
+      </p:grpSpPr>
+      <p:sp>
+        <p:nvSpPr>
+          <p:cNvPr id="2" name="Slide Image Placeholder 1"/>
+          <p:cNvSpPr>
+            <a:spLocks noGrp="1" noRot="1" noChangeAspect="1"/>
+          </p:cNvSpPr>
+          <p:nvPr>
+            <p:ph type="sldImg"/>
+          </p:nvPr>
+        </p:nvSpPr>
+        <p:spPr/>
+      </p:sp>
+      <p:sp>
+        <p:nvSpPr>
+          <p:cNvPr id="3" name="Notes Placeholder 2"/>
+          <p:cNvSpPr>
+            <a:spLocks noGrp="1"/>
+          </p:cNvSpPr>
+          <p:nvPr>
+            <p:ph type="body" idx="1"/>
+          </p:nvPr>
+        </p:nvSpPr>
+        <p:spPr/>
+        <p:txBody>
+          <a:bodyPr/>
+          <a:lstStyle/>
+          <a:p>
+            <a:endParaRPr lang="en-US" dirty="0"/>
+          </a:p>
+        </p:txBody>
+      </p:sp>
+      <p:sp>
+        <p:nvSpPr>
+          <p:cNvPr id="4" name="Slide Number Placeholder 3"/>
+          <p:cNvSpPr>
+            <a:spLocks noGrp="1"/>
+          </p:cNvSpPr>
+          <p:nvPr>
+            <p:ph type="sldNum" sz="quarter" idx="10"/>
+          </p:nvPr>
+        </p:nvSpPr>
+        <p:spPr/>
+        <p:txBody>
+          <a:bodyPr/>
+          <a:lstStyle/>
+          <a:p>
+            <a:fld id="{F7021451-1387-4CA6-816F-3879F97B5CBC}" type="slidenum">
+              <a:rPr lang="en-US"/>
+            </a:fld>
+            <a:endParaRPr lang="en-US"/>
+          </a:p>
+        </p:txBody>
+      </p:sp>
+    </p:spTree>
   </p:cSld>
   <p:clrMapOvr>
     <a:masterClrMapping/>
@@ -577,6 +644,11 @@
 <file path=ppt/slideMasters/slideMaster1.xml><?xml version="1.0" encoding="utf-8"?>
 <p:sldMaster xmlns:a="http://schemas.openxmlformats.org/drawingml/2006/main" xmlns:r="http://schemas.openxmlformats.org/officeDocument/2006/relationships" xmlns:p="http://schemas.openxmlformats.org/presentationml/2006/main">
   <p:cSld>
+    <p:bg>
+      <p:bgRef idx="1001">
+        <a:schemeClr val="bg1"/>
+      </p:bgRef>
+    </p:bg>
     <p:spTree>
       <p:nvGrpSpPr>
         <p:cNvPr id="1" name=""/>
@@ -620,7 +692,7 @@
         <a:spcBef>
           <a:spcPct val="20000"/>
         </a:spcBef>
-        <a:buFont typeface="Arial" pitchFamily="34" charset="0"/>
+        <a:buFont typeface="Arial" panose="020B0604020202020204" pitchFamily="34" charset="0"/>
         <a:buChar char="•"/>
         <a:defRPr sz="3200" kern="1200">
           <a:solidFill>
@@ -635,7 +707,7 @@
         <a:spcBef>
           <a:spcPct val="20000"/>
         </a:spcBef>
-        <a:buFont typeface="Arial" pitchFamily="34" charset="0"/>
+        <a:buFont typeface="Arial" panose="020B0604020202020204" pitchFamily="34" charset="0"/>
         <a:buChar char="–"/>
         <a:defRPr sz="2800" kern="1200">
           <a:solidFill>
@@ -650,7 +722,7 @@
         <a:spcBef>
           <a:spcPct val="20000"/>
         </a:spcBef>
-        <a:buFont typeface="Arial" pitchFamily="34" charset="0"/>
+        <a:buFont typeface="Arial" panose="020B0604020202020204" pitchFamily="34" charset="0"/>
         <a:buChar char="•"/>
         <a:defRPr sz="2400" kern="1200">
           <a:solidFill>
@@ -665,7 +737,7 @@
         <a:spcBef>
           <a:spcPct val="20000"/>
         </a:spcBef>
-        <a:buFont typeface="Arial" pitchFamily="34" charset="0"/>
+        <a:buFont typeface="Arial" panose="020B0604020202020204" pitchFamily="34" charset="0"/>
         <a:buChar char="–"/>
         <a:defRPr sz="2000" kern="1200">
           <a:solidFill>
@@ -680,7 +752,7 @@
         <a:spcBef>
           <a:spcPct val="20000"/>
         </a:spcBef>
-        <a:buFont typeface="Arial" pitchFamily="34" charset="0"/>
+        <a:buFont typeface="Arial" panose="020B0604020202020204" pitchFamily="34" charset="0"/>
         <a:buChar char="»"/>
         <a:defRPr sz="2000" kern="1200">
           <a:solidFill>
@@ -695,7 +767,7 @@
         <a:spcBef>
           <a:spcPct val="20000"/>
         </a:spcBef>
-        <a:buFont typeface="Arial" pitchFamily="34" charset="0"/>
+        <a:buFont typeface="Arial" panose="020B0604020202020204" pitchFamily="34" charset="0"/>
         <a:buChar char="•"/>
         <a:defRPr sz="2000" kern="1200">
           <a:solidFill>
@@ -710,7 +782,7 @@
         <a:spcBef>
           <a:spcPct val="20000"/>
         </a:spcBef>
-        <a:buFont typeface="Arial" pitchFamily="34" charset="0"/>
+        <a:buFont typeface="Arial" panose="020B0604020202020204" pitchFamily="34" charset="0"/>
         <a:buChar char="•"/>
         <a:defRPr sz="2000" kern="1200">
           <a:solidFill>
@@ -725,7 +797,7 @@
         <a:spcBef>
           <a:spcPct val="20000"/>
         </a:spcBef>
-        <a:buFont typeface="Arial" pitchFamily="34" charset="0"/>
+        <a:buFont typeface="Arial" panose="020B0604020202020204" pitchFamily="34" charset="0"/>
         <a:buChar char="•"/>
         <a:defRPr sz="2000" kern="1200">
           <a:solidFill>
@@ -740,7 +812,7 @@
         <a:spcBef>
           <a:spcPct val="20000"/>
         </a:spcBef>
-        <a:buFont typeface="Arial" pitchFamily="34" charset="0"/>
+        <a:buFont typeface="Arial" panose="020B0604020202020204" pitchFamily="34" charset="0"/>
         <a:buChar char="•"/>
         <a:defRPr sz="2000" kern="1200">
           <a:solidFill>
@@ -853,12 +925,13 @@
 
 <file path=ppt/slides/slide1.xml><?xml version="1.0" encoding="utf-8"?>
 <p:sld xmlns:a="http://schemas.openxmlformats.org/drawingml/2006/main" xmlns:r="http://schemas.openxmlformats.org/officeDocument/2006/relationships" xmlns:p="http://schemas.openxmlformats.org/presentationml/2006/main">
-  <p:cSld name="Slide 1">
+  <p:cSld>
     <p:bg>
       <p:bgPr>
         <a:solidFill>
           <a:srgbClr val="F8FAFC"/>
         </a:solidFill>
+        <a:effectLst/>
       </p:bgPr>
     </p:bg>
     <p:spTree>
@@ -944,7 +1017,6 @@
             <a:avLst/>
           </a:prstGeom>
           <a:noFill/>
-          <a:ln/>
         </p:spPr>
         <p:txBody>
           <a:bodyPr wrap="square" lIns="0" tIns="0" rIns="0" bIns="0" rtlCol="0" anchor="ctr">
@@ -952,7 +1024,7 @@
           </a:bodyPr>
           <a:lstStyle/>
           <a:p>
-            <a:pPr algn="l" indent="0" marL="0">
+            <a:pPr marL="0" indent="0" algn="l">
               <a:buNone/>
             </a:pPr>
             <a:r>
@@ -960,9 +1032,9 @@
                 <a:solidFill>
                   <a:srgbClr val="FFFFFF"/>
                 </a:solidFill>
-                <a:latin typeface="Microsoft YaHei" pitchFamily="34" charset="0"/>
-                <a:ea typeface="Microsoft YaHei" pitchFamily="34" charset="-122"/>
-                <a:cs typeface="Microsoft YaHei" pitchFamily="34" charset="-120"/>
+                <a:latin typeface="微软雅黑" panose="020B0503020204020204" pitchFamily="34" charset="-122"/>
+                <a:ea typeface="微软雅黑" panose="020B0503020204020204" pitchFamily="34" charset="-122"/>
+                <a:cs typeface="微软雅黑" panose="020B0503020204020204" pitchFamily="34" charset="-120"/>
               </a:rPr>
               <a:t>数据集运营服务管理平台功能架构</a:t>
             </a:r>
@@ -985,7 +1057,6 @@
             <a:avLst/>
           </a:prstGeom>
           <a:noFill/>
-          <a:ln/>
         </p:spPr>
         <p:txBody>
           <a:bodyPr wrap="square" lIns="0" tIns="0" rIns="0" bIns="0" rtlCol="0" anchor="ctr">
@@ -993,7 +1064,7 @@
           </a:bodyPr>
           <a:lstStyle/>
           <a:p>
-            <a:pPr algn="l" indent="0" marL="0">
+            <a:pPr marL="0" indent="0" algn="l">
               <a:buNone/>
             </a:pPr>
             <a:r>
@@ -1001,9 +1072,9 @@
                 <a:solidFill>
                   <a:srgbClr val="DBEAFE"/>
                 </a:solidFill>
-                <a:latin typeface="Microsoft YaHei" pitchFamily="34" charset="0"/>
-                <a:ea typeface="Microsoft YaHei" pitchFamily="34" charset="-122"/>
-                <a:cs typeface="Microsoft YaHei" pitchFamily="34" charset="-120"/>
+                <a:latin typeface="微软雅黑" panose="020B0503020204020204" pitchFamily="34" charset="-122"/>
+                <a:ea typeface="微软雅黑" panose="020B0503020204020204" pitchFamily="34" charset="-122"/>
+                <a:cs typeface="微软雅黑" panose="020B0503020204020204" pitchFamily="34" charset="-120"/>
               </a:rPr>
               <a:t>七类核心业务功能 + 平台服务、对外接口及基础设施等扩展支撑能力</a:t>
             </a:r>
@@ -1026,7 +1097,6 @@
             <a:avLst/>
           </a:prstGeom>
           <a:noFill/>
-          <a:ln/>
         </p:spPr>
         <p:txBody>
           <a:bodyPr wrap="square" lIns="0" tIns="0" rIns="0" bIns="0" rtlCol="0" anchor="ctr">
@@ -1034,7 +1104,7 @@
           </a:bodyPr>
           <a:lstStyle/>
           <a:p>
-            <a:pPr algn="r" indent="0" marL="0">
+            <a:pPr marL="0" indent="0" algn="r">
               <a:buNone/>
             </a:pPr>
             <a:r>
@@ -1042,9 +1112,9 @@
                 <a:solidFill>
                   <a:srgbClr val="DBEAFE"/>
                 </a:solidFill>
-                <a:latin typeface="Microsoft YaHei" pitchFamily="34" charset="0"/>
-                <a:ea typeface="Microsoft YaHei" pitchFamily="34" charset="-122"/>
-                <a:cs typeface="Microsoft YaHei" pitchFamily="34" charset="-120"/>
+                <a:latin typeface="微软雅黑" panose="020B0503020204020204" pitchFamily="34" charset="-122"/>
+                <a:ea typeface="微软雅黑" panose="020B0503020204020204" pitchFamily="34" charset="-122"/>
+                <a:cs typeface="微软雅黑" panose="020B0503020204020204" pitchFamily="34" charset="-120"/>
               </a:rPr>
               <a:t>当前平台功能视图</a:t>
             </a:r>
@@ -1067,7 +1137,6 @@
             <a:avLst/>
           </a:prstGeom>
           <a:noFill/>
-          <a:ln/>
         </p:spPr>
         <p:txBody>
           <a:bodyPr wrap="square" lIns="0" tIns="0" rIns="0" bIns="0" rtlCol="0" anchor="ctr">
@@ -1075,7 +1144,7 @@
           </a:bodyPr>
           <a:lstStyle/>
           <a:p>
-            <a:pPr algn="l" indent="0" marL="0">
+            <a:pPr marL="0" indent="0" algn="l">
               <a:buNone/>
             </a:pPr>
             <a:r>
@@ -1083,9 +1152,9 @@
                 <a:solidFill>
                   <a:srgbClr val="334155"/>
                 </a:solidFill>
-                <a:latin typeface="Microsoft YaHei" pitchFamily="34" charset="0"/>
-                <a:ea typeface="Microsoft YaHei" pitchFamily="34" charset="-122"/>
-                <a:cs typeface="Microsoft YaHei" pitchFamily="34" charset="-120"/>
+                <a:latin typeface="微软雅黑" panose="020B0503020204020204" pitchFamily="34" charset="-122"/>
+                <a:ea typeface="微软雅黑" panose="020B0503020204020204" pitchFamily="34" charset="-122"/>
+                <a:cs typeface="微软雅黑" panose="020B0503020204020204" pitchFamily="34" charset="-120"/>
               </a:rPr>
               <a:t>一、平台服务层</a:t>
             </a:r>
@@ -1146,7 +1215,7 @@
             <a:prstDash val="solid"/>
           </a:ln>
           <a:effectLst>
-            <a:outerShdw sx="100000" sy="100000" kx="0" ky="0" algn="bl" rotWithShape="0" blurRad="25400" dist="50800" dir="2700000">
+            <a:outerShdw blurRad="25400" dist="50800" dir="2700000" algn="bl" rotWithShape="0">
               <a:srgbClr val="172554">
                 <a:alpha val="10000"/>
               </a:srgbClr>
@@ -1196,7 +1265,6 @@
             <a:avLst/>
           </a:prstGeom>
           <a:noFill/>
-          <a:ln/>
         </p:spPr>
         <p:txBody>
           <a:bodyPr wrap="square" lIns="0" tIns="0" rIns="0" bIns="0" rtlCol="0" anchor="ctr">
@@ -1204,7 +1272,7 @@
           </a:bodyPr>
           <a:lstStyle/>
           <a:p>
-            <a:pPr algn="l" indent="0" marL="0">
+            <a:pPr marL="0" indent="0" algn="l">
               <a:buNone/>
             </a:pPr>
             <a:r>
@@ -1212,9 +1280,9 @@
                 <a:solidFill>
                   <a:srgbClr val="0F172A"/>
                 </a:solidFill>
-                <a:latin typeface="Microsoft YaHei" pitchFamily="34" charset="0"/>
-                <a:ea typeface="Microsoft YaHei" pitchFamily="34" charset="-122"/>
-                <a:cs typeface="Microsoft YaHei" pitchFamily="34" charset="-120"/>
+                <a:latin typeface="微软雅黑" panose="020B0503020204020204" pitchFamily="34" charset="-122"/>
+                <a:ea typeface="微软雅黑" panose="020B0503020204020204" pitchFamily="34" charset="-122"/>
+                <a:cs typeface="微软雅黑" panose="020B0503020204020204" pitchFamily="34" charset="-120"/>
               </a:rPr>
               <a:t>用户与企业服务</a:t>
             </a:r>
@@ -1230,14 +1298,13 @@
         </p:nvSpPr>
         <p:spPr>
           <a:xfrm>
-            <a:off x="877824" y="1627632"/>
-            <a:ext cx="1545336" cy="-219456"/>
-          </a:xfrm>
-          <a:prstGeom prst="rect">
-            <a:avLst/>
-          </a:prstGeom>
-          <a:noFill/>
-          <a:ln/>
+            <a:off x="877824" y="1408176"/>
+            <a:ext cx="1545336" cy="219456"/>
+          </a:xfrm>
+          <a:prstGeom prst="rect">
+            <a:avLst/>
+          </a:prstGeom>
+          <a:noFill/>
         </p:spPr>
         <p:txBody>
           <a:bodyPr wrap="square" lIns="127" tIns="127" rIns="127" bIns="127" rtlCol="0" anchor="t">
@@ -1245,7 +1312,7 @@
           </a:bodyPr>
           <a:lstStyle/>
           <a:p>
-            <a:pPr algn="l" indent="0" marL="0">
+            <a:pPr marL="0" indent="0" algn="l">
               <a:buNone/>
             </a:pPr>
             <a:r>
@@ -1253,16 +1320,16 @@
                 <a:solidFill>
                   <a:srgbClr val="334155"/>
                 </a:solidFill>
-                <a:latin typeface="Microsoft YaHei" pitchFamily="34" charset="0"/>
-                <a:ea typeface="Microsoft YaHei" pitchFamily="34" charset="-122"/>
-                <a:cs typeface="Microsoft YaHei" pitchFamily="34" charset="-120"/>
+                <a:latin typeface="微软雅黑" panose="020B0503020204020204" pitchFamily="34" charset="-122"/>
+                <a:ea typeface="微软雅黑" panose="020B0503020204020204" pitchFamily="34" charset="-122"/>
+                <a:cs typeface="微软雅黑" panose="020B0503020204020204" pitchFamily="34" charset="-120"/>
               </a:rPr>
               <a:t>注册、实名认证、企业认证</a:t>
             </a:r>
             <a:endParaRPr lang="en-US" sz="950" dirty="0"/>
           </a:p>
           <a:p>
-            <a:pPr algn="l" indent="0" marL="0">
+            <a:pPr marL="0" indent="0" algn="l">
               <a:buNone/>
             </a:pPr>
             <a:r>
@@ -1270,9 +1337,9 @@
                 <a:solidFill>
                   <a:srgbClr val="334155"/>
                 </a:solidFill>
-                <a:latin typeface="Microsoft YaHei" pitchFamily="34" charset="0"/>
-                <a:ea typeface="Microsoft YaHei" pitchFamily="34" charset="-122"/>
-                <a:cs typeface="Microsoft YaHei" pitchFamily="34" charset="-120"/>
+                <a:latin typeface="微软雅黑" panose="020B0503020204020204" pitchFamily="34" charset="-122"/>
+                <a:ea typeface="微软雅黑" panose="020B0503020204020204" pitchFamily="34" charset="-122"/>
+                <a:cs typeface="微软雅黑" panose="020B0503020204020204" pitchFamily="34" charset="-120"/>
               </a:rPr>
               <a:t>成员、企业角色和邀请</a:t>
             </a:r>
@@ -1306,7 +1373,7 @@
             <a:prstDash val="solid"/>
           </a:ln>
           <a:effectLst>
-            <a:outerShdw sx="100000" sy="100000" kx="0" ky="0" algn="bl" rotWithShape="0" blurRad="25400" dist="50800" dir="2700000">
+            <a:outerShdw blurRad="25400" dist="50800" dir="2700000" algn="bl" rotWithShape="0">
               <a:srgbClr val="172554">
                 <a:alpha val="10000"/>
               </a:srgbClr>
@@ -1356,7 +1423,6 @@
             <a:avLst/>
           </a:prstGeom>
           <a:noFill/>
-          <a:ln/>
         </p:spPr>
         <p:txBody>
           <a:bodyPr wrap="square" lIns="0" tIns="0" rIns="0" bIns="0" rtlCol="0" anchor="ctr">
@@ -1364,7 +1430,7 @@
           </a:bodyPr>
           <a:lstStyle/>
           <a:p>
-            <a:pPr algn="l" indent="0" marL="0">
+            <a:pPr marL="0" indent="0" algn="l">
               <a:buNone/>
             </a:pPr>
             <a:r>
@@ -1372,9 +1438,9 @@
                 <a:solidFill>
                   <a:srgbClr val="0F172A"/>
                 </a:solidFill>
-                <a:latin typeface="Microsoft YaHei" pitchFamily="34" charset="0"/>
-                <a:ea typeface="Microsoft YaHei" pitchFamily="34" charset="-122"/>
-                <a:cs typeface="Microsoft YaHei" pitchFamily="34" charset="-120"/>
+                <a:latin typeface="微软雅黑" panose="020B0503020204020204" pitchFamily="34" charset="-122"/>
+                <a:ea typeface="微软雅黑" panose="020B0503020204020204" pitchFamily="34" charset="-122"/>
+                <a:cs typeface="微软雅黑" panose="020B0503020204020204" pitchFamily="34" charset="-120"/>
               </a:rPr>
               <a:t>统一权限与多租户</a:t>
             </a:r>
@@ -1390,14 +1456,13 @@
         </p:nvSpPr>
         <p:spPr>
           <a:xfrm>
-            <a:off x="2889504" y="1627632"/>
-            <a:ext cx="1545336" cy="-219456"/>
-          </a:xfrm>
-          <a:prstGeom prst="rect">
-            <a:avLst/>
-          </a:prstGeom>
-          <a:noFill/>
-          <a:ln/>
+            <a:off x="2889504" y="1408176"/>
+            <a:ext cx="1545336" cy="219456"/>
+          </a:xfrm>
+          <a:prstGeom prst="rect">
+            <a:avLst/>
+          </a:prstGeom>
+          <a:noFill/>
         </p:spPr>
         <p:txBody>
           <a:bodyPr wrap="square" lIns="127" tIns="127" rIns="127" bIns="127" rtlCol="0" anchor="t">
@@ -1405,7 +1470,7 @@
           </a:bodyPr>
           <a:lstStyle/>
           <a:p>
-            <a:pPr algn="l" indent="0" marL="0">
+            <a:pPr marL="0" indent="0" algn="l">
               <a:buNone/>
             </a:pPr>
             <a:r>
@@ -1413,16 +1478,16 @@
                 <a:solidFill>
                   <a:srgbClr val="334155"/>
                 </a:solidFill>
-                <a:latin typeface="Microsoft YaHei" pitchFamily="34" charset="0"/>
-                <a:ea typeface="Microsoft YaHei" pitchFamily="34" charset="-122"/>
-                <a:cs typeface="Microsoft YaHei" pitchFamily="34" charset="-120"/>
+                <a:latin typeface="微软雅黑" panose="020B0503020204020204" pitchFamily="34" charset="-122"/>
+                <a:ea typeface="微软雅黑" panose="020B0503020204020204" pitchFamily="34" charset="-122"/>
+                <a:cs typeface="微软雅黑" panose="020B0503020204020204" pitchFamily="34" charset="-120"/>
               </a:rPr>
               <a:t>企业主租户、平台 RBAC</a:t>
             </a:r>
             <a:endParaRPr lang="en-US" sz="950" dirty="0"/>
           </a:p>
           <a:p>
-            <a:pPr algn="l" indent="0" marL="0">
+            <a:pPr marL="0" indent="0" algn="l">
               <a:buNone/>
             </a:pPr>
             <a:r>
@@ -1430,9 +1495,9 @@
                 <a:solidFill>
                   <a:srgbClr val="334155"/>
                 </a:solidFill>
-                <a:latin typeface="Microsoft YaHei" pitchFamily="34" charset="0"/>
-                <a:ea typeface="Microsoft YaHei" pitchFamily="34" charset="-122"/>
-                <a:cs typeface="Microsoft YaHei" pitchFamily="34" charset="-120"/>
+                <a:latin typeface="微软雅黑" panose="020B0503020204020204" pitchFamily="34" charset="-122"/>
+                <a:ea typeface="微软雅黑" panose="020B0503020204020204" pitchFamily="34" charset="-122"/>
+                <a:cs typeface="微软雅黑" panose="020B0503020204020204" pitchFamily="34" charset="-120"/>
               </a:rPr>
               <a:t>数据隔离和操作授权</a:t>
             </a:r>
@@ -1466,7 +1531,7 @@
             <a:prstDash val="solid"/>
           </a:ln>
           <a:effectLst>
-            <a:outerShdw sx="100000" sy="100000" kx="0" ky="0" algn="bl" rotWithShape="0" blurRad="25400" dist="50800" dir="2700000">
+            <a:outerShdw blurRad="25400" dist="50800" dir="2700000" algn="bl" rotWithShape="0">
               <a:srgbClr val="172554">
                 <a:alpha val="10000"/>
               </a:srgbClr>
@@ -1516,7 +1581,6 @@
             <a:avLst/>
           </a:prstGeom>
           <a:noFill/>
-          <a:ln/>
         </p:spPr>
         <p:txBody>
           <a:bodyPr wrap="square" lIns="0" tIns="0" rIns="0" bIns="0" rtlCol="0" anchor="ctr">
@@ -1524,7 +1588,7 @@
           </a:bodyPr>
           <a:lstStyle/>
           <a:p>
-            <a:pPr algn="l" indent="0" marL="0">
+            <a:pPr marL="0" indent="0" algn="l">
               <a:buNone/>
             </a:pPr>
             <a:r>
@@ -1532,9 +1596,9 @@
                 <a:solidFill>
                   <a:srgbClr val="0F172A"/>
                 </a:solidFill>
-                <a:latin typeface="Microsoft YaHei" pitchFamily="34" charset="0"/>
-                <a:ea typeface="Microsoft YaHei" pitchFamily="34" charset="-122"/>
-                <a:cs typeface="Microsoft YaHei" pitchFamily="34" charset="-120"/>
+                <a:latin typeface="微软雅黑" panose="020B0503020204020204" pitchFamily="34" charset="-122"/>
+                <a:ea typeface="微软雅黑" panose="020B0503020204020204" pitchFamily="34" charset="-122"/>
+                <a:cs typeface="微软雅黑" panose="020B0503020204020204" pitchFamily="34" charset="-120"/>
               </a:rPr>
               <a:t>统一 API 网关</a:t>
             </a:r>
@@ -1550,14 +1614,13 @@
         </p:nvSpPr>
         <p:spPr>
           <a:xfrm>
-            <a:off x="4901184" y="1627632"/>
-            <a:ext cx="1545336" cy="-219456"/>
-          </a:xfrm>
-          <a:prstGeom prst="rect">
-            <a:avLst/>
-          </a:prstGeom>
-          <a:noFill/>
-          <a:ln/>
+            <a:off x="4901184" y="1408176"/>
+            <a:ext cx="1545336" cy="219456"/>
+          </a:xfrm>
+          <a:prstGeom prst="rect">
+            <a:avLst/>
+          </a:prstGeom>
+          <a:noFill/>
         </p:spPr>
         <p:txBody>
           <a:bodyPr wrap="square" lIns="127" tIns="127" rIns="127" bIns="127" rtlCol="0" anchor="t">
@@ -1565,7 +1628,7 @@
           </a:bodyPr>
           <a:lstStyle/>
           <a:p>
-            <a:pPr algn="l" indent="0" marL="0">
+            <a:pPr marL="0" indent="0" algn="l">
               <a:buNone/>
             </a:pPr>
             <a:r>
@@ -1573,16 +1636,16 @@
                 <a:solidFill>
                   <a:srgbClr val="334155"/>
                 </a:solidFill>
-                <a:latin typeface="Microsoft YaHei" pitchFamily="34" charset="0"/>
-                <a:ea typeface="Microsoft YaHei" pitchFamily="34" charset="-122"/>
-                <a:cs typeface="Microsoft YaHei" pitchFamily="34" charset="-120"/>
+                <a:latin typeface="微软雅黑" panose="020B0503020204020204" pitchFamily="34" charset="-122"/>
+                <a:ea typeface="微软雅黑" panose="020B0503020204020204" pitchFamily="34" charset="-122"/>
+                <a:cs typeface="微软雅黑" panose="020B0503020204020204" pitchFamily="34" charset="-120"/>
               </a:rPr>
               <a:t>OAuth2、API Key、路由</a:t>
             </a:r>
             <a:endParaRPr lang="en-US" sz="950" dirty="0"/>
           </a:p>
           <a:p>
-            <a:pPr algn="l" indent="0" marL="0">
+            <a:pPr marL="0" indent="0" algn="l">
               <a:buNone/>
             </a:pPr>
             <a:r>
@@ -1590,9 +1653,9 @@
                 <a:solidFill>
                   <a:srgbClr val="334155"/>
                 </a:solidFill>
-                <a:latin typeface="Microsoft YaHei" pitchFamily="34" charset="0"/>
-                <a:ea typeface="Microsoft YaHei" pitchFamily="34" charset="-122"/>
-                <a:cs typeface="Microsoft YaHei" pitchFamily="34" charset="-120"/>
+                <a:latin typeface="微软雅黑" panose="020B0503020204020204" pitchFamily="34" charset="-122"/>
+                <a:ea typeface="微软雅黑" panose="020B0503020204020204" pitchFamily="34" charset="-122"/>
+                <a:cs typeface="微软雅黑" panose="020B0503020204020204" pitchFamily="34" charset="-120"/>
               </a:rPr>
               <a:t>限流、配额和调用统计</a:t>
             </a:r>
@@ -1626,7 +1689,7 @@
             <a:prstDash val="solid"/>
           </a:ln>
           <a:effectLst>
-            <a:outerShdw sx="100000" sy="100000" kx="0" ky="0" algn="bl" rotWithShape="0" blurRad="25400" dist="50800" dir="2700000">
+            <a:outerShdw blurRad="25400" dist="50800" dir="2700000" algn="bl" rotWithShape="0">
               <a:srgbClr val="172554">
                 <a:alpha val="10000"/>
               </a:srgbClr>
@@ -1676,7 +1739,6 @@
             <a:avLst/>
           </a:prstGeom>
           <a:noFill/>
-          <a:ln/>
         </p:spPr>
         <p:txBody>
           <a:bodyPr wrap="square" lIns="0" tIns="0" rIns="0" bIns="0" rtlCol="0" anchor="ctr">
@@ -1684,7 +1746,7 @@
           </a:bodyPr>
           <a:lstStyle/>
           <a:p>
-            <a:pPr algn="l" indent="0" marL="0">
+            <a:pPr marL="0" indent="0" algn="l">
               <a:buNone/>
             </a:pPr>
             <a:r>
@@ -1692,9 +1754,9 @@
                 <a:solidFill>
                   <a:srgbClr val="0F172A"/>
                 </a:solidFill>
-                <a:latin typeface="Microsoft YaHei" pitchFamily="34" charset="0"/>
-                <a:ea typeface="Microsoft YaHei" pitchFamily="34" charset="-122"/>
-                <a:cs typeface="Microsoft YaHei" pitchFamily="34" charset="-120"/>
+                <a:latin typeface="微软雅黑" panose="020B0503020204020204" pitchFamily="34" charset="-122"/>
+                <a:ea typeface="微软雅黑" panose="020B0503020204020204" pitchFamily="34" charset="-122"/>
+                <a:cs typeface="微软雅黑" panose="020B0503020204020204" pitchFamily="34" charset="-120"/>
               </a:rPr>
               <a:t>通知与配置中心</a:t>
             </a:r>
@@ -1710,14 +1772,13 @@
         </p:nvSpPr>
         <p:spPr>
           <a:xfrm>
-            <a:off x="6912864" y="1627632"/>
-            <a:ext cx="1545336" cy="-219456"/>
-          </a:xfrm>
-          <a:prstGeom prst="rect">
-            <a:avLst/>
-          </a:prstGeom>
-          <a:noFill/>
-          <a:ln/>
+            <a:off x="6912864" y="1408176"/>
+            <a:ext cx="1545336" cy="219456"/>
+          </a:xfrm>
+          <a:prstGeom prst="rect">
+            <a:avLst/>
+          </a:prstGeom>
+          <a:noFill/>
         </p:spPr>
         <p:txBody>
           <a:bodyPr wrap="square" lIns="127" tIns="127" rIns="127" bIns="127" rtlCol="0" anchor="t">
@@ -1725,7 +1786,7 @@
           </a:bodyPr>
           <a:lstStyle/>
           <a:p>
-            <a:pPr algn="l" indent="0" marL="0">
+            <a:pPr marL="0" indent="0" algn="l">
               <a:buNone/>
             </a:pPr>
             <a:r>
@@ -1733,16 +1794,16 @@
                 <a:solidFill>
                   <a:srgbClr val="334155"/>
                 </a:solidFill>
-                <a:latin typeface="Microsoft YaHei" pitchFamily="34" charset="0"/>
-                <a:ea typeface="Microsoft YaHei" pitchFamily="34" charset="-122"/>
-                <a:cs typeface="Microsoft YaHei" pitchFamily="34" charset="-120"/>
+                <a:latin typeface="微软雅黑" panose="020B0503020204020204" pitchFamily="34" charset="-122"/>
+                <a:ea typeface="微软雅黑" panose="020B0503020204020204" pitchFamily="34" charset="-122"/>
+                <a:cs typeface="微软雅黑" panose="020B0503020204020204" pitchFamily="34" charset="-120"/>
               </a:rPr>
               <a:t>短信/邮件、平台角色</a:t>
             </a:r>
             <a:endParaRPr lang="en-US" sz="950" dirty="0"/>
           </a:p>
           <a:p>
-            <a:pPr algn="l" indent="0" marL="0">
+            <a:pPr marL="0" indent="0" algn="l">
               <a:buNone/>
             </a:pPr>
             <a:r>
@@ -1750,9 +1811,9 @@
                 <a:solidFill>
                   <a:srgbClr val="334155"/>
                 </a:solidFill>
-                <a:latin typeface="Microsoft YaHei" pitchFamily="34" charset="0"/>
-                <a:ea typeface="Microsoft YaHei" pitchFamily="34" charset="-122"/>
-                <a:cs typeface="Microsoft YaHei" pitchFamily="34" charset="-120"/>
+                <a:latin typeface="微软雅黑" panose="020B0503020204020204" pitchFamily="34" charset="-122"/>
+                <a:ea typeface="微软雅黑" panose="020B0503020204020204" pitchFamily="34" charset="-122"/>
+                <a:cs typeface="微软雅黑" panose="020B0503020204020204" pitchFamily="34" charset="-120"/>
               </a:rPr>
               <a:t>消息通知和系统参数</a:t>
             </a:r>
@@ -1786,7 +1847,7 @@
             <a:prstDash val="solid"/>
           </a:ln>
           <a:effectLst>
-            <a:outerShdw sx="100000" sy="100000" kx="0" ky="0" algn="bl" rotWithShape="0" blurRad="25400" dist="50800" dir="2700000">
+            <a:outerShdw blurRad="25400" dist="50800" dir="2700000" algn="bl" rotWithShape="0">
               <a:srgbClr val="172554">
                 <a:alpha val="10000"/>
               </a:srgbClr>
@@ -1836,7 +1897,6 @@
             <a:avLst/>
           </a:prstGeom>
           <a:noFill/>
-          <a:ln/>
         </p:spPr>
         <p:txBody>
           <a:bodyPr wrap="square" lIns="0" tIns="0" rIns="0" bIns="0" rtlCol="0" anchor="ctr">
@@ -1844,7 +1904,7 @@
           </a:bodyPr>
           <a:lstStyle/>
           <a:p>
-            <a:pPr algn="l" indent="0" marL="0">
+            <a:pPr marL="0" indent="0" algn="l">
               <a:buNone/>
             </a:pPr>
             <a:r>
@@ -1852,9 +1912,9 @@
                 <a:solidFill>
                   <a:srgbClr val="0F172A"/>
                 </a:solidFill>
-                <a:latin typeface="Microsoft YaHei" pitchFamily="34" charset="0"/>
-                <a:ea typeface="Microsoft YaHei" pitchFamily="34" charset="-122"/>
-                <a:cs typeface="Microsoft YaHei" pitchFamily="34" charset="-120"/>
+                <a:latin typeface="微软雅黑" panose="020B0503020204020204" pitchFamily="34" charset="-122"/>
+                <a:ea typeface="微软雅黑" panose="020B0503020204020204" pitchFamily="34" charset="-122"/>
+                <a:cs typeface="微软雅黑" panose="020B0503020204020204" pitchFamily="34" charset="-120"/>
               </a:rPr>
               <a:t>对外接口服务</a:t>
             </a:r>
@@ -1870,14 +1930,13 @@
         </p:nvSpPr>
         <p:spPr>
           <a:xfrm>
-            <a:off x="8924544" y="1627632"/>
-            <a:ext cx="2304288" cy="-219456"/>
-          </a:xfrm>
-          <a:prstGeom prst="rect">
-            <a:avLst/>
-          </a:prstGeom>
-          <a:noFill/>
-          <a:ln/>
+            <a:off x="8924544" y="1408176"/>
+            <a:ext cx="2304288" cy="219456"/>
+          </a:xfrm>
+          <a:prstGeom prst="rect">
+            <a:avLst/>
+          </a:prstGeom>
+          <a:noFill/>
         </p:spPr>
         <p:txBody>
           <a:bodyPr wrap="square" lIns="127" tIns="127" rIns="127" bIns="127" rtlCol="0" anchor="t">
@@ -1885,7 +1944,7 @@
           </a:bodyPr>
           <a:lstStyle/>
           <a:p>
-            <a:pPr algn="l" indent="0" marL="0">
+            <a:pPr marL="0" indent="0" algn="l">
               <a:buNone/>
             </a:pPr>
             <a:r>
@@ -1893,16 +1952,16 @@
                 <a:solidFill>
                   <a:srgbClr val="334155"/>
                 </a:solidFill>
-                <a:latin typeface="Microsoft YaHei" pitchFamily="34" charset="0"/>
-                <a:ea typeface="Microsoft YaHei" pitchFamily="34" charset="-122"/>
-                <a:cs typeface="Microsoft YaHei" pitchFamily="34" charset="-120"/>
+                <a:latin typeface="微软雅黑" panose="020B0503020204020204" pitchFamily="34" charset="-122"/>
+                <a:ea typeface="微软雅黑" panose="020B0503020204020204" pitchFamily="34" charset="-122"/>
+                <a:cs typeface="微软雅黑" panose="020B0503020204020204" pitchFamily="34" charset="-120"/>
               </a:rPr>
               <a:t>接入连接器适配、资源发布与鉴权</a:t>
             </a:r>
             <a:endParaRPr lang="en-US" sz="950" dirty="0"/>
           </a:p>
           <a:p>
-            <a:pPr algn="l" indent="0" marL="0">
+            <a:pPr marL="0" indent="0" algn="l">
               <a:buNone/>
             </a:pPr>
             <a:r>
@@ -1910,9 +1969,9 @@
                 <a:solidFill>
                   <a:srgbClr val="334155"/>
                 </a:solidFill>
-                <a:latin typeface="Microsoft YaHei" pitchFamily="34" charset="0"/>
-                <a:ea typeface="Microsoft YaHei" pitchFamily="34" charset="-122"/>
-                <a:cs typeface="Microsoft YaHei" pitchFamily="34" charset="-120"/>
+                <a:latin typeface="微软雅黑" panose="020B0503020204020204" pitchFamily="34" charset="-122"/>
+                <a:ea typeface="微软雅黑" panose="020B0503020204020204" pitchFamily="34" charset="-122"/>
+                <a:cs typeface="微软雅黑" panose="020B0503020204020204" pitchFamily="34" charset="-120"/>
               </a:rPr>
               <a:t>回调、接口文档和审计</a:t>
             </a:r>
@@ -1935,7 +1994,6 @@
             <a:avLst/>
           </a:prstGeom>
           <a:noFill/>
-          <a:ln/>
         </p:spPr>
         <p:txBody>
           <a:bodyPr wrap="square" lIns="0" tIns="0" rIns="0" bIns="0" rtlCol="0" anchor="ctr">
@@ -1943,7 +2001,7 @@
           </a:bodyPr>
           <a:lstStyle/>
           <a:p>
-            <a:pPr algn="l" indent="0" marL="0">
+            <a:pPr marL="0" indent="0" algn="l">
               <a:buNone/>
             </a:pPr>
             <a:r>
@@ -1951,9 +2009,9 @@
                 <a:solidFill>
                   <a:srgbClr val="334155"/>
                 </a:solidFill>
-                <a:latin typeface="Microsoft YaHei" pitchFamily="34" charset="0"/>
-                <a:ea typeface="Microsoft YaHei" pitchFamily="34" charset="-122"/>
-                <a:cs typeface="Microsoft YaHei" pitchFamily="34" charset="-120"/>
+                <a:latin typeface="微软雅黑" panose="020B0503020204020204" pitchFamily="34" charset="-122"/>
+                <a:ea typeface="微软雅黑" panose="020B0503020204020204" pitchFamily="34" charset="-122"/>
+                <a:cs typeface="微软雅黑" panose="020B0503020204020204" pitchFamily="34" charset="-120"/>
               </a:rPr>
               <a:t>二、核心业务功能层（七类核心功能及扩展模块）</a:t>
             </a:r>
@@ -1987,7 +2045,7 @@
             <a:prstDash val="solid"/>
           </a:ln>
           <a:effectLst>
-            <a:outerShdw sx="100000" sy="100000" kx="0" ky="0" algn="bl" rotWithShape="0" blurRad="25400" dist="50800" dir="2700000">
+            <a:outerShdw blurRad="25400" dist="50800" dir="2700000" algn="bl" rotWithShape="0">
               <a:srgbClr val="172554">
                 <a:alpha val="10000"/>
               </a:srgbClr>
@@ -2037,7 +2095,6 @@
             <a:avLst/>
           </a:prstGeom>
           <a:noFill/>
-          <a:ln/>
         </p:spPr>
         <p:txBody>
           <a:bodyPr wrap="square" lIns="0" tIns="0" rIns="0" bIns="0" rtlCol="0" anchor="ctr">
@@ -2045,7 +2102,7 @@
           </a:bodyPr>
           <a:lstStyle/>
           <a:p>
-            <a:pPr algn="l" indent="0" marL="0">
+            <a:pPr marL="0" indent="0" algn="l">
               <a:buNone/>
             </a:pPr>
             <a:r>
@@ -2053,9 +2110,9 @@
                 <a:solidFill>
                   <a:srgbClr val="0F172A"/>
                 </a:solidFill>
-                <a:latin typeface="Microsoft YaHei" pitchFamily="34" charset="0"/>
-                <a:ea typeface="Microsoft YaHei" pitchFamily="34" charset="-122"/>
-                <a:cs typeface="Microsoft YaHei" pitchFamily="34" charset="-120"/>
+                <a:latin typeface="微软雅黑" panose="020B0503020204020204" pitchFamily="34" charset="-122"/>
+                <a:ea typeface="微软雅黑" panose="020B0503020204020204" pitchFamily="34" charset="-122"/>
+                <a:cs typeface="微软雅黑" panose="020B0503020204020204" pitchFamily="34" charset="-120"/>
               </a:rPr>
               <a:t>数据及服务管理</a:t>
             </a:r>
@@ -2078,7 +2135,6 @@
             <a:avLst/>
           </a:prstGeom>
           <a:noFill/>
-          <a:ln/>
         </p:spPr>
         <p:txBody>
           <a:bodyPr wrap="square" lIns="127" tIns="127" rIns="127" bIns="127" rtlCol="0" anchor="t">
@@ -2086,7 +2142,7 @@
           </a:bodyPr>
           <a:lstStyle/>
           <a:p>
-            <a:pPr algn="l" indent="0" marL="0">
+            <a:pPr marL="0" indent="0" algn="l">
               <a:buNone/>
             </a:pPr>
             <a:r>
@@ -2094,16 +2150,16 @@
                 <a:solidFill>
                   <a:srgbClr val="334155"/>
                 </a:solidFill>
-                <a:latin typeface="Microsoft YaHei" pitchFamily="34" charset="0"/>
-                <a:ea typeface="Microsoft YaHei" pitchFamily="34" charset="-122"/>
-                <a:cs typeface="Microsoft YaHei" pitchFamily="34" charset="-120"/>
+                <a:latin typeface="微软雅黑" panose="020B0503020204020204" pitchFamily="34" charset="-122"/>
+                <a:ea typeface="微软雅黑" panose="020B0503020204020204" pitchFamily="34" charset="-122"/>
+                <a:cs typeface="微软雅黑" panose="020B0503020204020204" pitchFamily="34" charset="-120"/>
               </a:rPr>
               <a:t>• 数据集、模型、API、SaaS、报告及咨询登记</a:t>
             </a:r>
             <a:endParaRPr lang="en-US" sz="950" dirty="0"/>
           </a:p>
           <a:p>
-            <a:pPr algn="l" indent="0" marL="0">
+            <a:pPr marL="0" indent="0" algn="l">
               <a:buNone/>
             </a:pPr>
             <a:r>
@@ -2111,16 +2167,16 @@
                 <a:solidFill>
                   <a:srgbClr val="334155"/>
                 </a:solidFill>
-                <a:latin typeface="Microsoft YaHei" pitchFamily="34" charset="0"/>
-                <a:ea typeface="Microsoft YaHei" pitchFamily="34" charset="-122"/>
-                <a:cs typeface="Microsoft YaHei" pitchFamily="34" charset="-120"/>
+                <a:latin typeface="微软雅黑" panose="020B0503020204020204" pitchFamily="34" charset="-122"/>
+                <a:ea typeface="微软雅黑" panose="020B0503020204020204" pitchFamily="34" charset="-122"/>
+                <a:cs typeface="微软雅黑" panose="020B0503020204020204" pitchFamily="34" charset="-120"/>
               </a:rPr>
               <a:t>• 目录、元数据、版本、价格和交付方式</a:t>
             </a:r>
             <a:endParaRPr lang="en-US" sz="950" dirty="0"/>
           </a:p>
           <a:p>
-            <a:pPr algn="l" indent="0" marL="0">
+            <a:pPr marL="0" indent="0" algn="l">
               <a:buNone/>
             </a:pPr>
             <a:r>
@@ -2128,16 +2184,16 @@
                 <a:solidFill>
                   <a:srgbClr val="334155"/>
                 </a:solidFill>
-                <a:latin typeface="Microsoft YaHei" pitchFamily="34" charset="0"/>
-                <a:ea typeface="Microsoft YaHei" pitchFamily="34" charset="-122"/>
-                <a:cs typeface="Microsoft YaHei" pitchFamily="34" charset="-120"/>
+                <a:latin typeface="微软雅黑" panose="020B0503020204020204" pitchFamily="34" charset="-122"/>
+                <a:ea typeface="微软雅黑" panose="020B0503020204020204" pitchFamily="34" charset="-122"/>
+                <a:cs typeface="微软雅黑" panose="020B0503020204020204" pitchFamily="34" charset="-120"/>
               </a:rPr>
               <a:t>• 产品审核、质量审核、安全合规和上架发布</a:t>
             </a:r>
             <a:endParaRPr lang="en-US" sz="950" dirty="0"/>
           </a:p>
           <a:p>
-            <a:pPr algn="l" indent="0" marL="0">
+            <a:pPr marL="0" indent="0" algn="l">
               <a:buNone/>
             </a:pPr>
             <a:r>
@@ -2145,9 +2201,9 @@
                 <a:solidFill>
                   <a:srgbClr val="334155"/>
                 </a:solidFill>
-                <a:latin typeface="Microsoft YaHei" pitchFamily="34" charset="0"/>
-                <a:ea typeface="Microsoft YaHei" pitchFamily="34" charset="-122"/>
-                <a:cs typeface="Microsoft YaHei" pitchFamily="34" charset="-120"/>
+                <a:latin typeface="微软雅黑" panose="020B0503020204020204" pitchFamily="34" charset="-122"/>
+                <a:ea typeface="微软雅黑" panose="020B0503020204020204" pitchFamily="34" charset="-122"/>
+                <a:cs typeface="微软雅黑" panose="020B0503020204020204" pitchFamily="34" charset="-120"/>
               </a:rPr>
               <a:t>• API/SaaS 对接规范、OAuth 凭据和网关配置</a:t>
             </a:r>
@@ -2170,7 +2226,6 @@
             <a:avLst/>
           </a:prstGeom>
           <a:noFill/>
-          <a:ln/>
         </p:spPr>
         <p:txBody>
           <a:bodyPr wrap="square" lIns="0" tIns="0" rIns="0" bIns="0" rtlCol="0" anchor="ctr">
@@ -2178,7 +2233,7 @@
           </a:bodyPr>
           <a:lstStyle/>
           <a:p>
-            <a:pPr algn="l" indent="0" marL="0">
+            <a:pPr marL="0" indent="0" algn="l">
               <a:buNone/>
             </a:pPr>
             <a:r>
@@ -2186,9 +2241,9 @@
                 <a:solidFill>
                   <a:srgbClr val="64748B"/>
                 </a:solidFill>
-                <a:latin typeface="Microsoft YaHei" pitchFamily="34" charset="0"/>
-                <a:ea typeface="Microsoft YaHei" pitchFamily="34" charset="-122"/>
-                <a:cs typeface="Microsoft YaHei" pitchFamily="34" charset="-120"/>
+                <a:latin typeface="微软雅黑" panose="020B0503020204020204" pitchFamily="34" charset="-122"/>
+                <a:ea typeface="微软雅黑" panose="020B0503020204020204" pitchFamily="34" charset="-122"/>
+                <a:cs typeface="微软雅黑" panose="020B0503020204020204" pitchFamily="34" charset="-120"/>
               </a:rPr>
               <a:t>面向数据/服务提供方与平台运营人员</a:t>
             </a:r>
@@ -2222,7 +2277,7 @@
             <a:prstDash val="solid"/>
           </a:ln>
           <a:effectLst>
-            <a:outerShdw sx="100000" sy="100000" kx="0" ky="0" algn="bl" rotWithShape="0" blurRad="25400" dist="50800" dir="2700000">
+            <a:outerShdw blurRad="25400" dist="50800" dir="2700000" algn="bl" rotWithShape="0">
               <a:srgbClr val="172554">
                 <a:alpha val="10000"/>
               </a:srgbClr>
@@ -2272,7 +2327,6 @@
             <a:avLst/>
           </a:prstGeom>
           <a:noFill/>
-          <a:ln/>
         </p:spPr>
         <p:txBody>
           <a:bodyPr wrap="square" lIns="0" tIns="0" rIns="0" bIns="0" rtlCol="0" anchor="ctr">
@@ -2280,7 +2334,7 @@
           </a:bodyPr>
           <a:lstStyle/>
           <a:p>
-            <a:pPr algn="l" indent="0" marL="0">
+            <a:pPr marL="0" indent="0" algn="l">
               <a:buNone/>
             </a:pPr>
             <a:r>
@@ -2288,9 +2342,9 @@
                 <a:solidFill>
                   <a:srgbClr val="0F172A"/>
                 </a:solidFill>
-                <a:latin typeface="Microsoft YaHei" pitchFamily="34" charset="0"/>
-                <a:ea typeface="Microsoft YaHei" pitchFamily="34" charset="-122"/>
-                <a:cs typeface="Microsoft YaHei" pitchFamily="34" charset="-120"/>
+                <a:latin typeface="微软雅黑" panose="020B0503020204020204" pitchFamily="34" charset="-122"/>
+                <a:ea typeface="微软雅黑" panose="020B0503020204020204" pitchFamily="34" charset="-122"/>
+                <a:cs typeface="微软雅黑" panose="020B0503020204020204" pitchFamily="34" charset="-120"/>
               </a:rPr>
               <a:t>订单管理</a:t>
             </a:r>
@@ -2313,7 +2367,6 @@
             <a:avLst/>
           </a:prstGeom>
           <a:noFill/>
-          <a:ln/>
         </p:spPr>
         <p:txBody>
           <a:bodyPr wrap="square" lIns="127" tIns="127" rIns="127" bIns="127" rtlCol="0" anchor="t">
@@ -2321,7 +2374,7 @@
           </a:bodyPr>
           <a:lstStyle/>
           <a:p>
-            <a:pPr algn="l" indent="0" marL="0">
+            <a:pPr marL="0" indent="0" algn="l">
               <a:buNone/>
             </a:pPr>
             <a:r>
@@ -2329,16 +2382,16 @@
                 <a:solidFill>
                   <a:srgbClr val="334155"/>
                 </a:solidFill>
-                <a:latin typeface="Microsoft YaHei" pitchFamily="34" charset="0"/>
-                <a:ea typeface="Microsoft YaHei" pitchFamily="34" charset="-122"/>
-                <a:cs typeface="Microsoft YaHei" pitchFamily="34" charset="-120"/>
+                <a:latin typeface="微软雅黑" panose="020B0503020204020204" pitchFamily="34" charset="-122"/>
+                <a:ea typeface="微软雅黑" panose="020B0503020204020204" pitchFamily="34" charset="-122"/>
+                <a:cs typeface="微软雅黑" panose="020B0503020204020204" pitchFamily="34" charset="-120"/>
               </a:rPr>
               <a:t>• 购物车、订单创建、取消、支付单和人工确认</a:t>
             </a:r>
             <a:endParaRPr lang="en-US" sz="950" dirty="0"/>
           </a:p>
           <a:p>
-            <a:pPr algn="l" indent="0" marL="0">
+            <a:pPr marL="0" indent="0" algn="l">
               <a:buNone/>
             </a:pPr>
             <a:r>
@@ -2346,16 +2399,16 @@
                 <a:solidFill>
                   <a:srgbClr val="334155"/>
                 </a:solidFill>
-                <a:latin typeface="Microsoft YaHei" pitchFamily="34" charset="0"/>
-                <a:ea typeface="Microsoft YaHei" pitchFamily="34" charset="-122"/>
-                <a:cs typeface="Microsoft YaHei" pitchFamily="34" charset="-120"/>
+                <a:latin typeface="微软雅黑" panose="020B0503020204020204" pitchFamily="34" charset="-122"/>
+                <a:ea typeface="微软雅黑" panose="020B0503020204020204" pitchFamily="34" charset="-122"/>
+                <a:cs typeface="微软雅黑" panose="020B0503020204020204" pitchFamily="34" charset="-120"/>
               </a:rPr>
               <a:t>• 订单、支付、交付、售后四域状态机</a:t>
             </a:r>
             <a:endParaRPr lang="en-US" sz="950" dirty="0"/>
           </a:p>
           <a:p>
-            <a:pPr algn="l" indent="0" marL="0">
+            <a:pPr marL="0" indent="0" algn="l">
               <a:buNone/>
             </a:pPr>
             <a:r>
@@ -2363,16 +2416,16 @@
                 <a:solidFill>
                   <a:srgbClr val="334155"/>
                 </a:solidFill>
-                <a:latin typeface="Microsoft YaHei" pitchFamily="34" charset="0"/>
-                <a:ea typeface="Microsoft YaHei" pitchFamily="34" charset="-122"/>
-                <a:cs typeface="Microsoft YaHei" pitchFamily="34" charset="-120"/>
+                <a:latin typeface="微软雅黑" panose="020B0503020204020204" pitchFamily="34" charset="-122"/>
+                <a:ea typeface="微软雅黑" panose="020B0503020204020204" pitchFamily="34" charset="-122"/>
+                <a:cs typeface="微软雅黑" panose="020B0503020204020204" pitchFamily="34" charset="-120"/>
               </a:rPr>
               <a:t>• 订阅开通、续费、升级/降级及差价计算</a:t>
             </a:r>
             <a:endParaRPr lang="en-US" sz="950" dirty="0"/>
           </a:p>
           <a:p>
-            <a:pPr algn="l" indent="0" marL="0">
+            <a:pPr marL="0" indent="0" algn="l">
               <a:buNone/>
             </a:pPr>
             <a:r>
@@ -2380,9 +2433,9 @@
                 <a:solidFill>
                   <a:srgbClr val="334155"/>
                 </a:solidFill>
-                <a:latin typeface="Microsoft YaHei" pitchFamily="34" charset="0"/>
-                <a:ea typeface="Microsoft YaHei" pitchFamily="34" charset="-122"/>
-                <a:cs typeface="Microsoft YaHei" pitchFamily="34" charset="-120"/>
+                <a:latin typeface="微软雅黑" panose="020B0503020204020204" pitchFamily="34" charset="-122"/>
+                <a:ea typeface="微软雅黑" panose="020B0503020204020204" pitchFamily="34" charset="-122"/>
+                <a:cs typeface="微软雅黑" panose="020B0503020204020204" pitchFamily="34" charset="-120"/>
               </a:rPr>
               <a:t>• 退款、原路退回、订单授权和访问回收</a:t>
             </a:r>
@@ -2405,7 +2458,6 @@
             <a:avLst/>
           </a:prstGeom>
           <a:noFill/>
-          <a:ln/>
         </p:spPr>
         <p:txBody>
           <a:bodyPr wrap="square" lIns="0" tIns="0" rIns="0" bIns="0" rtlCol="0" anchor="ctr">
@@ -2413,7 +2465,7 @@
           </a:bodyPr>
           <a:lstStyle/>
           <a:p>
-            <a:pPr algn="l" indent="0" marL="0">
+            <a:pPr marL="0" indent="0" algn="l">
               <a:buNone/>
             </a:pPr>
             <a:r>
@@ -2421,9 +2473,9 @@
                 <a:solidFill>
                   <a:srgbClr val="64748B"/>
                 </a:solidFill>
-                <a:latin typeface="Microsoft YaHei" pitchFamily="34" charset="0"/>
-                <a:ea typeface="Microsoft YaHei" pitchFamily="34" charset="-122"/>
-                <a:cs typeface="Microsoft YaHei" pitchFamily="34" charset="-120"/>
+                <a:latin typeface="微软雅黑" panose="020B0503020204020204" pitchFamily="34" charset="-122"/>
+                <a:ea typeface="微软雅黑" panose="020B0503020204020204" pitchFamily="34" charset="-122"/>
+                <a:cs typeface="微软雅黑" panose="020B0503020204020204" pitchFamily="34" charset="-120"/>
               </a:rPr>
               <a:t>面向已实名个人用户与企业租户</a:t>
             </a:r>
@@ -2457,7 +2509,7 @@
             <a:prstDash val="solid"/>
           </a:ln>
           <a:effectLst>
-            <a:outerShdw sx="100000" sy="100000" kx="0" ky="0" algn="bl" rotWithShape="0" blurRad="25400" dist="50800" dir="2700000">
+            <a:outerShdw blurRad="25400" dist="50800" dir="2700000" algn="bl" rotWithShape="0">
               <a:srgbClr val="172554">
                 <a:alpha val="10000"/>
               </a:srgbClr>
@@ -2507,7 +2559,6 @@
             <a:avLst/>
           </a:prstGeom>
           <a:noFill/>
-          <a:ln/>
         </p:spPr>
         <p:txBody>
           <a:bodyPr wrap="square" lIns="0" tIns="0" rIns="0" bIns="0" rtlCol="0" anchor="ctr">
@@ -2515,7 +2566,7 @@
           </a:bodyPr>
           <a:lstStyle/>
           <a:p>
-            <a:pPr algn="l" indent="0" marL="0">
+            <a:pPr marL="0" indent="0" algn="l">
               <a:buNone/>
             </a:pPr>
             <a:r>
@@ -2523,9 +2574,9 @@
                 <a:solidFill>
                   <a:srgbClr val="0F172A"/>
                 </a:solidFill>
-                <a:latin typeface="Microsoft YaHei" pitchFamily="34" charset="0"/>
-                <a:ea typeface="Microsoft YaHei" pitchFamily="34" charset="-122"/>
-                <a:cs typeface="Microsoft YaHei" pitchFamily="34" charset="-120"/>
+                <a:latin typeface="微软雅黑" panose="020B0503020204020204" pitchFamily="34" charset="-122"/>
+                <a:ea typeface="微软雅黑" panose="020B0503020204020204" pitchFamily="34" charset="-122"/>
+                <a:cs typeface="微软雅黑" panose="020B0503020204020204" pitchFamily="34" charset="-120"/>
               </a:rPr>
               <a:t>数据及服务交付管理</a:t>
             </a:r>
@@ -2548,7 +2599,6 @@
             <a:avLst/>
           </a:prstGeom>
           <a:noFill/>
-          <a:ln/>
         </p:spPr>
         <p:txBody>
           <a:bodyPr wrap="square" lIns="127" tIns="127" rIns="127" bIns="127" rtlCol="0" anchor="t">
@@ -2556,7 +2606,7 @@
           </a:bodyPr>
           <a:lstStyle/>
           <a:p>
-            <a:pPr algn="l" indent="0" marL="0">
+            <a:pPr marL="0" indent="0" algn="l">
               <a:buNone/>
             </a:pPr>
             <a:r>
@@ -2564,16 +2614,16 @@
                 <a:solidFill>
                   <a:srgbClr val="334155"/>
                 </a:solidFill>
-                <a:latin typeface="Microsoft YaHei" pitchFamily="34" charset="0"/>
-                <a:ea typeface="Microsoft YaHei" pitchFamily="34" charset="-122"/>
-                <a:cs typeface="Microsoft YaHei" pitchFamily="34" charset="-120"/>
+                <a:latin typeface="微软雅黑" panose="020B0503020204020204" pitchFamily="34" charset="-122"/>
+                <a:ea typeface="微软雅黑" panose="020B0503020204020204" pitchFamily="34" charset="-122"/>
+                <a:cs typeface="微软雅黑" panose="020B0503020204020204" pitchFamily="34" charset="-120"/>
               </a:rPr>
               <a:t>• 文件、对象存储、API、模型 API 交付</a:t>
             </a:r>
             <a:endParaRPr lang="en-US" sz="950" dirty="0"/>
           </a:p>
           <a:p>
-            <a:pPr algn="l" indent="0" marL="0">
+            <a:pPr marL="0" indent="0" algn="l">
               <a:buNone/>
             </a:pPr>
             <a:r>
@@ -2581,16 +2631,16 @@
                 <a:solidFill>
                   <a:srgbClr val="334155"/>
                 </a:solidFill>
-                <a:latin typeface="Microsoft YaHei" pitchFamily="34" charset="0"/>
-                <a:ea typeface="Microsoft YaHei" pitchFamily="34" charset="-122"/>
-                <a:cs typeface="Microsoft YaHei" pitchFamily="34" charset="-120"/>
+                <a:latin typeface="微软雅黑" panose="020B0503020204020204" pitchFamily="34" charset="-122"/>
+                <a:ea typeface="微软雅黑" panose="020B0503020204020204" pitchFamily="34" charset="-122"/>
+                <a:cs typeface="微软雅黑" panose="020B0503020204020204" pitchFamily="34" charset="-120"/>
               </a:rPr>
               <a:t>• SaaS 租户开通、版本切换和权限开通</a:t>
             </a:r>
             <a:endParaRPr lang="en-US" sz="950" dirty="0"/>
           </a:p>
           <a:p>
-            <a:pPr algn="l" indent="0" marL="0">
+            <a:pPr marL="0" indent="0" algn="l">
               <a:buNone/>
             </a:pPr>
             <a:r>
@@ -2598,16 +2648,16 @@
                 <a:solidFill>
                   <a:srgbClr val="334155"/>
                 </a:solidFill>
-                <a:latin typeface="Microsoft YaHei" pitchFamily="34" charset="0"/>
-                <a:ea typeface="Microsoft YaHei" pitchFamily="34" charset="-122"/>
-                <a:cs typeface="Microsoft YaHei" pitchFamily="34" charset="-120"/>
+                <a:latin typeface="微软雅黑" panose="020B0503020204020204" pitchFamily="34" charset="-122"/>
+                <a:ea typeface="微软雅黑" panose="020B0503020204020204" pitchFamily="34" charset="-122"/>
+                <a:cs typeface="微软雅黑" panose="020B0503020204020204" pitchFamily="34" charset="-120"/>
               </a:rPr>
               <a:t>• 用户、部门与第三方 SaaS 系统同步</a:t>
             </a:r>
             <a:endParaRPr lang="en-US" sz="950" dirty="0"/>
           </a:p>
           <a:p>
-            <a:pPr algn="l" indent="0" marL="0">
+            <a:pPr marL="0" indent="0" algn="l">
               <a:buNone/>
             </a:pPr>
             <a:r>
@@ -2615,9 +2665,9 @@
                 <a:solidFill>
                   <a:srgbClr val="334155"/>
                 </a:solidFill>
-                <a:latin typeface="Microsoft YaHei" pitchFamily="34" charset="0"/>
-                <a:ea typeface="Microsoft YaHei" pitchFamily="34" charset="-122"/>
-                <a:cs typeface="Microsoft YaHei" pitchFamily="34" charset="-120"/>
+                <a:latin typeface="微软雅黑" panose="020B0503020204020204" pitchFamily="34" charset="-122"/>
+                <a:ea typeface="微软雅黑" panose="020B0503020204020204" pitchFamily="34" charset="-122"/>
+                <a:cs typeface="微软雅黑" panose="020B0503020204020204" pitchFamily="34" charset="-120"/>
               </a:rPr>
               <a:t>• 交付任务、验收确认、售后和状态跟踪</a:t>
             </a:r>
@@ -2640,7 +2690,6 @@
             <a:avLst/>
           </a:prstGeom>
           <a:noFill/>
-          <a:ln/>
         </p:spPr>
         <p:txBody>
           <a:bodyPr wrap="square" lIns="0" tIns="0" rIns="0" bIns="0" rtlCol="0" anchor="ctr">
@@ -2648,7 +2697,7 @@
           </a:bodyPr>
           <a:lstStyle/>
           <a:p>
-            <a:pPr algn="l" indent="0" marL="0">
+            <a:pPr marL="0" indent="0" algn="l">
               <a:buNone/>
             </a:pPr>
             <a:r>
@@ -2656,9 +2705,9 @@
                 <a:solidFill>
                   <a:srgbClr val="64748B"/>
                 </a:solidFill>
-                <a:latin typeface="Microsoft YaHei" pitchFamily="34" charset="0"/>
-                <a:ea typeface="Microsoft YaHei" pitchFamily="34" charset="-122"/>
-                <a:cs typeface="Microsoft YaHei" pitchFamily="34" charset="-120"/>
+                <a:latin typeface="微软雅黑" panose="020B0503020204020204" pitchFamily="34" charset="-122"/>
+                <a:ea typeface="微软雅黑" panose="020B0503020204020204" pitchFamily="34" charset="-122"/>
+                <a:cs typeface="微软雅黑" panose="020B0503020204020204" pitchFamily="34" charset="-120"/>
               </a:rPr>
               <a:t>支撑标准化、可追踪、可审计交付</a:t>
             </a:r>
@@ -2692,7 +2741,7 @@
             <a:prstDash val="solid"/>
           </a:ln>
           <a:effectLst>
-            <a:outerShdw sx="100000" sy="100000" kx="0" ky="0" algn="bl" rotWithShape="0" blurRad="25400" dist="50800" dir="2700000">
+            <a:outerShdw blurRad="25400" dist="50800" dir="2700000" algn="bl" rotWithShape="0">
               <a:srgbClr val="172554">
                 <a:alpha val="10000"/>
               </a:srgbClr>
@@ -2742,7 +2791,6 @@
             <a:avLst/>
           </a:prstGeom>
           <a:noFill/>
-          <a:ln/>
         </p:spPr>
         <p:txBody>
           <a:bodyPr wrap="square" lIns="0" tIns="0" rIns="0" bIns="0" rtlCol="0" anchor="ctr">
@@ -2750,7 +2798,7 @@
           </a:bodyPr>
           <a:lstStyle/>
           <a:p>
-            <a:pPr algn="l" indent="0" marL="0">
+            <a:pPr marL="0" indent="0" algn="l">
               <a:buNone/>
             </a:pPr>
             <a:r>
@@ -2758,9 +2806,9 @@
                 <a:solidFill>
                   <a:srgbClr val="0F172A"/>
                 </a:solidFill>
-                <a:latin typeface="Microsoft YaHei" pitchFamily="34" charset="0"/>
-                <a:ea typeface="Microsoft YaHei" pitchFamily="34" charset="-122"/>
-                <a:cs typeface="Microsoft YaHei" pitchFamily="34" charset="-120"/>
+                <a:latin typeface="微软雅黑" panose="020B0503020204020204" pitchFamily="34" charset="-122"/>
+                <a:ea typeface="微软雅黑" panose="020B0503020204020204" pitchFamily="34" charset="-122"/>
+                <a:cs typeface="微软雅黑" panose="020B0503020204020204" pitchFamily="34" charset="-120"/>
               </a:rPr>
               <a:t>清算管理</a:t>
             </a:r>
@@ -2783,7 +2831,6 @@
             <a:avLst/>
           </a:prstGeom>
           <a:noFill/>
-          <a:ln/>
         </p:spPr>
         <p:txBody>
           <a:bodyPr wrap="square" lIns="127" tIns="127" rIns="127" bIns="127" rtlCol="0" anchor="t">
@@ -2791,7 +2838,7 @@
           </a:bodyPr>
           <a:lstStyle/>
           <a:p>
-            <a:pPr algn="l" indent="0" marL="0">
+            <a:pPr marL="0" indent="0" algn="l">
               <a:buNone/>
             </a:pPr>
             <a:r>
@@ -2799,16 +2846,16 @@
                 <a:solidFill>
                   <a:srgbClr val="334155"/>
                 </a:solidFill>
-                <a:latin typeface="Microsoft YaHei" pitchFamily="34" charset="0"/>
-                <a:ea typeface="Microsoft YaHei" pitchFamily="34" charset="-122"/>
-                <a:cs typeface="Microsoft YaHei" pitchFamily="34" charset="-120"/>
+                <a:latin typeface="微软雅黑" panose="020B0503020204020204" pitchFamily="34" charset="-122"/>
+                <a:ea typeface="微软雅黑" panose="020B0503020204020204" pitchFamily="34" charset="-122"/>
+                <a:cs typeface="微软雅黑" panose="020B0503020204020204" pitchFamily="34" charset="-120"/>
               </a:rPr>
               <a:t>• 平台服务费、提供方和数据服务方分成</a:t>
             </a:r>
             <a:endParaRPr lang="en-US" sz="950" dirty="0"/>
           </a:p>
           <a:p>
-            <a:pPr algn="l" indent="0" marL="0">
+            <a:pPr marL="0" indent="0" algn="l">
               <a:buNone/>
             </a:pPr>
             <a:r>
@@ -2816,16 +2863,16 @@
                 <a:solidFill>
                   <a:srgbClr val="334155"/>
                 </a:solidFill>
-                <a:latin typeface="Microsoft YaHei" pitchFamily="34" charset="0"/>
-                <a:ea typeface="Microsoft YaHei" pitchFamily="34" charset="-122"/>
-                <a:cs typeface="Microsoft YaHei" pitchFamily="34" charset="-120"/>
+                <a:latin typeface="微软雅黑" panose="020B0503020204020204" pitchFamily="34" charset="-122"/>
+                <a:ea typeface="微软雅黑" panose="020B0503020204020204" pitchFamily="34" charset="-122"/>
+                <a:cs typeface="微软雅黑" panose="020B0503020204020204" pitchFamily="34" charset="-120"/>
               </a:rPr>
               <a:t>• 专家费、渠道费、税费等多方费用计算</a:t>
             </a:r>
             <a:endParaRPr lang="en-US" sz="950" dirty="0"/>
           </a:p>
           <a:p>
-            <a:pPr algn="l" indent="0" marL="0">
+            <a:pPr marL="0" indent="0" algn="l">
               <a:buNone/>
             </a:pPr>
             <a:r>
@@ -2833,16 +2880,16 @@
                 <a:solidFill>
                   <a:srgbClr val="334155"/>
                 </a:solidFill>
-                <a:latin typeface="Microsoft YaHei" pitchFamily="34" charset="0"/>
-                <a:ea typeface="Microsoft YaHei" pitchFamily="34" charset="-122"/>
-                <a:cs typeface="Microsoft YaHei" pitchFamily="34" charset="-120"/>
+                <a:latin typeface="微软雅黑" panose="020B0503020204020204" pitchFamily="34" charset="-122"/>
+                <a:ea typeface="微软雅黑" panose="020B0503020204020204" pitchFamily="34" charset="-122"/>
+                <a:cs typeface="微软雅黑" panose="020B0503020204020204" pitchFamily="34" charset="-120"/>
               </a:rPr>
               <a:t>• 订单支付、退款和分账追回/抵扣</a:t>
             </a:r>
             <a:endParaRPr lang="en-US" sz="950" dirty="0"/>
           </a:p>
           <a:p>
-            <a:pPr algn="l" indent="0" marL="0">
+            <a:pPr marL="0" indent="0" algn="l">
               <a:buNone/>
             </a:pPr>
             <a:r>
@@ -2850,9 +2897,9 @@
                 <a:solidFill>
                   <a:srgbClr val="334155"/>
                 </a:solidFill>
-                <a:latin typeface="Microsoft YaHei" pitchFamily="34" charset="0"/>
-                <a:ea typeface="Microsoft YaHei" pitchFamily="34" charset="-122"/>
-                <a:cs typeface="Microsoft YaHei" pitchFamily="34" charset="-120"/>
+                <a:latin typeface="微软雅黑" panose="020B0503020204020204" pitchFamily="34" charset="-122"/>
+                <a:ea typeface="微软雅黑" panose="020B0503020204020204" pitchFamily="34" charset="-122"/>
+                <a:cs typeface="微软雅黑" panose="020B0503020204020204" pitchFamily="34" charset="-120"/>
               </a:rPr>
               <a:t>• 清算单、台账、调整、锁定和复核</a:t>
             </a:r>
@@ -2875,7 +2922,6 @@
             <a:avLst/>
           </a:prstGeom>
           <a:noFill/>
-          <a:ln/>
         </p:spPr>
         <p:txBody>
           <a:bodyPr wrap="square" lIns="0" tIns="0" rIns="0" bIns="0" rtlCol="0" anchor="ctr">
@@ -2883,7 +2929,7 @@
           </a:bodyPr>
           <a:lstStyle/>
           <a:p>
-            <a:pPr algn="l" indent="0" marL="0">
+            <a:pPr marL="0" indent="0" algn="l">
               <a:buNone/>
             </a:pPr>
             <a:r>
@@ -2891,9 +2937,9 @@
                 <a:solidFill>
                   <a:srgbClr val="64748B"/>
                 </a:solidFill>
-                <a:latin typeface="Microsoft YaHei" pitchFamily="34" charset="0"/>
-                <a:ea typeface="Microsoft YaHei" pitchFamily="34" charset="-122"/>
-                <a:cs typeface="Microsoft YaHei" pitchFamily="34" charset="-120"/>
+                <a:latin typeface="微软雅黑" panose="020B0503020204020204" pitchFamily="34" charset="-122"/>
+                <a:ea typeface="微软雅黑" panose="020B0503020204020204" pitchFamily="34" charset="-122"/>
+                <a:cs typeface="微软雅黑" panose="020B0503020204020204" pitchFamily="34" charset="-120"/>
               </a:rPr>
               <a:t>确保交易金额可计算、可核对、可追溯</a:t>
             </a:r>
@@ -2927,7 +2973,7 @@
             <a:prstDash val="solid"/>
           </a:ln>
           <a:effectLst>
-            <a:outerShdw sx="100000" sy="100000" kx="0" ky="0" algn="bl" rotWithShape="0" blurRad="25400" dist="50800" dir="2700000">
+            <a:outerShdw blurRad="25400" dist="50800" dir="2700000" algn="bl" rotWithShape="0">
               <a:srgbClr val="172554">
                 <a:alpha val="10000"/>
               </a:srgbClr>
@@ -2977,7 +3023,6 @@
             <a:avLst/>
           </a:prstGeom>
           <a:noFill/>
-          <a:ln/>
         </p:spPr>
         <p:txBody>
           <a:bodyPr wrap="square" lIns="0" tIns="0" rIns="0" bIns="0" rtlCol="0" anchor="ctr">
@@ -2985,7 +3030,7 @@
           </a:bodyPr>
           <a:lstStyle/>
           <a:p>
-            <a:pPr algn="l" indent="0" marL="0">
+            <a:pPr marL="0" indent="0" algn="l">
               <a:buNone/>
             </a:pPr>
             <a:r>
@@ -2993,9 +3038,9 @@
                 <a:solidFill>
                   <a:srgbClr val="0F172A"/>
                 </a:solidFill>
-                <a:latin typeface="Microsoft YaHei" pitchFamily="34" charset="0"/>
-                <a:ea typeface="Microsoft YaHei" pitchFamily="34" charset="-122"/>
-                <a:cs typeface="Microsoft YaHei" pitchFamily="34" charset="-120"/>
+                <a:latin typeface="微软雅黑" panose="020B0503020204020204" pitchFamily="34" charset="-122"/>
+                <a:ea typeface="微软雅黑" panose="020B0503020204020204" pitchFamily="34" charset="-122"/>
+                <a:cs typeface="微软雅黑" panose="020B0503020204020204" pitchFamily="34" charset="-120"/>
               </a:rPr>
               <a:t>审计管理</a:t>
             </a:r>
@@ -3018,7 +3063,6 @@
             <a:avLst/>
           </a:prstGeom>
           <a:noFill/>
-          <a:ln/>
         </p:spPr>
         <p:txBody>
           <a:bodyPr wrap="square" lIns="127" tIns="127" rIns="127" bIns="127" rtlCol="0" anchor="t">
@@ -3026,7 +3070,7 @@
           </a:bodyPr>
           <a:lstStyle/>
           <a:p>
-            <a:pPr algn="l" indent="0" marL="0">
+            <a:pPr marL="0" indent="0" algn="l">
               <a:buNone/>
             </a:pPr>
             <a:r>
@@ -3034,16 +3078,16 @@
                 <a:solidFill>
                   <a:srgbClr val="334155"/>
                 </a:solidFill>
-                <a:latin typeface="Microsoft YaHei" pitchFamily="34" charset="0"/>
-                <a:ea typeface="Microsoft YaHei" pitchFamily="34" charset="-122"/>
-                <a:cs typeface="Microsoft YaHei" pitchFamily="34" charset="-120"/>
+                <a:latin typeface="微软雅黑" panose="020B0503020204020204" pitchFamily="34" charset="-122"/>
+                <a:ea typeface="微软雅黑" panose="020B0503020204020204" pitchFamily="34" charset="-122"/>
+                <a:cs typeface="微软雅黑" panose="020B0503020204020204" pitchFamily="34" charset="-120"/>
               </a:rPr>
               <a:t>• 登录、认证、权限、产品和订单操作留痕</a:t>
             </a:r>
             <a:endParaRPr lang="en-US" sz="950" dirty="0"/>
           </a:p>
           <a:p>
-            <a:pPr algn="l" indent="0" marL="0">
+            <a:pPr marL="0" indent="0" algn="l">
               <a:buNone/>
             </a:pPr>
             <a:r>
@@ -3051,16 +3095,16 @@
                 <a:solidFill>
                   <a:srgbClr val="334155"/>
                 </a:solidFill>
-                <a:latin typeface="Microsoft YaHei" pitchFamily="34" charset="0"/>
-                <a:ea typeface="Microsoft YaHei" pitchFamily="34" charset="-122"/>
-                <a:cs typeface="Microsoft YaHei" pitchFamily="34" charset="-120"/>
+                <a:latin typeface="微软雅黑" panose="020B0503020204020204" pitchFamily="34" charset="-122"/>
+                <a:ea typeface="微软雅黑" panose="020B0503020204020204" pitchFamily="34" charset="-122"/>
+                <a:cs typeface="微软雅黑" panose="020B0503020204020204" pitchFamily="34" charset="-120"/>
               </a:rPr>
               <a:t>• 发布、凭据、交付、退款和清算审计</a:t>
             </a:r>
             <a:endParaRPr lang="en-US" sz="950" dirty="0"/>
           </a:p>
           <a:p>
-            <a:pPr algn="l" indent="0" marL="0">
+            <a:pPr marL="0" indent="0" algn="l">
               <a:buNone/>
             </a:pPr>
             <a:r>
@@ -3068,16 +3112,16 @@
                 <a:solidFill>
                   <a:srgbClr val="334155"/>
                 </a:solidFill>
-                <a:latin typeface="Microsoft YaHei" pitchFamily="34" charset="0"/>
-                <a:ea typeface="Microsoft YaHei" pitchFamily="34" charset="-122"/>
-                <a:cs typeface="Microsoft YaHei" pitchFamily="34" charset="-120"/>
+                <a:latin typeface="微软雅黑" panose="020B0503020204020204" pitchFamily="34" charset="-122"/>
+                <a:ea typeface="微软雅黑" panose="020B0503020204020204" pitchFamily="34" charset="-122"/>
+                <a:cs typeface="微软雅黑" panose="020B0503020204020204" pitchFamily="34" charset="-120"/>
               </a:rPr>
               <a:t>• 按租户、用户、资源和时间检索</a:t>
             </a:r>
             <a:endParaRPr lang="en-US" sz="950" dirty="0"/>
           </a:p>
           <a:p>
-            <a:pPr algn="l" indent="0" marL="0">
+            <a:pPr marL="0" indent="0" algn="l">
               <a:buNone/>
             </a:pPr>
             <a:r>
@@ -3085,9 +3129,9 @@
                 <a:solidFill>
                   <a:srgbClr val="334155"/>
                 </a:solidFill>
-                <a:latin typeface="Microsoft YaHei" pitchFamily="34" charset="0"/>
-                <a:ea typeface="Microsoft YaHei" pitchFamily="34" charset="-122"/>
-                <a:cs typeface="Microsoft YaHei" pitchFamily="34" charset="-120"/>
+                <a:latin typeface="微软雅黑" panose="020B0503020204020204" pitchFamily="34" charset="-122"/>
+                <a:ea typeface="微软雅黑" panose="020B0503020204020204" pitchFamily="34" charset="-122"/>
+                <a:cs typeface="微软雅黑" panose="020B0503020204020204" pitchFamily="34" charset="-120"/>
               </a:rPr>
               <a:t>• 异常访问、网关错误和告警关联</a:t>
             </a:r>
@@ -3110,7 +3154,6 @@
             <a:avLst/>
           </a:prstGeom>
           <a:noFill/>
-          <a:ln/>
         </p:spPr>
         <p:txBody>
           <a:bodyPr wrap="square" lIns="0" tIns="0" rIns="0" bIns="0" rtlCol="0" anchor="ctr">
@@ -3118,7 +3161,7 @@
           </a:bodyPr>
           <a:lstStyle/>
           <a:p>
-            <a:pPr algn="l" indent="0" marL="0">
+            <a:pPr marL="0" indent="0" algn="l">
               <a:buNone/>
             </a:pPr>
             <a:r>
@@ -3126,9 +3169,9 @@
                 <a:solidFill>
                   <a:srgbClr val="64748B"/>
                 </a:solidFill>
-                <a:latin typeface="Microsoft YaHei" pitchFamily="34" charset="0"/>
-                <a:ea typeface="Microsoft YaHei" pitchFamily="34" charset="-122"/>
-                <a:cs typeface="Microsoft YaHei" pitchFamily="34" charset="-120"/>
+                <a:latin typeface="微软雅黑" panose="020B0503020204020204" pitchFamily="34" charset="-122"/>
+                <a:ea typeface="微软雅黑" panose="020B0503020204020204" pitchFamily="34" charset="-122"/>
+                <a:cs typeface="微软雅黑" panose="020B0503020204020204" pitchFamily="34" charset="-120"/>
               </a:rPr>
               <a:t>形成业务、技术和安全合规证据链</a:t>
             </a:r>
@@ -3162,7 +3205,7 @@
             <a:prstDash val="solid"/>
           </a:ln>
           <a:effectLst>
-            <a:outerShdw sx="100000" sy="100000" kx="0" ky="0" algn="bl" rotWithShape="0" blurRad="25400" dist="50800" dir="2700000">
+            <a:outerShdw blurRad="25400" dist="50800" dir="2700000" algn="bl" rotWithShape="0">
               <a:srgbClr val="172554">
                 <a:alpha val="10000"/>
               </a:srgbClr>
@@ -3212,7 +3255,6 @@
             <a:avLst/>
           </a:prstGeom>
           <a:noFill/>
-          <a:ln/>
         </p:spPr>
         <p:txBody>
           <a:bodyPr wrap="square" lIns="0" tIns="0" rIns="0" bIns="0" rtlCol="0" anchor="ctr">
@@ -3220,7 +3262,7 @@
           </a:bodyPr>
           <a:lstStyle/>
           <a:p>
-            <a:pPr algn="l" indent="0" marL="0">
+            <a:pPr marL="0" indent="0" algn="l">
               <a:buNone/>
             </a:pPr>
             <a:r>
@@ -3228,9 +3270,9 @@
                 <a:solidFill>
                   <a:srgbClr val="0F172A"/>
                 </a:solidFill>
-                <a:latin typeface="Microsoft YaHei" pitchFamily="34" charset="0"/>
-                <a:ea typeface="Microsoft YaHei" pitchFamily="34" charset="-122"/>
-                <a:cs typeface="Microsoft YaHei" pitchFamily="34" charset="-120"/>
+                <a:latin typeface="微软雅黑" panose="020B0503020204020204" pitchFamily="34" charset="-122"/>
+                <a:ea typeface="微软雅黑" panose="020B0503020204020204" pitchFamily="34" charset="-122"/>
+                <a:cs typeface="微软雅黑" panose="020B0503020204020204" pitchFamily="34" charset="-120"/>
               </a:rPr>
               <a:t>运营平台服务</a:t>
             </a:r>
@@ -3253,7 +3295,6 @@
             <a:avLst/>
           </a:prstGeom>
           <a:noFill/>
-          <a:ln/>
         </p:spPr>
         <p:txBody>
           <a:bodyPr wrap="square" lIns="127" tIns="127" rIns="127" bIns="127" rtlCol="0" anchor="t">
@@ -3261,7 +3302,7 @@
           </a:bodyPr>
           <a:lstStyle/>
           <a:p>
-            <a:pPr algn="l" indent="0" marL="0">
+            <a:pPr marL="0" indent="0" algn="l">
               <a:buNone/>
             </a:pPr>
             <a:r>
@@ -3269,16 +3310,16 @@
                 <a:solidFill>
                   <a:srgbClr val="334155"/>
                 </a:solidFill>
-                <a:latin typeface="Microsoft YaHei" pitchFamily="34" charset="0"/>
-                <a:ea typeface="Microsoft YaHei" pitchFamily="34" charset="-122"/>
-                <a:cs typeface="Microsoft YaHei" pitchFamily="34" charset="-120"/>
+                <a:latin typeface="微软雅黑" panose="020B0503020204020204" pitchFamily="34" charset="-122"/>
+                <a:ea typeface="微软雅黑" panose="020B0503020204020204" pitchFamily="34" charset="-122"/>
+                <a:cs typeface="微软雅黑" panose="020B0503020204020204" pitchFamily="34" charset="-120"/>
               </a:rPr>
               <a:t>• 平台运营、审核、质量、安全和交付角色协同</a:t>
             </a:r>
             <a:endParaRPr lang="en-US" sz="950" dirty="0"/>
           </a:p>
           <a:p>
-            <a:pPr algn="l" indent="0" marL="0">
+            <a:pPr marL="0" indent="0" algn="l">
               <a:buNone/>
             </a:pPr>
             <a:r>
@@ -3286,16 +3327,16 @@
                 <a:solidFill>
                   <a:srgbClr val="334155"/>
                 </a:solidFill>
-                <a:latin typeface="Microsoft YaHei" pitchFamily="34" charset="0"/>
-                <a:ea typeface="Microsoft YaHei" pitchFamily="34" charset="-122"/>
-                <a:cs typeface="Microsoft YaHei" pitchFamily="34" charset="-120"/>
+                <a:latin typeface="微软雅黑" panose="020B0503020204020204" pitchFamily="34" charset="-122"/>
+                <a:ea typeface="微软雅黑" panose="020B0503020204020204" pitchFamily="34" charset="-122"/>
+                <a:cs typeface="微软雅黑" panose="020B0503020204020204" pitchFamily="34" charset="-120"/>
               </a:rPr>
               <a:t>• 产品、订单、交付、清算和审计工作台</a:t>
             </a:r>
             <a:endParaRPr lang="en-US" sz="950" dirty="0"/>
           </a:p>
           <a:p>
-            <a:pPr algn="l" indent="0" marL="0">
+            <a:pPr marL="0" indent="0" algn="l">
               <a:buNone/>
             </a:pPr>
             <a:r>
@@ -3303,16 +3344,16 @@
                 <a:solidFill>
                   <a:srgbClr val="334155"/>
                 </a:solidFill>
-                <a:latin typeface="Microsoft YaHei" pitchFamily="34" charset="0"/>
-                <a:ea typeface="Microsoft YaHei" pitchFamily="34" charset="-122"/>
-                <a:cs typeface="Microsoft YaHei" pitchFamily="34" charset="-120"/>
+                <a:latin typeface="微软雅黑" panose="020B0503020204020204" pitchFamily="34" charset="-122"/>
+                <a:ea typeface="微软雅黑" panose="020B0503020204020204" pitchFamily="34" charset="-122"/>
+                <a:cs typeface="微软雅黑" panose="020B0503020204020204" pitchFamily="34" charset="-120"/>
               </a:rPr>
               <a:t>• 网关路由、版本、凭据和调用统计管理</a:t>
             </a:r>
             <a:endParaRPr lang="en-US" sz="950" dirty="0"/>
           </a:p>
           <a:p>
-            <a:pPr algn="l" indent="0" marL="0">
+            <a:pPr marL="0" indent="0" algn="l">
               <a:buNone/>
             </a:pPr>
             <a:r>
@@ -3320,9 +3361,9 @@
                 <a:solidFill>
                   <a:srgbClr val="334155"/>
                 </a:solidFill>
-                <a:latin typeface="Microsoft YaHei" pitchFamily="34" charset="0"/>
-                <a:ea typeface="Microsoft YaHei" pitchFamily="34" charset="-122"/>
-                <a:cs typeface="Microsoft YaHei" pitchFamily="34" charset="-120"/>
+                <a:latin typeface="微软雅黑" panose="020B0503020204020204" pitchFamily="34" charset="-122"/>
+                <a:ea typeface="微软雅黑" panose="020B0503020204020204" pitchFamily="34" charset="-122"/>
+                <a:cs typeface="微软雅黑" panose="020B0503020204020204" pitchFamily="34" charset="-120"/>
               </a:rPr>
               <a:t>• 任务进度控制台、配置中心和运营看板</a:t>
             </a:r>
@@ -3345,7 +3386,6 @@
             <a:avLst/>
           </a:prstGeom>
           <a:noFill/>
-          <a:ln/>
         </p:spPr>
         <p:txBody>
           <a:bodyPr wrap="square" lIns="0" tIns="0" rIns="0" bIns="0" rtlCol="0" anchor="ctr">
@@ -3353,7 +3393,7 @@
           </a:bodyPr>
           <a:lstStyle/>
           <a:p>
-            <a:pPr algn="l" indent="0" marL="0">
+            <a:pPr marL="0" indent="0" algn="l">
               <a:buNone/>
             </a:pPr>
             <a:r>
@@ -3361,9 +3401,9 @@
                 <a:solidFill>
                   <a:srgbClr val="64748B"/>
                 </a:solidFill>
-                <a:latin typeface="Microsoft YaHei" pitchFamily="34" charset="0"/>
-                <a:ea typeface="Microsoft YaHei" pitchFamily="34" charset="-122"/>
-                <a:cs typeface="Microsoft YaHei" pitchFamily="34" charset="-120"/>
+                <a:latin typeface="微软雅黑" panose="020B0503020204020204" pitchFamily="34" charset="-122"/>
+                <a:ea typeface="微软雅黑" panose="020B0503020204020204" pitchFamily="34" charset="-122"/>
+                <a:cs typeface="微软雅黑" panose="020B0503020204020204" pitchFamily="34" charset="-120"/>
               </a:rPr>
               <a:t>提供统一运营入口和业务协同能力</a:t>
             </a:r>
@@ -3386,7 +3426,6 @@
             <a:avLst/>
           </a:prstGeom>
           <a:noFill/>
-          <a:ln/>
         </p:spPr>
         <p:txBody>
           <a:bodyPr wrap="square" lIns="0" tIns="0" rIns="0" bIns="0" rtlCol="0" anchor="ctr">
@@ -3394,7 +3433,7 @@
           </a:bodyPr>
           <a:lstStyle/>
           <a:p>
-            <a:pPr algn="l" indent="0" marL="0">
+            <a:pPr marL="0" indent="0" algn="l">
               <a:buNone/>
             </a:pPr>
             <a:r>
@@ -3402,9 +3441,9 @@
                 <a:solidFill>
                   <a:srgbClr val="334155"/>
                 </a:solidFill>
-                <a:latin typeface="Microsoft YaHei" pitchFamily="34" charset="0"/>
-                <a:ea typeface="Microsoft YaHei" pitchFamily="34" charset="-122"/>
-                <a:cs typeface="Microsoft YaHei" pitchFamily="34" charset="-120"/>
+                <a:latin typeface="微软雅黑" panose="020B0503020204020204" pitchFamily="34" charset="-122"/>
+                <a:ea typeface="微软雅黑" panose="020B0503020204020204" pitchFamily="34" charset="-122"/>
+                <a:cs typeface="微软雅黑" panose="020B0503020204020204" pitchFamily="34" charset="-120"/>
               </a:rPr>
               <a:t>三、SLA 保障与基础设施层</a:t>
             </a:r>
@@ -3438,7 +3477,7 @@
             <a:prstDash val="solid"/>
           </a:ln>
           <a:effectLst>
-            <a:outerShdw sx="100000" sy="100000" kx="0" ky="0" algn="bl" rotWithShape="0" blurRad="25400" dist="50800" dir="2700000">
+            <a:outerShdw blurRad="25400" dist="50800" dir="2700000" algn="bl" rotWithShape="0">
               <a:srgbClr val="172554">
                 <a:alpha val="10000"/>
               </a:srgbClr>
@@ -3488,7 +3527,6 @@
             <a:avLst/>
           </a:prstGeom>
           <a:noFill/>
-          <a:ln/>
         </p:spPr>
         <p:txBody>
           <a:bodyPr wrap="square" lIns="0" tIns="0" rIns="0" bIns="0" rtlCol="0" anchor="ctr">
@@ -3496,7 +3534,7 @@
           </a:bodyPr>
           <a:lstStyle/>
           <a:p>
-            <a:pPr algn="l" indent="0" marL="0">
+            <a:pPr marL="0" indent="0" algn="l">
               <a:buNone/>
             </a:pPr>
             <a:r>
@@ -3504,9 +3542,9 @@
                 <a:solidFill>
                   <a:srgbClr val="0F172A"/>
                 </a:solidFill>
-                <a:latin typeface="Microsoft YaHei" pitchFamily="34" charset="0"/>
-                <a:ea typeface="Microsoft YaHei" pitchFamily="34" charset="-122"/>
-                <a:cs typeface="Microsoft YaHei" pitchFamily="34" charset="-120"/>
+                <a:latin typeface="微软雅黑" panose="020B0503020204020204" pitchFamily="34" charset="-122"/>
+                <a:ea typeface="微软雅黑" panose="020B0503020204020204" pitchFamily="34" charset="-122"/>
+                <a:cs typeface="微软雅黑" panose="020B0503020204020204" pitchFamily="34" charset="-120"/>
               </a:rPr>
               <a:t>SLA 保障功能</a:t>
             </a:r>
@@ -3529,7 +3567,6 @@
             <a:avLst/>
           </a:prstGeom>
           <a:noFill/>
-          <a:ln/>
         </p:spPr>
         <p:txBody>
           <a:bodyPr wrap="square" lIns="127" tIns="127" rIns="127" bIns="127" rtlCol="0" anchor="t">
@@ -3537,7 +3574,7 @@
           </a:bodyPr>
           <a:lstStyle/>
           <a:p>
-            <a:pPr algn="l" indent="0" marL="0">
+            <a:pPr marL="0" indent="0" algn="l">
               <a:buNone/>
             </a:pPr>
             <a:r>
@@ -3545,16 +3582,16 @@
                 <a:solidFill>
                   <a:srgbClr val="334155"/>
                 </a:solidFill>
-                <a:latin typeface="Microsoft YaHei" pitchFamily="34" charset="0"/>
-                <a:ea typeface="Microsoft YaHei" pitchFamily="34" charset="-122"/>
-                <a:cs typeface="Microsoft YaHei" pitchFamily="34" charset="-120"/>
+                <a:latin typeface="微软雅黑" panose="020B0503020204020204" pitchFamily="34" charset="-122"/>
+                <a:ea typeface="微软雅黑" panose="020B0503020204020204" pitchFamily="34" charset="-122"/>
+                <a:cs typeface="微软雅黑" panose="020B0503020204020204" pitchFamily="34" charset="-120"/>
               </a:rPr>
               <a:t>• 健康检查、可用性、错误率和延迟</a:t>
             </a:r>
             <a:endParaRPr lang="en-US" sz="950" dirty="0"/>
           </a:p>
           <a:p>
-            <a:pPr algn="l" indent="0" marL="0">
+            <a:pPr marL="0" indent="0" algn="l">
               <a:buNone/>
             </a:pPr>
             <a:r>
@@ -3562,16 +3599,16 @@
                 <a:solidFill>
                   <a:srgbClr val="334155"/>
                 </a:solidFill>
-                <a:latin typeface="Microsoft YaHei" pitchFamily="34" charset="0"/>
-                <a:ea typeface="Microsoft YaHei" pitchFamily="34" charset="-122"/>
-                <a:cs typeface="Microsoft YaHei" pitchFamily="34" charset="-120"/>
+                <a:latin typeface="微软雅黑" panose="020B0503020204020204" pitchFamily="34" charset="-122"/>
+                <a:ea typeface="微软雅黑" panose="020B0503020204020204" pitchFamily="34" charset="-122"/>
+                <a:cs typeface="微软雅黑" panose="020B0503020204020204" pitchFamily="34" charset="-120"/>
               </a:rPr>
               <a:t>• 限流、配额、超时、重试和统一错误</a:t>
             </a:r>
             <a:endParaRPr lang="en-US" sz="950" dirty="0"/>
           </a:p>
           <a:p>
-            <a:pPr algn="l" indent="0" marL="0">
+            <a:pPr marL="0" indent="0" algn="l">
               <a:buNone/>
             </a:pPr>
             <a:r>
@@ -3579,9 +3616,9 @@
                 <a:solidFill>
                   <a:srgbClr val="334155"/>
                 </a:solidFill>
-                <a:latin typeface="Microsoft YaHei" pitchFamily="34" charset="0"/>
-                <a:ea typeface="Microsoft YaHei" pitchFamily="34" charset="-122"/>
-                <a:cs typeface="Microsoft YaHei" pitchFamily="34" charset="-120"/>
+                <a:latin typeface="微软雅黑" panose="020B0503020204020204" pitchFamily="34" charset="-122"/>
+                <a:ea typeface="微软雅黑" panose="020B0503020204020204" pitchFamily="34" charset="-122"/>
+                <a:cs typeface="微软雅黑" panose="020B0503020204020204" pitchFamily="34" charset="-120"/>
               </a:rPr>
               <a:t>• 告警、灰度、回退和故障恢复</a:t>
             </a:r>
@@ -3615,7 +3652,7 @@
             <a:prstDash val="solid"/>
           </a:ln>
           <a:effectLst>
-            <a:outerShdw sx="100000" sy="100000" kx="0" ky="0" algn="bl" rotWithShape="0" blurRad="25400" dist="50800" dir="2700000">
+            <a:outerShdw blurRad="25400" dist="50800" dir="2700000" algn="bl" rotWithShape="0">
               <a:srgbClr val="172554">
                 <a:alpha val="10000"/>
               </a:srgbClr>
@@ -3665,7 +3702,6 @@
             <a:avLst/>
           </a:prstGeom>
           <a:noFill/>
-          <a:ln/>
         </p:spPr>
         <p:txBody>
           <a:bodyPr wrap="square" lIns="0" tIns="0" rIns="0" bIns="0" rtlCol="0" anchor="ctr">
@@ -3673,7 +3709,7 @@
           </a:bodyPr>
           <a:lstStyle/>
           <a:p>
-            <a:pPr algn="l" indent="0" marL="0">
+            <a:pPr marL="0" indent="0" algn="l">
               <a:buNone/>
             </a:pPr>
             <a:r>
@@ -3681,9 +3717,9 @@
                 <a:solidFill>
                   <a:srgbClr val="0F172A"/>
                 </a:solidFill>
-                <a:latin typeface="Microsoft YaHei" pitchFamily="34" charset="0"/>
-                <a:ea typeface="Microsoft YaHei" pitchFamily="34" charset="-122"/>
-                <a:cs typeface="Microsoft YaHei" pitchFamily="34" charset="-120"/>
+                <a:latin typeface="微软雅黑" panose="020B0503020204020204" pitchFamily="34" charset="-122"/>
+                <a:ea typeface="微软雅黑" panose="020B0503020204020204" pitchFamily="34" charset="-122"/>
+                <a:cs typeface="微软雅黑" panose="020B0503020204020204" pitchFamily="34" charset="-120"/>
               </a:rPr>
               <a:t>高可用与安全</a:t>
             </a:r>
@@ -3706,7 +3742,6 @@
             <a:avLst/>
           </a:prstGeom>
           <a:noFill/>
-          <a:ln/>
         </p:spPr>
         <p:txBody>
           <a:bodyPr wrap="square" lIns="127" tIns="127" rIns="127" bIns="127" rtlCol="0" anchor="t">
@@ -3714,7 +3749,7 @@
           </a:bodyPr>
           <a:lstStyle/>
           <a:p>
-            <a:pPr algn="l" indent="0" marL="0">
+            <a:pPr marL="0" indent="0" algn="l">
               <a:buNone/>
             </a:pPr>
             <a:r>
@@ -3722,16 +3757,16 @@
                 <a:solidFill>
                   <a:srgbClr val="334155"/>
                 </a:solidFill>
-                <a:latin typeface="Microsoft YaHei" pitchFamily="34" charset="0"/>
-                <a:ea typeface="Microsoft YaHei" pitchFamily="34" charset="-122"/>
-                <a:cs typeface="Microsoft YaHei" pitchFamily="34" charset="-120"/>
+                <a:latin typeface="微软雅黑" panose="020B0503020204020204" pitchFamily="34" charset="-122"/>
+                <a:ea typeface="微软雅黑" panose="020B0503020204020204" pitchFamily="34" charset="-122"/>
+                <a:cs typeface="微软雅黑" panose="020B0503020204020204" pitchFamily="34" charset="-120"/>
               </a:rPr>
               <a:t>• Kubernetes、APISIX 多副本和负载均衡</a:t>
             </a:r>
             <a:endParaRPr lang="en-US" sz="950" dirty="0"/>
           </a:p>
           <a:p>
-            <a:pPr algn="l" indent="0" marL="0">
+            <a:pPr marL="0" indent="0" algn="l">
               <a:buNone/>
             </a:pPr>
             <a:r>
@@ -3739,16 +3774,16 @@
                 <a:solidFill>
                   <a:srgbClr val="334155"/>
                 </a:solidFill>
-                <a:latin typeface="Microsoft YaHei" pitchFamily="34" charset="0"/>
-                <a:ea typeface="Microsoft YaHei" pitchFamily="34" charset="-122"/>
-                <a:cs typeface="Microsoft YaHei" pitchFamily="34" charset="-120"/>
+                <a:latin typeface="微软雅黑" panose="020B0503020204020204" pitchFamily="34" charset="-122"/>
+                <a:ea typeface="微软雅黑" panose="020B0503020204020204" pitchFamily="34" charset="-122"/>
+                <a:cs typeface="微软雅黑" panose="020B0503020204020204" pitchFamily="34" charset="-120"/>
               </a:rPr>
               <a:t>• OAuth2、API Key、密码机和访问控制</a:t>
             </a:r>
             <a:endParaRPr lang="en-US" sz="950" dirty="0"/>
           </a:p>
           <a:p>
-            <a:pPr algn="l" indent="0" marL="0">
+            <a:pPr marL="0" indent="0" algn="l">
               <a:buNone/>
             </a:pPr>
             <a:r>
@@ -3756,9 +3791,9 @@
                 <a:solidFill>
                   <a:srgbClr val="334155"/>
                 </a:solidFill>
-                <a:latin typeface="Microsoft YaHei" pitchFamily="34" charset="0"/>
-                <a:ea typeface="Microsoft YaHei" pitchFamily="34" charset="-122"/>
-                <a:cs typeface="Microsoft YaHei" pitchFamily="34" charset="-120"/>
+                <a:latin typeface="微软雅黑" panose="020B0503020204020204" pitchFamily="34" charset="-122"/>
+                <a:ea typeface="微软雅黑" panose="020B0503020204020204" pitchFamily="34" charset="-122"/>
+                <a:cs typeface="微软雅黑" panose="020B0503020204020204" pitchFamily="34" charset="-120"/>
               </a:rPr>
               <a:t>• Redis 共享缓存、网络隔离和安全策略</a:t>
             </a:r>
@@ -3792,7 +3827,7 @@
             <a:prstDash val="solid"/>
           </a:ln>
           <a:effectLst>
-            <a:outerShdw sx="100000" sy="100000" kx="0" ky="0" algn="bl" rotWithShape="0" blurRad="25400" dist="50800" dir="2700000">
+            <a:outerShdw blurRad="25400" dist="50800" dir="2700000" algn="bl" rotWithShape="0">
               <a:srgbClr val="172554">
                 <a:alpha val="10000"/>
               </a:srgbClr>
@@ -3842,7 +3877,6 @@
             <a:avLst/>
           </a:prstGeom>
           <a:noFill/>
-          <a:ln/>
         </p:spPr>
         <p:txBody>
           <a:bodyPr wrap="square" lIns="0" tIns="0" rIns="0" bIns="0" rtlCol="0" anchor="ctr">
@@ -3850,7 +3884,7 @@
           </a:bodyPr>
           <a:lstStyle/>
           <a:p>
-            <a:pPr algn="l" indent="0" marL="0">
+            <a:pPr marL="0" indent="0" algn="l">
               <a:buNone/>
             </a:pPr>
             <a:r>
@@ -3858,9 +3892,9 @@
                 <a:solidFill>
                   <a:srgbClr val="0F172A"/>
                 </a:solidFill>
-                <a:latin typeface="Microsoft YaHei" pitchFamily="34" charset="0"/>
-                <a:ea typeface="Microsoft YaHei" pitchFamily="34" charset="-122"/>
-                <a:cs typeface="Microsoft YaHei" pitchFamily="34" charset="-120"/>
+                <a:latin typeface="微软雅黑" panose="020B0503020204020204" pitchFamily="34" charset="-122"/>
+                <a:ea typeface="微软雅黑" panose="020B0503020204020204" pitchFamily="34" charset="-122"/>
+                <a:cs typeface="微软雅黑" panose="020B0503020204020204" pitchFamily="34" charset="-120"/>
               </a:rPr>
               <a:t>数据与存储支撑</a:t>
             </a:r>
@@ -3883,7 +3917,6 @@
             <a:avLst/>
           </a:prstGeom>
           <a:noFill/>
-          <a:ln/>
         </p:spPr>
         <p:txBody>
           <a:bodyPr wrap="square" lIns="127" tIns="127" rIns="127" bIns="127" rtlCol="0" anchor="t">
@@ -3891,7 +3924,7 @@
           </a:bodyPr>
           <a:lstStyle/>
           <a:p>
-            <a:pPr algn="l" indent="0" marL="0">
+            <a:pPr marL="0" indent="0" algn="l">
               <a:buNone/>
             </a:pPr>
             <a:r>
@@ -3899,16 +3932,16 @@
                 <a:solidFill>
                   <a:srgbClr val="334155"/>
                 </a:solidFill>
-                <a:latin typeface="Microsoft YaHei" pitchFamily="34" charset="0"/>
-                <a:ea typeface="Microsoft YaHei" pitchFamily="34" charset="-122"/>
-                <a:cs typeface="Microsoft YaHei" pitchFamily="34" charset="-120"/>
+                <a:latin typeface="微软雅黑" panose="020B0503020204020204" pitchFamily="34" charset="-122"/>
+                <a:ea typeface="微软雅黑" panose="020B0503020204020204" pitchFamily="34" charset="-122"/>
+                <a:cs typeface="微软雅黑" panose="020B0503020204020204" pitchFamily="34" charset="-120"/>
               </a:rPr>
               <a:t>• PostgreSQL 业务和审计数据</a:t>
             </a:r>
             <a:endParaRPr lang="en-US" sz="950" dirty="0"/>
           </a:p>
           <a:p>
-            <a:pPr algn="l" indent="0" marL="0">
+            <a:pPr marL="0" indent="0" algn="l">
               <a:buNone/>
             </a:pPr>
             <a:r>
@@ -3916,16 +3949,16 @@
                 <a:solidFill>
                   <a:srgbClr val="334155"/>
                 </a:solidFill>
-                <a:latin typeface="Microsoft YaHei" pitchFamily="34" charset="0"/>
-                <a:ea typeface="Microsoft YaHei" pitchFamily="34" charset="-122"/>
-                <a:cs typeface="Microsoft YaHei" pitchFamily="34" charset="-120"/>
+                <a:latin typeface="微软雅黑" panose="020B0503020204020204" pitchFamily="34" charset="-122"/>
+                <a:ea typeface="微软雅黑" panose="020B0503020204020204" pitchFamily="34" charset="-122"/>
+                <a:cs typeface="微软雅黑" panose="020B0503020204020204" pitchFamily="34" charset="-120"/>
               </a:rPr>
               <a:t>• MinIO 文件、数据集和交付对象存储</a:t>
             </a:r>
             <a:endParaRPr lang="en-US" sz="950" dirty="0"/>
           </a:p>
           <a:p>
-            <a:pPr algn="l" indent="0" marL="0">
+            <a:pPr marL="0" indent="0" algn="l">
               <a:buNone/>
             </a:pPr>
             <a:r>
@@ -3933,9 +3966,9 @@
                 <a:solidFill>
                   <a:srgbClr val="334155"/>
                 </a:solidFill>
-                <a:latin typeface="Microsoft YaHei" pitchFamily="34" charset="0"/>
-                <a:ea typeface="Microsoft YaHei" pitchFamily="34" charset="-122"/>
-                <a:cs typeface="Microsoft YaHei" pitchFamily="34" charset="-120"/>
+                <a:latin typeface="微软雅黑" panose="020B0503020204020204" pitchFamily="34" charset="-122"/>
+                <a:ea typeface="微软雅黑" panose="020B0503020204020204" pitchFamily="34" charset="-122"/>
+                <a:cs typeface="微软雅黑" panose="020B0503020204020204" pitchFamily="34" charset="-120"/>
               </a:rPr>
               <a:t>• Redis 配额、Token 和分布式状态缓存</a:t>
             </a:r>
@@ -3969,7 +4002,7 @@
             <a:prstDash val="solid"/>
           </a:ln>
           <a:effectLst>
-            <a:outerShdw sx="100000" sy="100000" kx="0" ky="0" algn="bl" rotWithShape="0" blurRad="25400" dist="50800" dir="2700000">
+            <a:outerShdw blurRad="25400" dist="50800" dir="2700000" algn="bl" rotWithShape="0">
               <a:srgbClr val="172554">
                 <a:alpha val="10000"/>
               </a:srgbClr>
@@ -4019,7 +4052,6 @@
             <a:avLst/>
           </a:prstGeom>
           <a:noFill/>
-          <a:ln/>
         </p:spPr>
         <p:txBody>
           <a:bodyPr wrap="square" lIns="0" tIns="0" rIns="0" bIns="0" rtlCol="0" anchor="ctr">
@@ -4027,7 +4059,7 @@
           </a:bodyPr>
           <a:lstStyle/>
           <a:p>
-            <a:pPr algn="l" indent="0" marL="0">
+            <a:pPr marL="0" indent="0" algn="l">
               <a:buNone/>
             </a:pPr>
             <a:r>
@@ -4035,9 +4067,9 @@
                 <a:solidFill>
                   <a:srgbClr val="0F172A"/>
                 </a:solidFill>
-                <a:latin typeface="Microsoft YaHei" pitchFamily="34" charset="0"/>
-                <a:ea typeface="Microsoft YaHei" pitchFamily="34" charset="-122"/>
-                <a:cs typeface="Microsoft YaHei" pitchFamily="34" charset="-120"/>
+                <a:latin typeface="微软雅黑" panose="020B0503020204020204" pitchFamily="34" charset="-122"/>
+                <a:ea typeface="微软雅黑" panose="020B0503020204020204" pitchFamily="34" charset="-122"/>
+                <a:cs typeface="微软雅黑" panose="020B0503020204020204" pitchFamily="34" charset="-120"/>
               </a:rPr>
               <a:t>监控与运营保障</a:t>
             </a:r>
@@ -4060,7 +4092,6 @@
             <a:avLst/>
           </a:prstGeom>
           <a:noFill/>
-          <a:ln/>
         </p:spPr>
         <p:txBody>
           <a:bodyPr wrap="square" lIns="127" tIns="127" rIns="127" bIns="127" rtlCol="0" anchor="t">
@@ -4068,7 +4099,7 @@
           </a:bodyPr>
           <a:lstStyle/>
           <a:p>
-            <a:pPr algn="l" indent="0" marL="0">
+            <a:pPr marL="0" indent="0" algn="l">
               <a:buNone/>
             </a:pPr>
             <a:r>
@@ -4076,16 +4107,16 @@
                 <a:solidFill>
                   <a:srgbClr val="334155"/>
                 </a:solidFill>
-                <a:latin typeface="Microsoft YaHei" pitchFamily="34" charset="0"/>
-                <a:ea typeface="Microsoft YaHei" pitchFamily="34" charset="-122"/>
-                <a:cs typeface="Microsoft YaHei" pitchFamily="34" charset="-120"/>
+                <a:latin typeface="微软雅黑" panose="020B0503020204020204" pitchFamily="34" charset="-122"/>
+                <a:ea typeface="微软雅黑" panose="020B0503020204020204" pitchFamily="34" charset="-122"/>
+                <a:cs typeface="微软雅黑" panose="020B0503020204020204" pitchFamily="34" charset="-120"/>
               </a:rPr>
               <a:t>• Prometheus 指标、Alertmanager 告警</a:t>
             </a:r>
             <a:endParaRPr lang="en-US" sz="950" dirty="0"/>
           </a:p>
           <a:p>
-            <a:pPr algn="l" indent="0" marL="0">
+            <a:pPr marL="0" indent="0" algn="l">
               <a:buNone/>
             </a:pPr>
             <a:r>
@@ -4093,16 +4124,16 @@
                 <a:solidFill>
                   <a:srgbClr val="334155"/>
                 </a:solidFill>
-                <a:latin typeface="Microsoft YaHei" pitchFamily="34" charset="0"/>
-                <a:ea typeface="Microsoft YaHei" pitchFamily="34" charset="-122"/>
-                <a:cs typeface="Microsoft YaHei" pitchFamily="34" charset="-120"/>
+                <a:latin typeface="微软雅黑" panose="020B0503020204020204" pitchFamily="34" charset="-122"/>
+                <a:ea typeface="微软雅黑" panose="020B0503020204020204" pitchFamily="34" charset="-122"/>
+                <a:cs typeface="微软雅黑" panose="020B0503020204020204" pitchFamily="34" charset="-120"/>
               </a:rPr>
               <a:t>• 网关路由、发布、调用和运行日志</a:t>
             </a:r>
             <a:endParaRPr lang="en-US" sz="950" dirty="0"/>
           </a:p>
           <a:p>
-            <a:pPr algn="l" indent="0" marL="0">
+            <a:pPr marL="0" indent="0" algn="l">
               <a:buNone/>
             </a:pPr>
             <a:r>
@@ -4110,9 +4141,9 @@
                 <a:solidFill>
                   <a:srgbClr val="334155"/>
                 </a:solidFill>
-                <a:latin typeface="Microsoft YaHei" pitchFamily="34" charset="0"/>
-                <a:ea typeface="Microsoft YaHei" pitchFamily="34" charset="-122"/>
-                <a:cs typeface="Microsoft YaHei" pitchFamily="34" charset="-120"/>
+                <a:latin typeface="微软雅黑" panose="020B0503020204020204" pitchFamily="34" charset="-122"/>
+                <a:ea typeface="微软雅黑" panose="020B0503020204020204" pitchFamily="34" charset="-122"/>
+                <a:cs typeface="微软雅黑" panose="020B0503020204020204" pitchFamily="34" charset="-120"/>
               </a:rPr>
               <a:t>• SLA 报表、审计追踪和运维闭环</a:t>
             </a:r>
@@ -4423,7 +4454,6 @@
             <a:avLst/>
           </a:prstGeom>
           <a:noFill/>
-          <a:ln/>
         </p:spPr>
         <p:txBody>
           <a:bodyPr wrap="square" lIns="0" tIns="0" rIns="0" bIns="0" rtlCol="0" anchor="ctr">
@@ -4431,7 +4461,7 @@
           </a:bodyPr>
           <a:lstStyle/>
           <a:p>
-            <a:pPr algn="ctr" indent="0" marL="0">
+            <a:pPr marL="0" indent="0" algn="ctr">
               <a:buNone/>
             </a:pPr>
             <a:r>
@@ -4439,15 +4469,3646 @@
                 <a:solidFill>
                   <a:srgbClr val="64748B"/>
                 </a:solidFill>
-                <a:latin typeface="Microsoft YaHei" pitchFamily="34" charset="0"/>
-                <a:ea typeface="Microsoft YaHei" pitchFamily="34" charset="-122"/>
-                <a:cs typeface="Microsoft YaHei" pitchFamily="34" charset="-120"/>
+                <a:latin typeface="微软雅黑" panose="020B0503020204020204" pitchFamily="34" charset="-122"/>
+                <a:ea typeface="微软雅黑" panose="020B0503020204020204" pitchFamily="34" charset="-122"/>
+                <a:cs typeface="微软雅黑" panose="020B0503020204020204" pitchFamily="34" charset="-120"/>
               </a:rPr>
               <a:t>图：当前数据集运营服务管理平台功能架构图（可编辑版）</a:t>
             </a:r>
             <a:endParaRPr lang="en-US" sz="750" dirty="0"/>
           </a:p>
         </p:txBody>
+      </p:sp>
+    </p:spTree>
+  </p:cSld>
+  <p:clrMapOvr>
+    <a:masterClrMapping/>
+  </p:clrMapOvr>
+</p:sld>
+</file>
+
+<file path=ppt/slides/slide2.xml><?xml version="1.0" encoding="utf-8"?>
+<p:sld xmlns:a="http://schemas.openxmlformats.org/drawingml/2006/main" xmlns:r="http://schemas.openxmlformats.org/officeDocument/2006/relationships" xmlns:p="http://schemas.openxmlformats.org/presentationml/2006/main">
+  <p:cSld>
+    <p:spTree>
+      <p:nvGrpSpPr>
+        <p:cNvPr id="1" name=""/>
+        <p:cNvGrpSpPr/>
+        <p:nvPr/>
+      </p:nvGrpSpPr>
+      <p:grpSpPr>
+        <a:xfrm>
+          <a:off x="0" y="0"/>
+          <a:ext cx="0" cy="0"/>
+          <a:chOff x="0" y="0"/>
+          <a:chExt cx="0" cy="0"/>
+        </a:xfrm>
+      </p:grpSpPr>
+      <p:sp>
+        <p:nvSpPr>
+          <p:cNvPr id="104" name="Shape 59"/>
+          <p:cNvSpPr/>
+          <p:nvPr/>
+        </p:nvSpPr>
+        <p:spPr>
+          <a:xfrm>
+            <a:off x="502920" y="5432425"/>
+            <a:ext cx="11173460" cy="1299210"/>
+          </a:xfrm>
+          <a:prstGeom prst="roundRect">
+            <a:avLst>
+              <a:gd name="adj" fmla="val 9804"/>
+            </a:avLst>
+          </a:prstGeom>
+          <a:solidFill>
+            <a:srgbClr val="F0FDF4"/>
+          </a:solidFill>
+          <a:ln w="13970">
+            <a:solidFill>
+              <a:srgbClr val="86EFAC"/>
+            </a:solidFill>
+            <a:prstDash val="solid"/>
+          </a:ln>
+          <a:effectLst>
+            <a:outerShdw blurRad="25400" dist="50800" dir="2700000" algn="bl" rotWithShape="0">
+              <a:srgbClr val="172554">
+                <a:alpha val="10000"/>
+              </a:srgbClr>
+            </a:outerShdw>
+          </a:effectLst>
+        </p:spPr>
+      </p:sp>
+      <p:sp>
+        <p:nvSpPr>
+          <p:cNvPr id="8" name="Shape 6"/>
+          <p:cNvSpPr/>
+          <p:nvPr/>
+        </p:nvSpPr>
+        <p:spPr>
+          <a:xfrm>
+            <a:off x="502920" y="321945"/>
+            <a:ext cx="11182985" cy="934085"/>
+          </a:xfrm>
+          <a:prstGeom prst="roundRect">
+            <a:avLst>
+              <a:gd name="adj" fmla="val 11111"/>
+            </a:avLst>
+          </a:prstGeom>
+          <a:solidFill>
+            <a:srgbClr val="EFF6FF"/>
+          </a:solidFill>
+          <a:ln w="12700">
+            <a:solidFill>
+              <a:srgbClr val="BFDBFE"/>
+            </a:solidFill>
+            <a:prstDash val="solid"/>
+          </a:ln>
+        </p:spPr>
+      </p:sp>
+      <p:sp>
+        <p:nvSpPr>
+          <p:cNvPr id="9" name="Shape 7"/>
+          <p:cNvSpPr/>
+          <p:nvPr/>
+        </p:nvSpPr>
+        <p:spPr>
+          <a:xfrm>
+            <a:off x="713105" y="421005"/>
+            <a:ext cx="1874520" cy="728345"/>
+          </a:xfrm>
+          <a:prstGeom prst="roundRect">
+            <a:avLst>
+              <a:gd name="adj" fmla="val 7152"/>
+            </a:avLst>
+          </a:prstGeom>
+          <a:solidFill>
+            <a:srgbClr val="FFFFFF"/>
+          </a:solidFill>
+          <a:ln w="13970">
+            <a:solidFill>
+              <a:srgbClr val="93C5FD"/>
+            </a:solidFill>
+            <a:prstDash val="solid"/>
+          </a:ln>
+          <a:effectLst>
+            <a:outerShdw blurRad="25400" dist="50800" dir="2700000" algn="bl" rotWithShape="0">
+              <a:srgbClr val="172554">
+                <a:alpha val="10000"/>
+              </a:srgbClr>
+            </a:outerShdw>
+          </a:effectLst>
+        </p:spPr>
+      </p:sp>
+      <p:sp>
+        <p:nvSpPr>
+          <p:cNvPr id="11" name="Text 9"/>
+          <p:cNvSpPr/>
+          <p:nvPr/>
+        </p:nvSpPr>
+        <p:spPr>
+          <a:xfrm>
+            <a:off x="936879" y="446151"/>
+            <a:ext cx="1545336" cy="228600"/>
+          </a:xfrm>
+          <a:prstGeom prst="rect">
+            <a:avLst/>
+          </a:prstGeom>
+          <a:noFill/>
+        </p:spPr>
+        <p:txBody>
+          <a:bodyPr wrap="square" lIns="0" tIns="0" rIns="0" bIns="0" rtlCol="0" anchor="ctr">
+            <a:normAutofit/>
+          </a:bodyPr>
+          <a:lstStyle/>
+          <a:p>
+            <a:pPr marL="0" indent="0" algn="l">
+              <a:buNone/>
+            </a:pPr>
+            <a:r>
+              <a:rPr lang="en-US" sz="1300" b="1" dirty="0">
+                <a:solidFill>
+                  <a:srgbClr val="0F172A"/>
+                </a:solidFill>
+                <a:latin typeface="微软雅黑" panose="020B0503020204020204" pitchFamily="34" charset="-122"/>
+                <a:ea typeface="微软雅黑" panose="020B0503020204020204" pitchFamily="34" charset="-122"/>
+                <a:cs typeface="微软雅黑" panose="020B0503020204020204" pitchFamily="34" charset="-120"/>
+              </a:rPr>
+              <a:t>用户与企业服务</a:t>
+            </a:r>
+            <a:endParaRPr lang="en-US" sz="1300" dirty="0"/>
+          </a:p>
+        </p:txBody>
+      </p:sp>
+      <p:sp>
+        <p:nvSpPr>
+          <p:cNvPr id="12" name="Text 10"/>
+          <p:cNvSpPr/>
+          <p:nvPr/>
+        </p:nvSpPr>
+        <p:spPr>
+          <a:xfrm>
+            <a:off x="880110" y="713740"/>
+            <a:ext cx="1602105" cy="361950"/>
+          </a:xfrm>
+          <a:prstGeom prst="rect">
+            <a:avLst/>
+          </a:prstGeom>
+          <a:noFill/>
+        </p:spPr>
+        <p:txBody>
+          <a:bodyPr wrap="square" lIns="127" tIns="127" rIns="127" bIns="127" rtlCol="0" anchor="t">
+            <a:noAutofit/>
+          </a:bodyPr>
+          <a:lstStyle/>
+          <a:p>
+            <a:pPr marL="0" indent="0" algn="l">
+              <a:buNone/>
+            </a:pPr>
+            <a:r>
+              <a:rPr lang="en-US" sz="1000" dirty="0">
+                <a:solidFill>
+                  <a:srgbClr val="334155"/>
+                </a:solidFill>
+                <a:latin typeface="微软雅黑" panose="020B0503020204020204" pitchFamily="34" charset="-122"/>
+                <a:ea typeface="微软雅黑" panose="020B0503020204020204" pitchFamily="34" charset="-122"/>
+                <a:cs typeface="微软雅黑" panose="020B0503020204020204" pitchFamily="34" charset="-120"/>
+              </a:rPr>
+              <a:t>注册、实名认证、企业认证</a:t>
+            </a:r>
+            <a:endParaRPr lang="en-US" sz="1000" dirty="0">
+              <a:latin typeface="微软雅黑" panose="020B0503020204020204" pitchFamily="34" charset="-122"/>
+              <a:ea typeface="微软雅黑" panose="020B0503020204020204" pitchFamily="34" charset="-122"/>
+            </a:endParaRPr>
+          </a:p>
+          <a:p>
+            <a:pPr marL="0" indent="0" algn="l">
+              <a:buNone/>
+            </a:pPr>
+            <a:r>
+              <a:rPr lang="en-US" sz="1000" dirty="0">
+                <a:solidFill>
+                  <a:srgbClr val="334155"/>
+                </a:solidFill>
+                <a:latin typeface="微软雅黑" panose="020B0503020204020204" pitchFamily="34" charset="-122"/>
+                <a:ea typeface="微软雅黑" panose="020B0503020204020204" pitchFamily="34" charset="-122"/>
+                <a:cs typeface="微软雅黑" panose="020B0503020204020204" pitchFamily="34" charset="-120"/>
+              </a:rPr>
+              <a:t>成员、企业角色和邀请</a:t>
+            </a:r>
+            <a:endParaRPr lang="en-US" sz="1000" dirty="0">
+              <a:solidFill>
+                <a:srgbClr val="334155"/>
+              </a:solidFill>
+              <a:latin typeface="微软雅黑" panose="020B0503020204020204" pitchFamily="34" charset="-122"/>
+              <a:ea typeface="微软雅黑" panose="020B0503020204020204" pitchFamily="34" charset="-122"/>
+              <a:cs typeface="微软雅黑" panose="020B0503020204020204" pitchFamily="34" charset="-120"/>
+            </a:endParaRPr>
+          </a:p>
+        </p:txBody>
+      </p:sp>
+      <p:sp>
+        <p:nvSpPr>
+          <p:cNvPr id="13" name="Shape 11"/>
+          <p:cNvSpPr/>
+          <p:nvPr/>
+        </p:nvSpPr>
+        <p:spPr>
+          <a:xfrm>
+            <a:off x="2724785" y="420370"/>
+            <a:ext cx="1874520" cy="728345"/>
+          </a:xfrm>
+          <a:prstGeom prst="roundRect">
+            <a:avLst>
+              <a:gd name="adj" fmla="val 7911"/>
+            </a:avLst>
+          </a:prstGeom>
+          <a:solidFill>
+            <a:srgbClr val="FFFFFF"/>
+          </a:solidFill>
+          <a:ln w="13970">
+            <a:solidFill>
+              <a:srgbClr val="93C5FD"/>
+            </a:solidFill>
+            <a:prstDash val="solid"/>
+          </a:ln>
+          <a:effectLst>
+            <a:outerShdw blurRad="25400" dist="50800" dir="2700000" algn="bl" rotWithShape="0">
+              <a:srgbClr val="172554">
+                <a:alpha val="10000"/>
+              </a:srgbClr>
+            </a:outerShdw>
+          </a:effectLst>
+        </p:spPr>
+      </p:sp>
+      <p:sp>
+        <p:nvSpPr>
+          <p:cNvPr id="15" name="Text 13"/>
+          <p:cNvSpPr/>
+          <p:nvPr/>
+        </p:nvSpPr>
+        <p:spPr>
+          <a:xfrm>
+            <a:off x="2889504" y="446151"/>
+            <a:ext cx="1545336" cy="228600"/>
+          </a:xfrm>
+          <a:prstGeom prst="rect">
+            <a:avLst/>
+          </a:prstGeom>
+          <a:noFill/>
+        </p:spPr>
+        <p:txBody>
+          <a:bodyPr wrap="square" lIns="0" tIns="0" rIns="0" bIns="0" rtlCol="0" anchor="ctr">
+            <a:normAutofit/>
+          </a:bodyPr>
+          <a:lstStyle/>
+          <a:p>
+            <a:pPr marL="0" indent="0" algn="l">
+              <a:buNone/>
+            </a:pPr>
+            <a:r>
+              <a:rPr lang="en-US" sz="1300" b="1" dirty="0">
+                <a:solidFill>
+                  <a:srgbClr val="0F172A"/>
+                </a:solidFill>
+                <a:latin typeface="微软雅黑" panose="020B0503020204020204" pitchFamily="34" charset="-122"/>
+                <a:ea typeface="微软雅黑" panose="020B0503020204020204" pitchFamily="34" charset="-122"/>
+                <a:cs typeface="微软雅黑" panose="020B0503020204020204" pitchFamily="34" charset="-120"/>
+              </a:rPr>
+              <a:t>统一权限与多租户</a:t>
+            </a:r>
+            <a:endParaRPr lang="en-US" sz="1300" dirty="0"/>
+          </a:p>
+        </p:txBody>
+      </p:sp>
+      <p:sp>
+        <p:nvSpPr>
+          <p:cNvPr id="16" name="Text 14"/>
+          <p:cNvSpPr/>
+          <p:nvPr/>
+        </p:nvSpPr>
+        <p:spPr>
+          <a:xfrm>
+            <a:off x="2889250" y="713740"/>
+            <a:ext cx="1545590" cy="311150"/>
+          </a:xfrm>
+          <a:prstGeom prst="rect">
+            <a:avLst/>
+          </a:prstGeom>
+          <a:noFill/>
+        </p:spPr>
+        <p:txBody>
+          <a:bodyPr wrap="square" lIns="127" tIns="127" rIns="127" bIns="127" rtlCol="0" anchor="t">
+            <a:noAutofit/>
+          </a:bodyPr>
+          <a:lstStyle/>
+          <a:p>
+            <a:pPr marL="0" indent="0" algn="l">
+              <a:buNone/>
+            </a:pPr>
+            <a:r>
+              <a:rPr lang="en-US" sz="1000" dirty="0">
+                <a:solidFill>
+                  <a:srgbClr val="334155"/>
+                </a:solidFill>
+                <a:latin typeface="微软雅黑" panose="020B0503020204020204" pitchFamily="34" charset="-122"/>
+                <a:ea typeface="微软雅黑" panose="020B0503020204020204" pitchFamily="34" charset="-122"/>
+                <a:cs typeface="微软雅黑" panose="020B0503020204020204" pitchFamily="34" charset="-122"/>
+              </a:rPr>
+              <a:t>企业主租户、平台 RBAC</a:t>
+            </a:r>
+            <a:endParaRPr lang="en-US" sz="1000" dirty="0">
+              <a:latin typeface="微软雅黑" panose="020B0503020204020204" pitchFamily="34" charset="-122"/>
+              <a:ea typeface="微软雅黑" panose="020B0503020204020204" pitchFamily="34" charset="-122"/>
+              <a:cs typeface="微软雅黑" panose="020B0503020204020204" pitchFamily="34" charset="-122"/>
+            </a:endParaRPr>
+          </a:p>
+          <a:p>
+            <a:pPr marL="0" indent="0" algn="l">
+              <a:buNone/>
+            </a:pPr>
+            <a:r>
+              <a:rPr lang="en-US" sz="1000" dirty="0">
+                <a:solidFill>
+                  <a:srgbClr val="334155"/>
+                </a:solidFill>
+                <a:latin typeface="微软雅黑" panose="020B0503020204020204" pitchFamily="34" charset="-122"/>
+                <a:ea typeface="微软雅黑" panose="020B0503020204020204" pitchFamily="34" charset="-122"/>
+                <a:cs typeface="微软雅黑" panose="020B0503020204020204" pitchFamily="34" charset="-122"/>
+              </a:rPr>
+              <a:t>数据隔离和操作授权</a:t>
+            </a:r>
+            <a:endParaRPr lang="en-US" sz="1000" dirty="0">
+              <a:solidFill>
+                <a:srgbClr val="334155"/>
+              </a:solidFill>
+              <a:latin typeface="微软雅黑" panose="020B0503020204020204" pitchFamily="34" charset="-122"/>
+              <a:ea typeface="微软雅黑" panose="020B0503020204020204" pitchFamily="34" charset="-122"/>
+              <a:cs typeface="微软雅黑" panose="020B0503020204020204" pitchFamily="34" charset="-122"/>
+            </a:endParaRPr>
+          </a:p>
+        </p:txBody>
+      </p:sp>
+      <p:sp>
+        <p:nvSpPr>
+          <p:cNvPr id="17" name="Shape 15"/>
+          <p:cNvSpPr/>
+          <p:nvPr/>
+        </p:nvSpPr>
+        <p:spPr>
+          <a:xfrm>
+            <a:off x="4736465" y="420370"/>
+            <a:ext cx="1874520" cy="727710"/>
+          </a:xfrm>
+          <a:prstGeom prst="roundRect">
+            <a:avLst>
+              <a:gd name="adj" fmla="val 8605"/>
+            </a:avLst>
+          </a:prstGeom>
+          <a:solidFill>
+            <a:srgbClr val="FFFFFF"/>
+          </a:solidFill>
+          <a:ln w="13970">
+            <a:solidFill>
+              <a:srgbClr val="93C5FD"/>
+            </a:solidFill>
+            <a:prstDash val="solid"/>
+          </a:ln>
+          <a:effectLst>
+            <a:outerShdw blurRad="25400" dist="50800" dir="2700000" algn="bl" rotWithShape="0">
+              <a:srgbClr val="172554">
+                <a:alpha val="10000"/>
+              </a:srgbClr>
+            </a:outerShdw>
+          </a:effectLst>
+        </p:spPr>
+      </p:sp>
+      <p:sp>
+        <p:nvSpPr>
+          <p:cNvPr id="19" name="Text 17"/>
+          <p:cNvSpPr/>
+          <p:nvPr/>
+        </p:nvSpPr>
+        <p:spPr>
+          <a:xfrm>
+            <a:off x="5029454" y="446151"/>
+            <a:ext cx="1545336" cy="228600"/>
+          </a:xfrm>
+          <a:prstGeom prst="rect">
+            <a:avLst/>
+          </a:prstGeom>
+          <a:noFill/>
+        </p:spPr>
+        <p:txBody>
+          <a:bodyPr wrap="square" lIns="0" tIns="0" rIns="0" bIns="0" rtlCol="0" anchor="ctr">
+            <a:normAutofit/>
+          </a:bodyPr>
+          <a:lstStyle/>
+          <a:p>
+            <a:pPr marL="0" indent="0" algn="l">
+              <a:buNone/>
+            </a:pPr>
+            <a:r>
+              <a:rPr lang="en-US" sz="1300" b="1" dirty="0">
+                <a:solidFill>
+                  <a:srgbClr val="0F172A"/>
+                </a:solidFill>
+                <a:latin typeface="微软雅黑" panose="020B0503020204020204" pitchFamily="34" charset="-122"/>
+                <a:ea typeface="微软雅黑" panose="020B0503020204020204" pitchFamily="34" charset="-122"/>
+                <a:cs typeface="微软雅黑" panose="020B0503020204020204" pitchFamily="34" charset="-120"/>
+              </a:rPr>
+              <a:t>统一 API 网关</a:t>
+            </a:r>
+            <a:endParaRPr lang="en-US" sz="1300" dirty="0"/>
+          </a:p>
+        </p:txBody>
+      </p:sp>
+      <p:sp>
+        <p:nvSpPr>
+          <p:cNvPr id="20" name="Text 18"/>
+          <p:cNvSpPr/>
+          <p:nvPr/>
+        </p:nvSpPr>
+        <p:spPr>
+          <a:xfrm>
+            <a:off x="4900930" y="713740"/>
+            <a:ext cx="1602105" cy="365125"/>
+          </a:xfrm>
+          <a:prstGeom prst="rect">
+            <a:avLst/>
+          </a:prstGeom>
+          <a:noFill/>
+        </p:spPr>
+        <p:txBody>
+          <a:bodyPr wrap="square" lIns="127" tIns="127" rIns="127" bIns="127" rtlCol="0" anchor="t">
+            <a:normAutofit/>
+          </a:bodyPr>
+          <a:lstStyle/>
+          <a:p>
+            <a:pPr marL="0" indent="0" algn="l">
+              <a:buNone/>
+            </a:pPr>
+            <a:r>
+              <a:rPr lang="en-US" sz="1000" dirty="0">
+                <a:solidFill>
+                  <a:srgbClr val="334155"/>
+                </a:solidFill>
+                <a:latin typeface="微软雅黑" panose="020B0503020204020204" pitchFamily="34" charset="-122"/>
+                <a:ea typeface="微软雅黑" panose="020B0503020204020204" pitchFamily="34" charset="-122"/>
+                <a:cs typeface="微软雅黑" panose="020B0503020204020204" pitchFamily="34" charset="-122"/>
+              </a:rPr>
+              <a:t>OAuth2、API Key、路由</a:t>
+            </a:r>
+            <a:endParaRPr lang="en-US" sz="1000" dirty="0">
+              <a:latin typeface="微软雅黑" panose="020B0503020204020204" pitchFamily="34" charset="-122"/>
+              <a:ea typeface="微软雅黑" panose="020B0503020204020204" pitchFamily="34" charset="-122"/>
+              <a:cs typeface="微软雅黑" panose="020B0503020204020204" pitchFamily="34" charset="-122"/>
+            </a:endParaRPr>
+          </a:p>
+          <a:p>
+            <a:pPr marL="0" indent="0" algn="l">
+              <a:buNone/>
+            </a:pPr>
+            <a:r>
+              <a:rPr lang="en-US" sz="1000" dirty="0">
+                <a:solidFill>
+                  <a:srgbClr val="334155"/>
+                </a:solidFill>
+                <a:latin typeface="微软雅黑" panose="020B0503020204020204" pitchFamily="34" charset="-122"/>
+                <a:ea typeface="微软雅黑" panose="020B0503020204020204" pitchFamily="34" charset="-122"/>
+                <a:cs typeface="微软雅黑" panose="020B0503020204020204" pitchFamily="34" charset="-122"/>
+              </a:rPr>
+              <a:t>限流、配额和调用统计</a:t>
+            </a:r>
+            <a:endParaRPr lang="en-US" sz="1000" dirty="0">
+              <a:latin typeface="微软雅黑" panose="020B0503020204020204" pitchFamily="34" charset="-122"/>
+              <a:ea typeface="微软雅黑" panose="020B0503020204020204" pitchFamily="34" charset="-122"/>
+              <a:cs typeface="微软雅黑" panose="020B0503020204020204" pitchFamily="34" charset="-122"/>
+            </a:endParaRPr>
+          </a:p>
+        </p:txBody>
+      </p:sp>
+      <p:sp>
+        <p:nvSpPr>
+          <p:cNvPr id="21" name="Shape 19"/>
+          <p:cNvSpPr/>
+          <p:nvPr/>
+        </p:nvSpPr>
+        <p:spPr>
+          <a:xfrm>
+            <a:off x="6748145" y="419735"/>
+            <a:ext cx="1874520" cy="728980"/>
+          </a:xfrm>
+          <a:prstGeom prst="roundRect">
+            <a:avLst>
+              <a:gd name="adj" fmla="val 7905"/>
+            </a:avLst>
+          </a:prstGeom>
+          <a:solidFill>
+            <a:srgbClr val="FFFFFF"/>
+          </a:solidFill>
+          <a:ln w="13970">
+            <a:solidFill>
+              <a:srgbClr val="93C5FD"/>
+            </a:solidFill>
+            <a:prstDash val="solid"/>
+          </a:ln>
+          <a:effectLst>
+            <a:outerShdw blurRad="25400" dist="50800" dir="2700000" algn="bl" rotWithShape="0">
+              <a:srgbClr val="172554">
+                <a:alpha val="10000"/>
+              </a:srgbClr>
+            </a:outerShdw>
+          </a:effectLst>
+        </p:spPr>
+      </p:sp>
+      <p:sp>
+        <p:nvSpPr>
+          <p:cNvPr id="23" name="Text 21"/>
+          <p:cNvSpPr/>
+          <p:nvPr/>
+        </p:nvSpPr>
+        <p:spPr>
+          <a:xfrm>
+            <a:off x="7129780" y="446405"/>
+            <a:ext cx="1337945" cy="228600"/>
+          </a:xfrm>
+          <a:prstGeom prst="rect">
+            <a:avLst/>
+          </a:prstGeom>
+          <a:noFill/>
+        </p:spPr>
+        <p:txBody>
+          <a:bodyPr wrap="square" lIns="0" tIns="0" rIns="0" bIns="0" rtlCol="0" anchor="ctr">
+            <a:normAutofit/>
+          </a:bodyPr>
+          <a:lstStyle/>
+          <a:p>
+            <a:pPr marL="0" indent="0" algn="l">
+              <a:buNone/>
+            </a:pPr>
+            <a:r>
+              <a:rPr lang="en-US" sz="1300" b="1" dirty="0">
+                <a:solidFill>
+                  <a:srgbClr val="0F172A"/>
+                </a:solidFill>
+                <a:latin typeface="微软雅黑" panose="020B0503020204020204" pitchFamily="34" charset="-122"/>
+                <a:ea typeface="微软雅黑" panose="020B0503020204020204" pitchFamily="34" charset="-122"/>
+                <a:cs typeface="微软雅黑" panose="020B0503020204020204" pitchFamily="34" charset="-120"/>
+              </a:rPr>
+              <a:t>通知与配置中心</a:t>
+            </a:r>
+            <a:endParaRPr lang="en-US" sz="1300" dirty="0"/>
+          </a:p>
+        </p:txBody>
+      </p:sp>
+      <p:sp>
+        <p:nvSpPr>
+          <p:cNvPr id="24" name="Text 22"/>
+          <p:cNvSpPr/>
+          <p:nvPr/>
+        </p:nvSpPr>
+        <p:spPr>
+          <a:xfrm>
+            <a:off x="6912610" y="713740"/>
+            <a:ext cx="1597025" cy="365760"/>
+          </a:xfrm>
+          <a:prstGeom prst="rect">
+            <a:avLst/>
+          </a:prstGeom>
+          <a:noFill/>
+        </p:spPr>
+        <p:txBody>
+          <a:bodyPr wrap="square" lIns="127" tIns="127" rIns="127" bIns="127" rtlCol="0" anchor="t">
+            <a:normAutofit/>
+          </a:bodyPr>
+          <a:lstStyle/>
+          <a:p>
+            <a:pPr marL="0" indent="0" algn="l">
+              <a:buNone/>
+            </a:pPr>
+            <a:r>
+              <a:rPr lang="en-US" sz="1000" dirty="0">
+                <a:solidFill>
+                  <a:srgbClr val="334155"/>
+                </a:solidFill>
+                <a:latin typeface="微软雅黑" panose="020B0503020204020204" pitchFamily="34" charset="-122"/>
+                <a:ea typeface="微软雅黑" panose="020B0503020204020204" pitchFamily="34" charset="-122"/>
+                <a:cs typeface="微软雅黑" panose="020B0503020204020204" pitchFamily="34" charset="-122"/>
+              </a:rPr>
+              <a:t>短信/邮件、平台角色</a:t>
+            </a:r>
+            <a:endParaRPr lang="en-US" sz="1000" dirty="0">
+              <a:latin typeface="微软雅黑" panose="020B0503020204020204" pitchFamily="34" charset="-122"/>
+              <a:ea typeface="微软雅黑" panose="020B0503020204020204" pitchFamily="34" charset="-122"/>
+              <a:cs typeface="微软雅黑" panose="020B0503020204020204" pitchFamily="34" charset="-122"/>
+            </a:endParaRPr>
+          </a:p>
+          <a:p>
+            <a:pPr marL="0" indent="0" algn="l">
+              <a:buNone/>
+            </a:pPr>
+            <a:r>
+              <a:rPr lang="en-US" sz="1000" dirty="0">
+                <a:solidFill>
+                  <a:srgbClr val="334155"/>
+                </a:solidFill>
+                <a:latin typeface="微软雅黑" panose="020B0503020204020204" pitchFamily="34" charset="-122"/>
+                <a:ea typeface="微软雅黑" panose="020B0503020204020204" pitchFamily="34" charset="-122"/>
+                <a:cs typeface="微软雅黑" panose="020B0503020204020204" pitchFamily="34" charset="-122"/>
+              </a:rPr>
+              <a:t>消息通知和系统参数</a:t>
+            </a:r>
+            <a:endParaRPr lang="en-US" sz="1000" dirty="0">
+              <a:latin typeface="微软雅黑" panose="020B0503020204020204" pitchFamily="34" charset="-122"/>
+              <a:ea typeface="微软雅黑" panose="020B0503020204020204" pitchFamily="34" charset="-122"/>
+              <a:cs typeface="微软雅黑" panose="020B0503020204020204" pitchFamily="34" charset="-122"/>
+            </a:endParaRPr>
+          </a:p>
+        </p:txBody>
+      </p:sp>
+      <p:sp>
+        <p:nvSpPr>
+          <p:cNvPr id="25" name="Shape 23"/>
+          <p:cNvSpPr/>
+          <p:nvPr/>
+        </p:nvSpPr>
+        <p:spPr>
+          <a:xfrm>
+            <a:off x="8759825" y="419735"/>
+            <a:ext cx="2633345" cy="728980"/>
+          </a:xfrm>
+          <a:prstGeom prst="roundRect">
+            <a:avLst>
+              <a:gd name="adj" fmla="val 4993"/>
+            </a:avLst>
+          </a:prstGeom>
+          <a:solidFill>
+            <a:srgbClr val="FFFFFF"/>
+          </a:solidFill>
+          <a:ln w="13970">
+            <a:solidFill>
+              <a:srgbClr val="93C5FD"/>
+            </a:solidFill>
+            <a:prstDash val="solid"/>
+          </a:ln>
+          <a:effectLst>
+            <a:outerShdw blurRad="25400" dist="50800" dir="2700000" algn="bl" rotWithShape="0">
+              <a:srgbClr val="172554">
+                <a:alpha val="10000"/>
+              </a:srgbClr>
+            </a:outerShdw>
+          </a:effectLst>
+        </p:spPr>
+      </p:sp>
+      <p:sp>
+        <p:nvSpPr>
+          <p:cNvPr id="27" name="Text 25"/>
+          <p:cNvSpPr/>
+          <p:nvPr/>
+        </p:nvSpPr>
+        <p:spPr>
+          <a:xfrm>
+            <a:off x="9318625" y="446405"/>
+            <a:ext cx="1687195" cy="214630"/>
+          </a:xfrm>
+          <a:prstGeom prst="rect">
+            <a:avLst/>
+          </a:prstGeom>
+          <a:noFill/>
+        </p:spPr>
+        <p:txBody>
+          <a:bodyPr wrap="square" lIns="0" tIns="0" rIns="0" bIns="0" rtlCol="0" anchor="ctr">
+            <a:normAutofit/>
+          </a:bodyPr>
+          <a:lstStyle/>
+          <a:p>
+            <a:pPr marL="0" indent="0" algn="l">
+              <a:buNone/>
+            </a:pPr>
+            <a:r>
+              <a:rPr lang="en-US" sz="1300" b="1" dirty="0">
+                <a:solidFill>
+                  <a:srgbClr val="0F172A"/>
+                </a:solidFill>
+                <a:latin typeface="微软雅黑" panose="020B0503020204020204" pitchFamily="34" charset="-122"/>
+                <a:ea typeface="微软雅黑" panose="020B0503020204020204" pitchFamily="34" charset="-122"/>
+                <a:cs typeface="微软雅黑" panose="020B0503020204020204" pitchFamily="34" charset="-120"/>
+              </a:rPr>
+              <a:t>对外接口服务</a:t>
+            </a:r>
+            <a:endParaRPr lang="en-US" sz="1300" dirty="0"/>
+          </a:p>
+        </p:txBody>
+      </p:sp>
+      <p:sp>
+        <p:nvSpPr>
+          <p:cNvPr id="28" name="Text 26"/>
+          <p:cNvSpPr/>
+          <p:nvPr/>
+        </p:nvSpPr>
+        <p:spPr>
+          <a:xfrm>
+            <a:off x="8905875" y="713740"/>
+            <a:ext cx="2413635" cy="368935"/>
+          </a:xfrm>
+          <a:prstGeom prst="rect">
+            <a:avLst/>
+          </a:prstGeom>
+          <a:noFill/>
+        </p:spPr>
+        <p:txBody>
+          <a:bodyPr wrap="square" lIns="127" tIns="127" rIns="127" bIns="127" rtlCol="0" anchor="t">
+            <a:normAutofit/>
+          </a:bodyPr>
+          <a:lstStyle/>
+          <a:p>
+            <a:pPr marL="0" indent="0" algn="l">
+              <a:buNone/>
+            </a:pPr>
+            <a:r>
+              <a:rPr lang="en-US" sz="1000" dirty="0">
+                <a:solidFill>
+                  <a:srgbClr val="334155"/>
+                </a:solidFill>
+                <a:latin typeface="微软雅黑" panose="020B0503020204020204" pitchFamily="34" charset="-122"/>
+                <a:ea typeface="微软雅黑" panose="020B0503020204020204" pitchFamily="34" charset="-122"/>
+                <a:cs typeface="微软雅黑" panose="020B0503020204020204" pitchFamily="34" charset="-120"/>
+              </a:rPr>
+              <a:t>接入连接器适配、资源发布与鉴权</a:t>
+            </a:r>
+            <a:endParaRPr lang="en-US" sz="1000" dirty="0">
+              <a:latin typeface="微软雅黑" panose="020B0503020204020204" pitchFamily="34" charset="-122"/>
+              <a:ea typeface="微软雅黑" panose="020B0503020204020204" pitchFamily="34" charset="-122"/>
+            </a:endParaRPr>
+          </a:p>
+          <a:p>
+            <a:pPr marL="0" indent="0" algn="l">
+              <a:buNone/>
+            </a:pPr>
+            <a:r>
+              <a:rPr lang="en-US" sz="1000" dirty="0">
+                <a:solidFill>
+                  <a:srgbClr val="334155"/>
+                </a:solidFill>
+                <a:latin typeface="微软雅黑" panose="020B0503020204020204" pitchFamily="34" charset="-122"/>
+                <a:ea typeface="微软雅黑" panose="020B0503020204020204" pitchFamily="34" charset="-122"/>
+                <a:cs typeface="微软雅黑" panose="020B0503020204020204" pitchFamily="34" charset="-120"/>
+              </a:rPr>
+              <a:t>回调、接口文档和审计</a:t>
+            </a:r>
+            <a:endParaRPr lang="en-US" sz="1000" dirty="0">
+              <a:latin typeface="微软雅黑" panose="020B0503020204020204" pitchFamily="34" charset="-122"/>
+              <a:ea typeface="微软雅黑" panose="020B0503020204020204" pitchFamily="34" charset="-122"/>
+            </a:endParaRPr>
+          </a:p>
+        </p:txBody>
+      </p:sp>
+      <p:sp>
+        <p:nvSpPr>
+          <p:cNvPr id="30" name="Shape 28"/>
+          <p:cNvSpPr/>
+          <p:nvPr/>
+        </p:nvSpPr>
+        <p:spPr>
+          <a:xfrm>
+            <a:off x="502920" y="1684655"/>
+            <a:ext cx="3566160" cy="1514475"/>
+          </a:xfrm>
+          <a:prstGeom prst="roundRect">
+            <a:avLst>
+              <a:gd name="adj" fmla="val 7042"/>
+            </a:avLst>
+          </a:prstGeom>
+          <a:solidFill>
+            <a:srgbClr val="FFFFFF"/>
+          </a:solidFill>
+          <a:ln w="13970">
+            <a:solidFill>
+              <a:srgbClr val="60A5FA"/>
+            </a:solidFill>
+            <a:prstDash val="solid"/>
+          </a:ln>
+          <a:effectLst>
+            <a:outerShdw blurRad="25400" dist="50800" dir="2700000" algn="bl" rotWithShape="0">
+              <a:srgbClr val="172554">
+                <a:alpha val="10000"/>
+              </a:srgbClr>
+            </a:outerShdw>
+          </a:effectLst>
+        </p:spPr>
+      </p:sp>
+      <p:sp>
+        <p:nvSpPr>
+          <p:cNvPr id="33" name="Text 31"/>
+          <p:cNvSpPr/>
+          <p:nvPr/>
+        </p:nvSpPr>
+        <p:spPr>
+          <a:xfrm>
+            <a:off x="667385" y="1994535"/>
+            <a:ext cx="3237230" cy="984885"/>
+          </a:xfrm>
+          <a:prstGeom prst="rect">
+            <a:avLst/>
+          </a:prstGeom>
+          <a:noFill/>
+        </p:spPr>
+        <p:txBody>
+          <a:bodyPr wrap="square" lIns="127" tIns="127" rIns="127" bIns="127" rtlCol="0" anchor="t">
+            <a:normAutofit/>
+          </a:bodyPr>
+          <a:lstStyle/>
+          <a:p>
+            <a:pPr marL="0" indent="0" algn="l">
+              <a:lnSpc>
+                <a:spcPct val="150000"/>
+              </a:lnSpc>
+              <a:buNone/>
+            </a:pPr>
+            <a:r>
+              <a:rPr lang="en-US" sz="1000" dirty="0">
+                <a:solidFill>
+                  <a:srgbClr val="334155"/>
+                </a:solidFill>
+                <a:latin typeface="微软雅黑" panose="020B0503020204020204" pitchFamily="34" charset="-122"/>
+                <a:ea typeface="微软雅黑" panose="020B0503020204020204" pitchFamily="34" charset="-122"/>
+                <a:cs typeface="微软雅黑" panose="020B0503020204020204" pitchFamily="34" charset="-122"/>
+              </a:rPr>
+              <a:t>• 数据集、模型、API、SaaS、报告及咨询登记</a:t>
+            </a:r>
+            <a:endParaRPr lang="en-US" sz="1000" dirty="0">
+              <a:latin typeface="微软雅黑" panose="020B0503020204020204" pitchFamily="34" charset="-122"/>
+              <a:ea typeface="微软雅黑" panose="020B0503020204020204" pitchFamily="34" charset="-122"/>
+              <a:cs typeface="微软雅黑" panose="020B0503020204020204" pitchFamily="34" charset="-122"/>
+            </a:endParaRPr>
+          </a:p>
+          <a:p>
+            <a:pPr marL="0" indent="0" algn="l">
+              <a:lnSpc>
+                <a:spcPct val="150000"/>
+              </a:lnSpc>
+              <a:buNone/>
+            </a:pPr>
+            <a:r>
+              <a:rPr lang="en-US" sz="1000" dirty="0">
+                <a:solidFill>
+                  <a:srgbClr val="334155"/>
+                </a:solidFill>
+                <a:latin typeface="微软雅黑" panose="020B0503020204020204" pitchFamily="34" charset="-122"/>
+                <a:ea typeface="微软雅黑" panose="020B0503020204020204" pitchFamily="34" charset="-122"/>
+                <a:cs typeface="微软雅黑" panose="020B0503020204020204" pitchFamily="34" charset="-122"/>
+              </a:rPr>
+              <a:t>• 目录、元数据、版本、价格和交付方式</a:t>
+            </a:r>
+            <a:endParaRPr lang="en-US" sz="1000" dirty="0">
+              <a:latin typeface="微软雅黑" panose="020B0503020204020204" pitchFamily="34" charset="-122"/>
+              <a:ea typeface="微软雅黑" panose="020B0503020204020204" pitchFamily="34" charset="-122"/>
+              <a:cs typeface="微软雅黑" panose="020B0503020204020204" pitchFamily="34" charset="-122"/>
+            </a:endParaRPr>
+          </a:p>
+          <a:p>
+            <a:pPr marL="0" indent="0" algn="l">
+              <a:lnSpc>
+                <a:spcPct val="150000"/>
+              </a:lnSpc>
+              <a:buNone/>
+            </a:pPr>
+            <a:r>
+              <a:rPr lang="en-US" sz="1000" dirty="0">
+                <a:solidFill>
+                  <a:srgbClr val="334155"/>
+                </a:solidFill>
+                <a:latin typeface="微软雅黑" panose="020B0503020204020204" pitchFamily="34" charset="-122"/>
+                <a:ea typeface="微软雅黑" panose="020B0503020204020204" pitchFamily="34" charset="-122"/>
+                <a:cs typeface="微软雅黑" panose="020B0503020204020204" pitchFamily="34" charset="-122"/>
+              </a:rPr>
+              <a:t>• 产品审核、质量审核、安全合规和上架发布</a:t>
+            </a:r>
+            <a:endParaRPr lang="en-US" sz="1000" dirty="0">
+              <a:latin typeface="微软雅黑" panose="020B0503020204020204" pitchFamily="34" charset="-122"/>
+              <a:ea typeface="微软雅黑" panose="020B0503020204020204" pitchFamily="34" charset="-122"/>
+              <a:cs typeface="微软雅黑" panose="020B0503020204020204" pitchFamily="34" charset="-122"/>
+            </a:endParaRPr>
+          </a:p>
+          <a:p>
+            <a:pPr marL="0" indent="0" algn="l">
+              <a:lnSpc>
+                <a:spcPct val="150000"/>
+              </a:lnSpc>
+              <a:buNone/>
+            </a:pPr>
+            <a:r>
+              <a:rPr lang="en-US" sz="1000" dirty="0">
+                <a:solidFill>
+                  <a:srgbClr val="334155"/>
+                </a:solidFill>
+                <a:latin typeface="微软雅黑" panose="020B0503020204020204" pitchFamily="34" charset="-122"/>
+                <a:ea typeface="微软雅黑" panose="020B0503020204020204" pitchFamily="34" charset="-122"/>
+                <a:cs typeface="微软雅黑" panose="020B0503020204020204" pitchFamily="34" charset="-122"/>
+              </a:rPr>
+              <a:t>• API/SaaS 对接规范、OAuth 凭据和网关配置</a:t>
+            </a:r>
+            <a:endParaRPr lang="en-US" sz="1000" dirty="0">
+              <a:latin typeface="微软雅黑" panose="020B0503020204020204" pitchFamily="34" charset="-122"/>
+              <a:ea typeface="微软雅黑" panose="020B0503020204020204" pitchFamily="34" charset="-122"/>
+              <a:cs typeface="微软雅黑" panose="020B0503020204020204" pitchFamily="34" charset="-122"/>
+            </a:endParaRPr>
+          </a:p>
+        </p:txBody>
+      </p:sp>
+      <p:sp>
+        <p:nvSpPr>
+          <p:cNvPr id="34" name="Text 32"/>
+          <p:cNvSpPr/>
+          <p:nvPr/>
+        </p:nvSpPr>
+        <p:spPr>
+          <a:xfrm>
+            <a:off x="667385" y="2961640"/>
+            <a:ext cx="3237230" cy="222885"/>
+          </a:xfrm>
+          <a:prstGeom prst="rect">
+            <a:avLst/>
+          </a:prstGeom>
+          <a:noFill/>
+        </p:spPr>
+        <p:txBody>
+          <a:bodyPr wrap="square" lIns="0" tIns="0" rIns="0" bIns="0" rtlCol="0" anchor="ctr">
+            <a:normAutofit/>
+          </a:bodyPr>
+          <a:lstStyle/>
+          <a:p>
+            <a:pPr marL="0" indent="0" algn="l">
+              <a:buNone/>
+            </a:pPr>
+            <a:r>
+              <a:rPr lang="en-US" sz="1000" b="1" i="1" dirty="0">
+                <a:solidFill>
+                  <a:srgbClr val="64748B"/>
+                </a:solidFill>
+                <a:latin typeface="微软雅黑" panose="020B0503020204020204" pitchFamily="34" charset="-122"/>
+                <a:ea typeface="微软雅黑" panose="020B0503020204020204" pitchFamily="34" charset="-122"/>
+                <a:cs typeface="微软雅黑" panose="020B0503020204020204" pitchFamily="34" charset="-120"/>
+              </a:rPr>
+              <a:t>面向数据/服务提供方与平台运营人员</a:t>
+            </a:r>
+            <a:endParaRPr lang="en-US" sz="1000" b="1" i="1" dirty="0">
+              <a:solidFill>
+                <a:srgbClr val="64748B"/>
+              </a:solidFill>
+              <a:latin typeface="微软雅黑" panose="020B0503020204020204" pitchFamily="34" charset="-122"/>
+              <a:ea typeface="微软雅黑" panose="020B0503020204020204" pitchFamily="34" charset="-122"/>
+              <a:cs typeface="微软雅黑" panose="020B0503020204020204" pitchFamily="34" charset="-120"/>
+            </a:endParaRPr>
+          </a:p>
+        </p:txBody>
+      </p:sp>
+      <p:sp>
+        <p:nvSpPr>
+          <p:cNvPr id="35" name="Shape 33"/>
+          <p:cNvSpPr/>
+          <p:nvPr/>
+        </p:nvSpPr>
+        <p:spPr>
+          <a:xfrm>
+            <a:off x="4316095" y="1684655"/>
+            <a:ext cx="3566160" cy="1514475"/>
+          </a:xfrm>
+          <a:prstGeom prst="roundRect">
+            <a:avLst>
+              <a:gd name="adj" fmla="val 7042"/>
+            </a:avLst>
+          </a:prstGeom>
+          <a:solidFill>
+            <a:srgbClr val="FFFFFF"/>
+          </a:solidFill>
+          <a:ln w="13970">
+            <a:solidFill>
+              <a:srgbClr val="8B5CF6"/>
+            </a:solidFill>
+            <a:prstDash val="solid"/>
+          </a:ln>
+          <a:effectLst>
+            <a:outerShdw blurRad="25400" dist="50800" dir="2700000" algn="bl" rotWithShape="0">
+              <a:srgbClr val="172554">
+                <a:alpha val="10000"/>
+              </a:srgbClr>
+            </a:outerShdw>
+          </a:effectLst>
+        </p:spPr>
+      </p:sp>
+      <p:sp>
+        <p:nvSpPr>
+          <p:cNvPr id="38" name="Text 36"/>
+          <p:cNvSpPr/>
+          <p:nvPr/>
+        </p:nvSpPr>
+        <p:spPr>
+          <a:xfrm>
+            <a:off x="4480560" y="1993900"/>
+            <a:ext cx="3237230" cy="985520"/>
+          </a:xfrm>
+          <a:prstGeom prst="rect">
+            <a:avLst/>
+          </a:prstGeom>
+          <a:noFill/>
+        </p:spPr>
+        <p:txBody>
+          <a:bodyPr wrap="square" lIns="127" tIns="127" rIns="127" bIns="127" rtlCol="0" anchor="t">
+            <a:normAutofit/>
+          </a:bodyPr>
+          <a:lstStyle/>
+          <a:p>
+            <a:pPr marL="0" indent="0" algn="l">
+              <a:lnSpc>
+                <a:spcPct val="150000"/>
+              </a:lnSpc>
+              <a:buNone/>
+            </a:pPr>
+            <a:r>
+              <a:rPr lang="en-US" sz="1000" dirty="0">
+                <a:solidFill>
+                  <a:srgbClr val="334155"/>
+                </a:solidFill>
+                <a:latin typeface="微软雅黑" panose="020B0503020204020204" pitchFamily="34" charset="-122"/>
+                <a:ea typeface="微软雅黑" panose="020B0503020204020204" pitchFamily="34" charset="-122"/>
+                <a:cs typeface="微软雅黑" panose="020B0503020204020204" pitchFamily="34" charset="-122"/>
+              </a:rPr>
+              <a:t>• 购物车、订单创建、取消、支付单和人工确认</a:t>
+            </a:r>
+            <a:endParaRPr lang="en-US" sz="1000" dirty="0">
+              <a:latin typeface="微软雅黑" panose="020B0503020204020204" pitchFamily="34" charset="-122"/>
+              <a:ea typeface="微软雅黑" panose="020B0503020204020204" pitchFamily="34" charset="-122"/>
+              <a:cs typeface="微软雅黑" panose="020B0503020204020204" pitchFamily="34" charset="-122"/>
+            </a:endParaRPr>
+          </a:p>
+          <a:p>
+            <a:pPr marL="0" indent="0" algn="l">
+              <a:lnSpc>
+                <a:spcPct val="150000"/>
+              </a:lnSpc>
+              <a:buNone/>
+            </a:pPr>
+            <a:r>
+              <a:rPr lang="en-US" sz="1000" dirty="0">
+                <a:solidFill>
+                  <a:srgbClr val="334155"/>
+                </a:solidFill>
+                <a:latin typeface="微软雅黑" panose="020B0503020204020204" pitchFamily="34" charset="-122"/>
+                <a:ea typeface="微软雅黑" panose="020B0503020204020204" pitchFamily="34" charset="-122"/>
+                <a:cs typeface="微软雅黑" panose="020B0503020204020204" pitchFamily="34" charset="-122"/>
+              </a:rPr>
+              <a:t>• 订单、支付、交付、售后四域状态机</a:t>
+            </a:r>
+            <a:endParaRPr lang="en-US" sz="1000" dirty="0">
+              <a:latin typeface="微软雅黑" panose="020B0503020204020204" pitchFamily="34" charset="-122"/>
+              <a:ea typeface="微软雅黑" panose="020B0503020204020204" pitchFamily="34" charset="-122"/>
+              <a:cs typeface="微软雅黑" panose="020B0503020204020204" pitchFamily="34" charset="-122"/>
+            </a:endParaRPr>
+          </a:p>
+          <a:p>
+            <a:pPr marL="0" indent="0" algn="l">
+              <a:lnSpc>
+                <a:spcPct val="150000"/>
+              </a:lnSpc>
+              <a:buNone/>
+            </a:pPr>
+            <a:r>
+              <a:rPr lang="en-US" sz="1000" dirty="0">
+                <a:solidFill>
+                  <a:srgbClr val="334155"/>
+                </a:solidFill>
+                <a:latin typeface="微软雅黑" panose="020B0503020204020204" pitchFamily="34" charset="-122"/>
+                <a:ea typeface="微软雅黑" panose="020B0503020204020204" pitchFamily="34" charset="-122"/>
+                <a:cs typeface="微软雅黑" panose="020B0503020204020204" pitchFamily="34" charset="-122"/>
+              </a:rPr>
+              <a:t>• 订阅开通、续费、升级/降级及差价计算</a:t>
+            </a:r>
+            <a:endParaRPr lang="en-US" sz="1000" dirty="0">
+              <a:latin typeface="微软雅黑" panose="020B0503020204020204" pitchFamily="34" charset="-122"/>
+              <a:ea typeface="微软雅黑" panose="020B0503020204020204" pitchFamily="34" charset="-122"/>
+              <a:cs typeface="微软雅黑" panose="020B0503020204020204" pitchFamily="34" charset="-122"/>
+            </a:endParaRPr>
+          </a:p>
+          <a:p>
+            <a:pPr marL="0" indent="0" algn="l">
+              <a:lnSpc>
+                <a:spcPct val="150000"/>
+              </a:lnSpc>
+              <a:buNone/>
+            </a:pPr>
+            <a:r>
+              <a:rPr lang="en-US" sz="1000" dirty="0">
+                <a:solidFill>
+                  <a:srgbClr val="334155"/>
+                </a:solidFill>
+                <a:latin typeface="微软雅黑" panose="020B0503020204020204" pitchFamily="34" charset="-122"/>
+                <a:ea typeface="微软雅黑" panose="020B0503020204020204" pitchFamily="34" charset="-122"/>
+                <a:cs typeface="微软雅黑" panose="020B0503020204020204" pitchFamily="34" charset="-122"/>
+              </a:rPr>
+              <a:t>• 退款、原路退回、订单授权和访问回收</a:t>
+            </a:r>
+            <a:endParaRPr lang="en-US" sz="1000" dirty="0">
+              <a:latin typeface="微软雅黑" panose="020B0503020204020204" pitchFamily="34" charset="-122"/>
+              <a:ea typeface="微软雅黑" panose="020B0503020204020204" pitchFamily="34" charset="-122"/>
+              <a:cs typeface="微软雅黑" panose="020B0503020204020204" pitchFamily="34" charset="-122"/>
+            </a:endParaRPr>
+          </a:p>
+        </p:txBody>
+      </p:sp>
+      <p:sp>
+        <p:nvSpPr>
+          <p:cNvPr id="39" name="Text 37"/>
+          <p:cNvSpPr/>
+          <p:nvPr/>
+        </p:nvSpPr>
+        <p:spPr>
+          <a:xfrm>
+            <a:off x="4434840" y="2986786"/>
+            <a:ext cx="3236976" cy="137160"/>
+          </a:xfrm>
+          <a:prstGeom prst="rect">
+            <a:avLst/>
+          </a:prstGeom>
+          <a:noFill/>
+        </p:spPr>
+        <p:txBody>
+          <a:bodyPr wrap="square" lIns="0" tIns="0" rIns="0" bIns="0" rtlCol="0" anchor="ctr">
+            <a:noAutofit/>
+          </a:bodyPr>
+          <a:lstStyle/>
+          <a:p>
+            <a:pPr marL="0" indent="0" algn="l">
+              <a:buNone/>
+            </a:pPr>
+            <a:r>
+              <a:rPr lang="en-US" sz="1000" b="1" i="1" dirty="0">
+                <a:solidFill>
+                  <a:srgbClr val="64748B"/>
+                </a:solidFill>
+                <a:latin typeface="微软雅黑" panose="020B0503020204020204" pitchFamily="34" charset="-122"/>
+                <a:ea typeface="微软雅黑" panose="020B0503020204020204" pitchFamily="34" charset="-122"/>
+                <a:cs typeface="微软雅黑" panose="020B0503020204020204" pitchFamily="34" charset="-120"/>
+              </a:rPr>
+              <a:t>面向已实名个人用户与企业租户</a:t>
+            </a:r>
+            <a:endParaRPr lang="en-US" sz="1000" b="1" i="1" dirty="0">
+              <a:solidFill>
+                <a:srgbClr val="64748B"/>
+              </a:solidFill>
+              <a:latin typeface="微软雅黑" panose="020B0503020204020204" pitchFamily="34" charset="-122"/>
+              <a:ea typeface="微软雅黑" panose="020B0503020204020204" pitchFamily="34" charset="-122"/>
+              <a:cs typeface="微软雅黑" panose="020B0503020204020204" pitchFamily="34" charset="-120"/>
+            </a:endParaRPr>
+          </a:p>
+        </p:txBody>
+      </p:sp>
+      <p:sp>
+        <p:nvSpPr>
+          <p:cNvPr id="40" name="Shape 38"/>
+          <p:cNvSpPr/>
+          <p:nvPr/>
+        </p:nvSpPr>
+        <p:spPr>
+          <a:xfrm>
+            <a:off x="8129270" y="1691005"/>
+            <a:ext cx="3557270" cy="1508125"/>
+          </a:xfrm>
+          <a:prstGeom prst="roundRect">
+            <a:avLst>
+              <a:gd name="adj" fmla="val 7042"/>
+            </a:avLst>
+          </a:prstGeom>
+          <a:solidFill>
+            <a:srgbClr val="FFFFFF"/>
+          </a:solidFill>
+          <a:ln w="13970">
+            <a:solidFill>
+              <a:srgbClr val="14B8A6"/>
+            </a:solidFill>
+            <a:prstDash val="solid"/>
+          </a:ln>
+          <a:effectLst>
+            <a:outerShdw blurRad="25400" dist="50800" dir="2700000" algn="bl" rotWithShape="0">
+              <a:srgbClr val="172554">
+                <a:alpha val="10000"/>
+              </a:srgbClr>
+            </a:outerShdw>
+          </a:effectLst>
+        </p:spPr>
+      </p:sp>
+      <p:sp>
+        <p:nvSpPr>
+          <p:cNvPr id="43" name="Text 41"/>
+          <p:cNvSpPr/>
+          <p:nvPr/>
+        </p:nvSpPr>
+        <p:spPr>
+          <a:xfrm>
+            <a:off x="8293735" y="2006600"/>
+            <a:ext cx="3227705" cy="972820"/>
+          </a:xfrm>
+          <a:prstGeom prst="rect">
+            <a:avLst/>
+          </a:prstGeom>
+          <a:noFill/>
+        </p:spPr>
+        <p:txBody>
+          <a:bodyPr wrap="square" lIns="127" tIns="127" rIns="127" bIns="127" rtlCol="0" anchor="t">
+            <a:normAutofit/>
+          </a:bodyPr>
+          <a:lstStyle/>
+          <a:p>
+            <a:pPr marL="0" indent="0" algn="l">
+              <a:lnSpc>
+                <a:spcPct val="150000"/>
+              </a:lnSpc>
+              <a:buNone/>
+            </a:pPr>
+            <a:r>
+              <a:rPr lang="en-US" sz="1000" dirty="0">
+                <a:solidFill>
+                  <a:srgbClr val="334155"/>
+                </a:solidFill>
+                <a:latin typeface="微软雅黑" panose="020B0503020204020204" pitchFamily="34" charset="-122"/>
+                <a:ea typeface="微软雅黑" panose="020B0503020204020204" pitchFamily="34" charset="-122"/>
+                <a:cs typeface="微软雅黑" panose="020B0503020204020204" pitchFamily="34" charset="-122"/>
+              </a:rPr>
+              <a:t>• 文件、对象存储、API、模型 API 交付</a:t>
+            </a:r>
+            <a:endParaRPr lang="en-US" sz="1000" dirty="0">
+              <a:latin typeface="微软雅黑" panose="020B0503020204020204" pitchFamily="34" charset="-122"/>
+              <a:ea typeface="微软雅黑" panose="020B0503020204020204" pitchFamily="34" charset="-122"/>
+              <a:cs typeface="微软雅黑" panose="020B0503020204020204" pitchFamily="34" charset="-122"/>
+            </a:endParaRPr>
+          </a:p>
+          <a:p>
+            <a:pPr marL="0" indent="0" algn="l">
+              <a:lnSpc>
+                <a:spcPct val="150000"/>
+              </a:lnSpc>
+              <a:buNone/>
+            </a:pPr>
+            <a:r>
+              <a:rPr lang="en-US" sz="1000" dirty="0">
+                <a:solidFill>
+                  <a:srgbClr val="334155"/>
+                </a:solidFill>
+                <a:latin typeface="微软雅黑" panose="020B0503020204020204" pitchFamily="34" charset="-122"/>
+                <a:ea typeface="微软雅黑" panose="020B0503020204020204" pitchFamily="34" charset="-122"/>
+                <a:cs typeface="微软雅黑" panose="020B0503020204020204" pitchFamily="34" charset="-122"/>
+              </a:rPr>
+              <a:t>• SaaS 租户开通、版本切换和权限开通</a:t>
+            </a:r>
+            <a:endParaRPr lang="en-US" sz="1000" dirty="0">
+              <a:latin typeface="微软雅黑" panose="020B0503020204020204" pitchFamily="34" charset="-122"/>
+              <a:ea typeface="微软雅黑" panose="020B0503020204020204" pitchFamily="34" charset="-122"/>
+              <a:cs typeface="微软雅黑" panose="020B0503020204020204" pitchFamily="34" charset="-122"/>
+            </a:endParaRPr>
+          </a:p>
+          <a:p>
+            <a:pPr marL="0" indent="0" algn="l">
+              <a:lnSpc>
+                <a:spcPct val="150000"/>
+              </a:lnSpc>
+              <a:buNone/>
+            </a:pPr>
+            <a:r>
+              <a:rPr lang="en-US" sz="1000" dirty="0">
+                <a:solidFill>
+                  <a:srgbClr val="334155"/>
+                </a:solidFill>
+                <a:latin typeface="微软雅黑" panose="020B0503020204020204" pitchFamily="34" charset="-122"/>
+                <a:ea typeface="微软雅黑" panose="020B0503020204020204" pitchFamily="34" charset="-122"/>
+                <a:cs typeface="微软雅黑" panose="020B0503020204020204" pitchFamily="34" charset="-122"/>
+              </a:rPr>
+              <a:t>• 用户、部门与第三方 SaaS 系统同步</a:t>
+            </a:r>
+            <a:endParaRPr lang="en-US" sz="1000" dirty="0">
+              <a:latin typeface="微软雅黑" panose="020B0503020204020204" pitchFamily="34" charset="-122"/>
+              <a:ea typeface="微软雅黑" panose="020B0503020204020204" pitchFamily="34" charset="-122"/>
+              <a:cs typeface="微软雅黑" panose="020B0503020204020204" pitchFamily="34" charset="-122"/>
+            </a:endParaRPr>
+          </a:p>
+          <a:p>
+            <a:pPr marL="0" indent="0" algn="l">
+              <a:lnSpc>
+                <a:spcPct val="150000"/>
+              </a:lnSpc>
+              <a:buNone/>
+            </a:pPr>
+            <a:r>
+              <a:rPr lang="en-US" sz="1000" dirty="0">
+                <a:solidFill>
+                  <a:srgbClr val="334155"/>
+                </a:solidFill>
+                <a:latin typeface="微软雅黑" panose="020B0503020204020204" pitchFamily="34" charset="-122"/>
+                <a:ea typeface="微软雅黑" panose="020B0503020204020204" pitchFamily="34" charset="-122"/>
+                <a:cs typeface="微软雅黑" panose="020B0503020204020204" pitchFamily="34" charset="-122"/>
+              </a:rPr>
+              <a:t>• 交付任务、验收确认、售后和状态跟踪</a:t>
+            </a:r>
+            <a:endParaRPr lang="en-US" sz="1000" dirty="0">
+              <a:latin typeface="微软雅黑" panose="020B0503020204020204" pitchFamily="34" charset="-122"/>
+              <a:ea typeface="微软雅黑" panose="020B0503020204020204" pitchFamily="34" charset="-122"/>
+              <a:cs typeface="微软雅黑" panose="020B0503020204020204" pitchFamily="34" charset="-122"/>
+            </a:endParaRPr>
+          </a:p>
+        </p:txBody>
+      </p:sp>
+      <p:sp>
+        <p:nvSpPr>
+          <p:cNvPr id="44" name="Text 42"/>
+          <p:cNvSpPr/>
+          <p:nvPr/>
+        </p:nvSpPr>
+        <p:spPr>
+          <a:xfrm>
+            <a:off x="8293608" y="3017266"/>
+            <a:ext cx="3227832" cy="137160"/>
+          </a:xfrm>
+          <a:prstGeom prst="rect">
+            <a:avLst/>
+          </a:prstGeom>
+          <a:noFill/>
+        </p:spPr>
+        <p:txBody>
+          <a:bodyPr wrap="square" lIns="0" tIns="0" rIns="0" bIns="0" rtlCol="0" anchor="ctr">
+            <a:noAutofit/>
+          </a:bodyPr>
+          <a:lstStyle/>
+          <a:p>
+            <a:pPr marL="0" indent="0" algn="l">
+              <a:buNone/>
+            </a:pPr>
+            <a:r>
+              <a:rPr lang="en-US" sz="1000" b="1" i="1" dirty="0">
+                <a:solidFill>
+                  <a:srgbClr val="64748B"/>
+                </a:solidFill>
+                <a:latin typeface="微软雅黑" panose="020B0503020204020204" pitchFamily="34" charset="-122"/>
+                <a:ea typeface="微软雅黑" panose="020B0503020204020204" pitchFamily="34" charset="-122"/>
+                <a:cs typeface="微软雅黑" panose="020B0503020204020204" pitchFamily="34" charset="-120"/>
+              </a:rPr>
+              <a:t>支撑标准化、可追踪、可审计交付</a:t>
+            </a:r>
+            <a:endParaRPr lang="en-US" sz="1000" b="1" i="1" dirty="0">
+              <a:solidFill>
+                <a:srgbClr val="64748B"/>
+              </a:solidFill>
+              <a:latin typeface="微软雅黑" panose="020B0503020204020204" pitchFamily="34" charset="-122"/>
+              <a:ea typeface="微软雅黑" panose="020B0503020204020204" pitchFamily="34" charset="-122"/>
+              <a:cs typeface="微软雅黑" panose="020B0503020204020204" pitchFamily="34" charset="-120"/>
+            </a:endParaRPr>
+          </a:p>
+        </p:txBody>
+      </p:sp>
+      <p:sp>
+        <p:nvSpPr>
+          <p:cNvPr id="45" name="Shape 43"/>
+          <p:cNvSpPr/>
+          <p:nvPr/>
+        </p:nvSpPr>
+        <p:spPr>
+          <a:xfrm>
+            <a:off x="502920" y="3593465"/>
+            <a:ext cx="3566160" cy="1514475"/>
+          </a:xfrm>
+          <a:prstGeom prst="roundRect">
+            <a:avLst>
+              <a:gd name="adj" fmla="val 7042"/>
+            </a:avLst>
+          </a:prstGeom>
+          <a:solidFill>
+            <a:srgbClr val="FFFFFF"/>
+          </a:solidFill>
+          <a:ln w="13970">
+            <a:solidFill>
+              <a:srgbClr val="F59E0B"/>
+            </a:solidFill>
+            <a:prstDash val="solid"/>
+          </a:ln>
+          <a:effectLst>
+            <a:outerShdw blurRad="25400" dist="50800" dir="2700000" algn="bl" rotWithShape="0">
+              <a:srgbClr val="172554">
+                <a:alpha val="10000"/>
+              </a:srgbClr>
+            </a:outerShdw>
+          </a:effectLst>
+        </p:spPr>
+      </p:sp>
+      <p:sp>
+        <p:nvSpPr>
+          <p:cNvPr id="48" name="Text 46"/>
+          <p:cNvSpPr/>
+          <p:nvPr/>
+        </p:nvSpPr>
+        <p:spPr>
+          <a:xfrm>
+            <a:off x="667385" y="3907155"/>
+            <a:ext cx="3237230" cy="1022350"/>
+          </a:xfrm>
+          <a:prstGeom prst="rect">
+            <a:avLst/>
+          </a:prstGeom>
+          <a:noFill/>
+        </p:spPr>
+        <p:txBody>
+          <a:bodyPr wrap="square" lIns="127" tIns="127" rIns="127" bIns="127" rtlCol="0" anchor="t">
+            <a:normAutofit/>
+          </a:bodyPr>
+          <a:lstStyle/>
+          <a:p>
+            <a:pPr marL="0" indent="0" algn="l">
+              <a:lnSpc>
+                <a:spcPct val="150000"/>
+              </a:lnSpc>
+              <a:buNone/>
+            </a:pPr>
+            <a:r>
+              <a:rPr lang="en-US" sz="1000" dirty="0">
+                <a:solidFill>
+                  <a:srgbClr val="334155"/>
+                </a:solidFill>
+                <a:latin typeface="微软雅黑" panose="020B0503020204020204" pitchFamily="34" charset="-122"/>
+                <a:ea typeface="微软雅黑" panose="020B0503020204020204" pitchFamily="34" charset="-122"/>
+                <a:cs typeface="微软雅黑" panose="020B0503020204020204" pitchFamily="34" charset="-122"/>
+              </a:rPr>
+              <a:t>• 平台服务费、提供方和数据</a:t>
+            </a:r>
+            <a:r>
+              <a:rPr lang="en-US" sz="1000" dirty="0">
+                <a:solidFill>
+                  <a:srgbClr val="334155"/>
+                </a:solidFill>
+                <a:latin typeface="微软雅黑" panose="020B0503020204020204" pitchFamily="34" charset="-122"/>
+                <a:ea typeface="微软雅黑" panose="020B0503020204020204" pitchFamily="34" charset="-122"/>
+                <a:cs typeface="微软雅黑" panose="020B0503020204020204" pitchFamily="34" charset="-122"/>
+              </a:rPr>
+              <a:t>服务方分成</a:t>
+            </a:r>
+            <a:endParaRPr lang="en-US" sz="1000" dirty="0">
+              <a:latin typeface="微软雅黑" panose="020B0503020204020204" pitchFamily="34" charset="-122"/>
+              <a:ea typeface="微软雅黑" panose="020B0503020204020204" pitchFamily="34" charset="-122"/>
+              <a:cs typeface="微软雅黑" panose="020B0503020204020204" pitchFamily="34" charset="-122"/>
+            </a:endParaRPr>
+          </a:p>
+          <a:p>
+            <a:pPr marL="0" indent="0" algn="l">
+              <a:lnSpc>
+                <a:spcPct val="150000"/>
+              </a:lnSpc>
+              <a:buNone/>
+            </a:pPr>
+            <a:r>
+              <a:rPr lang="en-US" sz="1000" dirty="0">
+                <a:solidFill>
+                  <a:srgbClr val="334155"/>
+                </a:solidFill>
+                <a:latin typeface="微软雅黑" panose="020B0503020204020204" pitchFamily="34" charset="-122"/>
+                <a:ea typeface="微软雅黑" panose="020B0503020204020204" pitchFamily="34" charset="-122"/>
+                <a:cs typeface="微软雅黑" panose="020B0503020204020204" pitchFamily="34" charset="-122"/>
+              </a:rPr>
+              <a:t>• 专家费、渠道费、税费等多方费用计算</a:t>
+            </a:r>
+            <a:endParaRPr lang="en-US" sz="1000" dirty="0">
+              <a:latin typeface="微软雅黑" panose="020B0503020204020204" pitchFamily="34" charset="-122"/>
+              <a:ea typeface="微软雅黑" panose="020B0503020204020204" pitchFamily="34" charset="-122"/>
+              <a:cs typeface="微软雅黑" panose="020B0503020204020204" pitchFamily="34" charset="-122"/>
+            </a:endParaRPr>
+          </a:p>
+          <a:p>
+            <a:pPr marL="0" indent="0" algn="l">
+              <a:lnSpc>
+                <a:spcPct val="150000"/>
+              </a:lnSpc>
+              <a:buNone/>
+            </a:pPr>
+            <a:r>
+              <a:rPr lang="en-US" sz="1000" dirty="0">
+                <a:solidFill>
+                  <a:srgbClr val="334155"/>
+                </a:solidFill>
+                <a:latin typeface="微软雅黑" panose="020B0503020204020204" pitchFamily="34" charset="-122"/>
+                <a:ea typeface="微软雅黑" panose="020B0503020204020204" pitchFamily="34" charset="-122"/>
+                <a:cs typeface="微软雅黑" panose="020B0503020204020204" pitchFamily="34" charset="-122"/>
+              </a:rPr>
+              <a:t>• 订单支付、退款和分账追回/抵扣</a:t>
+            </a:r>
+            <a:endParaRPr lang="en-US" sz="1000" dirty="0">
+              <a:latin typeface="微软雅黑" panose="020B0503020204020204" pitchFamily="34" charset="-122"/>
+              <a:ea typeface="微软雅黑" panose="020B0503020204020204" pitchFamily="34" charset="-122"/>
+              <a:cs typeface="微软雅黑" panose="020B0503020204020204" pitchFamily="34" charset="-122"/>
+            </a:endParaRPr>
+          </a:p>
+          <a:p>
+            <a:pPr marL="0" indent="0" algn="l">
+              <a:lnSpc>
+                <a:spcPct val="150000"/>
+              </a:lnSpc>
+              <a:buNone/>
+            </a:pPr>
+            <a:r>
+              <a:rPr lang="en-US" sz="1000" dirty="0">
+                <a:solidFill>
+                  <a:srgbClr val="334155"/>
+                </a:solidFill>
+                <a:latin typeface="微软雅黑" panose="020B0503020204020204" pitchFamily="34" charset="-122"/>
+                <a:ea typeface="微软雅黑" panose="020B0503020204020204" pitchFamily="34" charset="-122"/>
+                <a:cs typeface="微软雅黑" panose="020B0503020204020204" pitchFamily="34" charset="-122"/>
+              </a:rPr>
+              <a:t>• 清算单、台账、调整、锁定和复核</a:t>
+            </a:r>
+            <a:endParaRPr lang="en-US" sz="1000" dirty="0">
+              <a:latin typeface="微软雅黑" panose="020B0503020204020204" pitchFamily="34" charset="-122"/>
+              <a:ea typeface="微软雅黑" panose="020B0503020204020204" pitchFamily="34" charset="-122"/>
+              <a:cs typeface="微软雅黑" panose="020B0503020204020204" pitchFamily="34" charset="-122"/>
+            </a:endParaRPr>
+          </a:p>
+        </p:txBody>
+      </p:sp>
+      <p:sp>
+        <p:nvSpPr>
+          <p:cNvPr id="49" name="Text 47"/>
+          <p:cNvSpPr/>
+          <p:nvPr/>
+        </p:nvSpPr>
+        <p:spPr>
+          <a:xfrm>
+            <a:off x="602107" y="4929251"/>
+            <a:ext cx="3236976" cy="137160"/>
+          </a:xfrm>
+          <a:prstGeom prst="rect">
+            <a:avLst/>
+          </a:prstGeom>
+          <a:noFill/>
+        </p:spPr>
+        <p:txBody>
+          <a:bodyPr wrap="square" lIns="0" tIns="0" rIns="0" bIns="0" rtlCol="0" anchor="ctr">
+            <a:noAutofit/>
+          </a:bodyPr>
+          <a:lstStyle/>
+          <a:p>
+            <a:pPr marL="0" indent="0" algn="l">
+              <a:buNone/>
+            </a:pPr>
+            <a:r>
+              <a:rPr lang="en-US" sz="1000" b="1" i="1" dirty="0">
+                <a:solidFill>
+                  <a:srgbClr val="64748B"/>
+                </a:solidFill>
+                <a:latin typeface="微软雅黑" panose="020B0503020204020204" pitchFamily="34" charset="-122"/>
+                <a:ea typeface="微软雅黑" panose="020B0503020204020204" pitchFamily="34" charset="-122"/>
+                <a:cs typeface="微软雅黑" panose="020B0503020204020204" pitchFamily="34" charset="-120"/>
+              </a:rPr>
+              <a:t>确保交易金额可计算、可核对、可追溯</a:t>
+            </a:r>
+            <a:endParaRPr lang="en-US" sz="1000" b="1" i="1" dirty="0">
+              <a:solidFill>
+                <a:srgbClr val="64748B"/>
+              </a:solidFill>
+              <a:latin typeface="微软雅黑" panose="020B0503020204020204" pitchFamily="34" charset="-122"/>
+              <a:ea typeface="微软雅黑" panose="020B0503020204020204" pitchFamily="34" charset="-122"/>
+              <a:cs typeface="微软雅黑" panose="020B0503020204020204" pitchFamily="34" charset="-120"/>
+            </a:endParaRPr>
+          </a:p>
+        </p:txBody>
+      </p:sp>
+      <p:sp>
+        <p:nvSpPr>
+          <p:cNvPr id="50" name="Shape 48"/>
+          <p:cNvSpPr/>
+          <p:nvPr/>
+        </p:nvSpPr>
+        <p:spPr>
+          <a:xfrm>
+            <a:off x="4316095" y="3593465"/>
+            <a:ext cx="3566160" cy="1518285"/>
+          </a:xfrm>
+          <a:prstGeom prst="roundRect">
+            <a:avLst>
+              <a:gd name="adj" fmla="val 7042"/>
+            </a:avLst>
+          </a:prstGeom>
+          <a:solidFill>
+            <a:srgbClr val="FFFFFF"/>
+          </a:solidFill>
+          <a:ln w="13970">
+            <a:solidFill>
+              <a:srgbClr val="64748B"/>
+            </a:solidFill>
+            <a:prstDash val="solid"/>
+          </a:ln>
+          <a:effectLst>
+            <a:outerShdw blurRad="25400" dist="50800" dir="2700000" algn="bl" rotWithShape="0">
+              <a:srgbClr val="172554">
+                <a:alpha val="10000"/>
+              </a:srgbClr>
+            </a:outerShdw>
+          </a:effectLst>
+        </p:spPr>
+      </p:sp>
+      <p:sp>
+        <p:nvSpPr>
+          <p:cNvPr id="53" name="Text 51"/>
+          <p:cNvSpPr/>
+          <p:nvPr/>
+        </p:nvSpPr>
+        <p:spPr>
+          <a:xfrm>
+            <a:off x="4480560" y="3901440"/>
+            <a:ext cx="3237230" cy="990600"/>
+          </a:xfrm>
+          <a:prstGeom prst="rect">
+            <a:avLst/>
+          </a:prstGeom>
+          <a:noFill/>
+        </p:spPr>
+        <p:txBody>
+          <a:bodyPr wrap="square" lIns="127" tIns="127" rIns="127" bIns="127" rtlCol="0" anchor="t">
+            <a:normAutofit/>
+          </a:bodyPr>
+          <a:lstStyle/>
+          <a:p>
+            <a:pPr marL="0" indent="0" algn="l">
+              <a:lnSpc>
+                <a:spcPct val="150000"/>
+              </a:lnSpc>
+              <a:buNone/>
+            </a:pPr>
+            <a:r>
+              <a:rPr lang="en-US" sz="1000" dirty="0">
+                <a:solidFill>
+                  <a:srgbClr val="334155"/>
+                </a:solidFill>
+                <a:latin typeface="微软雅黑" panose="020B0503020204020204" pitchFamily="34" charset="-122"/>
+                <a:ea typeface="微软雅黑" panose="020B0503020204020204" pitchFamily="34" charset="-122"/>
+                <a:cs typeface="微软雅黑" panose="020B0503020204020204" pitchFamily="34" charset="-122"/>
+              </a:rPr>
+              <a:t>• 登录、认证、权限、产品和订单操作留痕</a:t>
+            </a:r>
+            <a:endParaRPr lang="en-US" sz="1000" dirty="0">
+              <a:latin typeface="微软雅黑" panose="020B0503020204020204" pitchFamily="34" charset="-122"/>
+              <a:ea typeface="微软雅黑" panose="020B0503020204020204" pitchFamily="34" charset="-122"/>
+              <a:cs typeface="微软雅黑" panose="020B0503020204020204" pitchFamily="34" charset="-122"/>
+            </a:endParaRPr>
+          </a:p>
+          <a:p>
+            <a:pPr marL="0" indent="0" algn="l">
+              <a:lnSpc>
+                <a:spcPct val="150000"/>
+              </a:lnSpc>
+              <a:buNone/>
+            </a:pPr>
+            <a:r>
+              <a:rPr lang="en-US" sz="1000" dirty="0">
+                <a:solidFill>
+                  <a:srgbClr val="334155"/>
+                </a:solidFill>
+                <a:latin typeface="微软雅黑" panose="020B0503020204020204" pitchFamily="34" charset="-122"/>
+                <a:ea typeface="微软雅黑" panose="020B0503020204020204" pitchFamily="34" charset="-122"/>
+                <a:cs typeface="微软雅黑" panose="020B0503020204020204" pitchFamily="34" charset="-122"/>
+              </a:rPr>
+              <a:t>• 发布、凭据、交付、退款和清算审计</a:t>
+            </a:r>
+            <a:endParaRPr lang="en-US" sz="1000" dirty="0">
+              <a:latin typeface="微软雅黑" panose="020B0503020204020204" pitchFamily="34" charset="-122"/>
+              <a:ea typeface="微软雅黑" panose="020B0503020204020204" pitchFamily="34" charset="-122"/>
+              <a:cs typeface="微软雅黑" panose="020B0503020204020204" pitchFamily="34" charset="-122"/>
+            </a:endParaRPr>
+          </a:p>
+          <a:p>
+            <a:pPr marL="0" indent="0" algn="l">
+              <a:lnSpc>
+                <a:spcPct val="150000"/>
+              </a:lnSpc>
+              <a:buNone/>
+            </a:pPr>
+            <a:r>
+              <a:rPr lang="en-US" sz="1000" dirty="0">
+                <a:solidFill>
+                  <a:srgbClr val="334155"/>
+                </a:solidFill>
+                <a:latin typeface="微软雅黑" panose="020B0503020204020204" pitchFamily="34" charset="-122"/>
+                <a:ea typeface="微软雅黑" panose="020B0503020204020204" pitchFamily="34" charset="-122"/>
+                <a:cs typeface="微软雅黑" panose="020B0503020204020204" pitchFamily="34" charset="-122"/>
+              </a:rPr>
+              <a:t>• 按租户、用户、资源和时间检索</a:t>
+            </a:r>
+            <a:endParaRPr lang="en-US" sz="1000" dirty="0">
+              <a:latin typeface="微软雅黑" panose="020B0503020204020204" pitchFamily="34" charset="-122"/>
+              <a:ea typeface="微软雅黑" panose="020B0503020204020204" pitchFamily="34" charset="-122"/>
+              <a:cs typeface="微软雅黑" panose="020B0503020204020204" pitchFamily="34" charset="-122"/>
+            </a:endParaRPr>
+          </a:p>
+          <a:p>
+            <a:pPr marL="0" indent="0" algn="l">
+              <a:lnSpc>
+                <a:spcPct val="150000"/>
+              </a:lnSpc>
+              <a:buNone/>
+            </a:pPr>
+            <a:r>
+              <a:rPr lang="en-US" sz="1000" dirty="0">
+                <a:solidFill>
+                  <a:srgbClr val="334155"/>
+                </a:solidFill>
+                <a:latin typeface="微软雅黑" panose="020B0503020204020204" pitchFamily="34" charset="-122"/>
+                <a:ea typeface="微软雅黑" panose="020B0503020204020204" pitchFamily="34" charset="-122"/>
+                <a:cs typeface="微软雅黑" panose="020B0503020204020204" pitchFamily="34" charset="-122"/>
+              </a:rPr>
+              <a:t>• 异常访问、网关错误和告警关联</a:t>
+            </a:r>
+            <a:endParaRPr lang="en-US" sz="1000" dirty="0">
+              <a:latin typeface="微软雅黑" panose="020B0503020204020204" pitchFamily="34" charset="-122"/>
+              <a:ea typeface="微软雅黑" panose="020B0503020204020204" pitchFamily="34" charset="-122"/>
+              <a:cs typeface="微软雅黑" panose="020B0503020204020204" pitchFamily="34" charset="-122"/>
+            </a:endParaRPr>
+          </a:p>
+        </p:txBody>
+      </p:sp>
+      <p:sp>
+        <p:nvSpPr>
+          <p:cNvPr id="54" name="Text 52"/>
+          <p:cNvSpPr/>
+          <p:nvPr/>
+        </p:nvSpPr>
+        <p:spPr>
+          <a:xfrm>
+            <a:off x="4480560" y="4929251"/>
+            <a:ext cx="3236976" cy="137160"/>
+          </a:xfrm>
+          <a:prstGeom prst="rect">
+            <a:avLst/>
+          </a:prstGeom>
+          <a:noFill/>
+        </p:spPr>
+        <p:txBody>
+          <a:bodyPr wrap="square" lIns="0" tIns="0" rIns="0" bIns="0" rtlCol="0" anchor="ctr">
+            <a:noAutofit/>
+          </a:bodyPr>
+          <a:lstStyle/>
+          <a:p>
+            <a:pPr marL="0" indent="0" algn="l">
+              <a:buNone/>
+            </a:pPr>
+            <a:r>
+              <a:rPr lang="en-US" sz="1000" b="1" i="1" dirty="0">
+                <a:solidFill>
+                  <a:srgbClr val="64748B"/>
+                </a:solidFill>
+                <a:latin typeface="微软雅黑" panose="020B0503020204020204" pitchFamily="34" charset="-122"/>
+                <a:ea typeface="微软雅黑" panose="020B0503020204020204" pitchFamily="34" charset="-122"/>
+                <a:cs typeface="微软雅黑" panose="020B0503020204020204" pitchFamily="34" charset="-120"/>
+              </a:rPr>
+              <a:t>形成业务、技术和安全合规证据链</a:t>
+            </a:r>
+            <a:endParaRPr lang="en-US" sz="1000" b="1" i="1" dirty="0">
+              <a:solidFill>
+                <a:srgbClr val="64748B"/>
+              </a:solidFill>
+              <a:latin typeface="微软雅黑" panose="020B0503020204020204" pitchFamily="34" charset="-122"/>
+              <a:ea typeface="微软雅黑" panose="020B0503020204020204" pitchFamily="34" charset="-122"/>
+              <a:cs typeface="微软雅黑" panose="020B0503020204020204" pitchFamily="34" charset="-120"/>
+            </a:endParaRPr>
+          </a:p>
+        </p:txBody>
+      </p:sp>
+      <p:sp>
+        <p:nvSpPr>
+          <p:cNvPr id="55" name="Shape 53"/>
+          <p:cNvSpPr/>
+          <p:nvPr/>
+        </p:nvSpPr>
+        <p:spPr>
+          <a:xfrm>
+            <a:off x="8129270" y="3593465"/>
+            <a:ext cx="3557270" cy="1518285"/>
+          </a:xfrm>
+          <a:prstGeom prst="roundRect">
+            <a:avLst>
+              <a:gd name="adj" fmla="val 7042"/>
+            </a:avLst>
+          </a:prstGeom>
+          <a:solidFill>
+            <a:srgbClr val="FFFFFF"/>
+          </a:solidFill>
+          <a:ln w="13970">
+            <a:solidFill>
+              <a:srgbClr val="EC4899"/>
+            </a:solidFill>
+            <a:prstDash val="solid"/>
+          </a:ln>
+          <a:effectLst>
+            <a:outerShdw blurRad="25400" dist="50800" dir="2700000" algn="bl" rotWithShape="0">
+              <a:srgbClr val="172554">
+                <a:alpha val="10000"/>
+              </a:srgbClr>
+            </a:outerShdw>
+          </a:effectLst>
+        </p:spPr>
+      </p:sp>
+      <p:sp>
+        <p:nvSpPr>
+          <p:cNvPr id="58" name="Text 56"/>
+          <p:cNvSpPr/>
+          <p:nvPr/>
+        </p:nvSpPr>
+        <p:spPr>
+          <a:xfrm>
+            <a:off x="8293735" y="3905885"/>
+            <a:ext cx="3227705" cy="1041400"/>
+          </a:xfrm>
+          <a:prstGeom prst="rect">
+            <a:avLst/>
+          </a:prstGeom>
+          <a:noFill/>
+        </p:spPr>
+        <p:txBody>
+          <a:bodyPr wrap="square" lIns="127" tIns="127" rIns="127" bIns="127" rtlCol="0" anchor="t">
+            <a:normAutofit/>
+          </a:bodyPr>
+          <a:lstStyle/>
+          <a:p>
+            <a:pPr marL="0" indent="0" algn="l">
+              <a:lnSpc>
+                <a:spcPct val="150000"/>
+              </a:lnSpc>
+              <a:buNone/>
+            </a:pPr>
+            <a:r>
+              <a:rPr lang="en-US" sz="1000" dirty="0">
+                <a:solidFill>
+                  <a:srgbClr val="334155"/>
+                </a:solidFill>
+                <a:latin typeface="微软雅黑" panose="020B0503020204020204" pitchFamily="34" charset="-122"/>
+                <a:ea typeface="微软雅黑" panose="020B0503020204020204" pitchFamily="34" charset="-122"/>
+                <a:cs typeface="微软雅黑" panose="020B0503020204020204" pitchFamily="34" charset="-122"/>
+              </a:rPr>
+              <a:t>• 平台运营、审核、质量、安全和交付角色协同</a:t>
+            </a:r>
+            <a:endParaRPr lang="en-US" sz="1000" dirty="0">
+              <a:latin typeface="微软雅黑" panose="020B0503020204020204" pitchFamily="34" charset="-122"/>
+              <a:ea typeface="微软雅黑" panose="020B0503020204020204" pitchFamily="34" charset="-122"/>
+              <a:cs typeface="微软雅黑" panose="020B0503020204020204" pitchFamily="34" charset="-122"/>
+            </a:endParaRPr>
+          </a:p>
+          <a:p>
+            <a:pPr marL="0" indent="0" algn="l">
+              <a:lnSpc>
+                <a:spcPct val="150000"/>
+              </a:lnSpc>
+              <a:buNone/>
+            </a:pPr>
+            <a:r>
+              <a:rPr lang="en-US" sz="1000" dirty="0">
+                <a:solidFill>
+                  <a:srgbClr val="334155"/>
+                </a:solidFill>
+                <a:latin typeface="微软雅黑" panose="020B0503020204020204" pitchFamily="34" charset="-122"/>
+                <a:ea typeface="微软雅黑" panose="020B0503020204020204" pitchFamily="34" charset="-122"/>
+                <a:cs typeface="微软雅黑" panose="020B0503020204020204" pitchFamily="34" charset="-122"/>
+              </a:rPr>
+              <a:t>• 产品、订单、交付、清算和审计工作台</a:t>
+            </a:r>
+            <a:endParaRPr lang="en-US" sz="1000" dirty="0">
+              <a:latin typeface="微软雅黑" panose="020B0503020204020204" pitchFamily="34" charset="-122"/>
+              <a:ea typeface="微软雅黑" panose="020B0503020204020204" pitchFamily="34" charset="-122"/>
+              <a:cs typeface="微软雅黑" panose="020B0503020204020204" pitchFamily="34" charset="-122"/>
+            </a:endParaRPr>
+          </a:p>
+          <a:p>
+            <a:pPr marL="0" indent="0" algn="l">
+              <a:lnSpc>
+                <a:spcPct val="150000"/>
+              </a:lnSpc>
+              <a:buNone/>
+            </a:pPr>
+            <a:r>
+              <a:rPr lang="en-US" sz="1000" dirty="0">
+                <a:solidFill>
+                  <a:srgbClr val="334155"/>
+                </a:solidFill>
+                <a:latin typeface="微软雅黑" panose="020B0503020204020204" pitchFamily="34" charset="-122"/>
+                <a:ea typeface="微软雅黑" panose="020B0503020204020204" pitchFamily="34" charset="-122"/>
+                <a:cs typeface="微软雅黑" panose="020B0503020204020204" pitchFamily="34" charset="-122"/>
+              </a:rPr>
+              <a:t>• 网关路由、版本、凭据和调用统计管理</a:t>
+            </a:r>
+            <a:endParaRPr lang="en-US" sz="1000" dirty="0">
+              <a:latin typeface="微软雅黑" panose="020B0503020204020204" pitchFamily="34" charset="-122"/>
+              <a:ea typeface="微软雅黑" panose="020B0503020204020204" pitchFamily="34" charset="-122"/>
+              <a:cs typeface="微软雅黑" panose="020B0503020204020204" pitchFamily="34" charset="-122"/>
+            </a:endParaRPr>
+          </a:p>
+          <a:p>
+            <a:pPr marL="0" indent="0" algn="l">
+              <a:lnSpc>
+                <a:spcPct val="150000"/>
+              </a:lnSpc>
+              <a:buNone/>
+            </a:pPr>
+            <a:r>
+              <a:rPr lang="en-US" sz="1000" dirty="0">
+                <a:solidFill>
+                  <a:srgbClr val="334155"/>
+                </a:solidFill>
+                <a:latin typeface="微软雅黑" panose="020B0503020204020204" pitchFamily="34" charset="-122"/>
+                <a:ea typeface="微软雅黑" panose="020B0503020204020204" pitchFamily="34" charset="-122"/>
+                <a:cs typeface="微软雅黑" panose="020B0503020204020204" pitchFamily="34" charset="-122"/>
+              </a:rPr>
+              <a:t>• 任务进度控制台、配置中心和运营看板</a:t>
+            </a:r>
+            <a:endParaRPr lang="en-US" sz="1000" dirty="0">
+              <a:latin typeface="微软雅黑" panose="020B0503020204020204" pitchFamily="34" charset="-122"/>
+              <a:ea typeface="微软雅黑" panose="020B0503020204020204" pitchFamily="34" charset="-122"/>
+              <a:cs typeface="微软雅黑" panose="020B0503020204020204" pitchFamily="34" charset="-122"/>
+            </a:endParaRPr>
+          </a:p>
+        </p:txBody>
+      </p:sp>
+      <p:sp>
+        <p:nvSpPr>
+          <p:cNvPr id="59" name="Text 57"/>
+          <p:cNvSpPr/>
+          <p:nvPr/>
+        </p:nvSpPr>
+        <p:spPr>
+          <a:xfrm>
+            <a:off x="8293608" y="4929251"/>
+            <a:ext cx="3227832" cy="137160"/>
+          </a:xfrm>
+          <a:prstGeom prst="rect">
+            <a:avLst/>
+          </a:prstGeom>
+          <a:noFill/>
+        </p:spPr>
+        <p:txBody>
+          <a:bodyPr wrap="square" lIns="0" tIns="0" rIns="0" bIns="0" rtlCol="0" anchor="ctr">
+            <a:noAutofit/>
+          </a:bodyPr>
+          <a:lstStyle/>
+          <a:p>
+            <a:pPr marL="0" indent="0" algn="l">
+              <a:buNone/>
+            </a:pPr>
+            <a:r>
+              <a:rPr lang="en-US" sz="1000" b="1" i="1" dirty="0">
+                <a:solidFill>
+                  <a:srgbClr val="64748B"/>
+                </a:solidFill>
+                <a:latin typeface="微软雅黑" panose="020B0503020204020204" pitchFamily="34" charset="-122"/>
+                <a:ea typeface="微软雅黑" panose="020B0503020204020204" pitchFamily="34" charset="-122"/>
+                <a:cs typeface="微软雅黑" panose="020B0503020204020204" pitchFamily="34" charset="-120"/>
+              </a:rPr>
+              <a:t>提供统一运营入口和业务协同能力</a:t>
+            </a:r>
+            <a:endParaRPr lang="en-US" sz="1000" b="1" i="1" dirty="0">
+              <a:solidFill>
+                <a:srgbClr val="64748B"/>
+              </a:solidFill>
+              <a:latin typeface="微软雅黑" panose="020B0503020204020204" pitchFamily="34" charset="-122"/>
+              <a:ea typeface="微软雅黑" panose="020B0503020204020204" pitchFamily="34" charset="-122"/>
+              <a:cs typeface="微软雅黑" panose="020B0503020204020204" pitchFamily="34" charset="-120"/>
+            </a:endParaRPr>
+          </a:p>
+        </p:txBody>
+      </p:sp>
+      <p:sp>
+        <p:nvSpPr>
+          <p:cNvPr id="61" name="Shape 59"/>
+          <p:cNvSpPr/>
+          <p:nvPr/>
+        </p:nvSpPr>
+        <p:spPr>
+          <a:xfrm>
+            <a:off x="642620" y="5554345"/>
+            <a:ext cx="2743200" cy="1059180"/>
+          </a:xfrm>
+          <a:prstGeom prst="roundRect">
+            <a:avLst>
+              <a:gd name="adj" fmla="val 9804"/>
+            </a:avLst>
+          </a:prstGeom>
+          <a:solidFill>
+            <a:srgbClr val="FFFFFF"/>
+          </a:solidFill>
+          <a:ln w="13970">
+            <a:solidFill>
+              <a:srgbClr val="86EFAC"/>
+            </a:solidFill>
+            <a:prstDash val="solid"/>
+          </a:ln>
+          <a:effectLst>
+            <a:outerShdw blurRad="25400" dist="50800" dir="2700000" algn="bl" rotWithShape="0">
+              <a:srgbClr val="172554">
+                <a:alpha val="10000"/>
+              </a:srgbClr>
+            </a:outerShdw>
+          </a:effectLst>
+        </p:spPr>
+      </p:sp>
+      <p:sp>
+        <p:nvSpPr>
+          <p:cNvPr id="64" name="Text 62"/>
+          <p:cNvSpPr/>
+          <p:nvPr/>
+        </p:nvSpPr>
+        <p:spPr>
+          <a:xfrm>
+            <a:off x="807085" y="5865495"/>
+            <a:ext cx="2414270" cy="721360"/>
+          </a:xfrm>
+          <a:prstGeom prst="rect">
+            <a:avLst/>
+          </a:prstGeom>
+          <a:noFill/>
+        </p:spPr>
+        <p:txBody>
+          <a:bodyPr wrap="square" lIns="127" tIns="127" rIns="127" bIns="127" rtlCol="0" anchor="t">
+            <a:noAutofit/>
+          </a:bodyPr>
+          <a:lstStyle/>
+          <a:p>
+            <a:pPr marL="0" indent="0" algn="l">
+              <a:lnSpc>
+                <a:spcPct val="150000"/>
+              </a:lnSpc>
+              <a:buNone/>
+            </a:pPr>
+            <a:r>
+              <a:rPr lang="en-US" sz="1000" dirty="0">
+                <a:solidFill>
+                  <a:srgbClr val="334155"/>
+                </a:solidFill>
+                <a:latin typeface="微软雅黑" panose="020B0503020204020204" pitchFamily="34" charset="-122"/>
+                <a:ea typeface="微软雅黑" panose="020B0503020204020204" pitchFamily="34" charset="-122"/>
+                <a:cs typeface="微软雅黑" panose="020B0503020204020204" pitchFamily="34" charset="-122"/>
+              </a:rPr>
+              <a:t>• 健康检查、可用性、错误率和延迟</a:t>
+            </a:r>
+            <a:endParaRPr lang="en-US" sz="1000" dirty="0">
+              <a:latin typeface="微软雅黑" panose="020B0503020204020204" pitchFamily="34" charset="-122"/>
+              <a:ea typeface="微软雅黑" panose="020B0503020204020204" pitchFamily="34" charset="-122"/>
+              <a:cs typeface="微软雅黑" panose="020B0503020204020204" pitchFamily="34" charset="-122"/>
+            </a:endParaRPr>
+          </a:p>
+          <a:p>
+            <a:pPr marL="0" indent="0" algn="l">
+              <a:lnSpc>
+                <a:spcPct val="150000"/>
+              </a:lnSpc>
+              <a:buNone/>
+            </a:pPr>
+            <a:r>
+              <a:rPr lang="en-US" sz="1000" dirty="0">
+                <a:solidFill>
+                  <a:srgbClr val="334155"/>
+                </a:solidFill>
+                <a:latin typeface="微软雅黑" panose="020B0503020204020204" pitchFamily="34" charset="-122"/>
+                <a:ea typeface="微软雅黑" panose="020B0503020204020204" pitchFamily="34" charset="-122"/>
+                <a:cs typeface="微软雅黑" panose="020B0503020204020204" pitchFamily="34" charset="-122"/>
+              </a:rPr>
+              <a:t>• 限流、配额、超时、重试和统一错误</a:t>
+            </a:r>
+            <a:endParaRPr lang="en-US" sz="1000" dirty="0">
+              <a:latin typeface="微软雅黑" panose="020B0503020204020204" pitchFamily="34" charset="-122"/>
+              <a:ea typeface="微软雅黑" panose="020B0503020204020204" pitchFamily="34" charset="-122"/>
+              <a:cs typeface="微软雅黑" panose="020B0503020204020204" pitchFamily="34" charset="-122"/>
+            </a:endParaRPr>
+          </a:p>
+          <a:p>
+            <a:pPr marL="0" indent="0" algn="l">
+              <a:lnSpc>
+                <a:spcPct val="150000"/>
+              </a:lnSpc>
+              <a:buNone/>
+            </a:pPr>
+            <a:r>
+              <a:rPr lang="en-US" sz="1000" dirty="0">
+                <a:solidFill>
+                  <a:srgbClr val="334155"/>
+                </a:solidFill>
+                <a:latin typeface="微软雅黑" panose="020B0503020204020204" pitchFamily="34" charset="-122"/>
+                <a:ea typeface="微软雅黑" panose="020B0503020204020204" pitchFamily="34" charset="-122"/>
+                <a:cs typeface="微软雅黑" panose="020B0503020204020204" pitchFamily="34" charset="-122"/>
+              </a:rPr>
+              <a:t>• 告警、灰度、回退和故障恢复</a:t>
+            </a:r>
+            <a:endParaRPr lang="en-US" sz="1000" dirty="0">
+              <a:solidFill>
+                <a:srgbClr val="334155"/>
+              </a:solidFill>
+              <a:latin typeface="微软雅黑" panose="020B0503020204020204" pitchFamily="34" charset="-122"/>
+              <a:ea typeface="微软雅黑" panose="020B0503020204020204" pitchFamily="34" charset="-122"/>
+              <a:cs typeface="微软雅黑" panose="020B0503020204020204" pitchFamily="34" charset="-122"/>
+            </a:endParaRPr>
+          </a:p>
+        </p:txBody>
+      </p:sp>
+      <p:sp>
+        <p:nvSpPr>
+          <p:cNvPr id="65" name="Shape 63"/>
+          <p:cNvSpPr/>
+          <p:nvPr/>
+        </p:nvSpPr>
+        <p:spPr>
+          <a:xfrm>
+            <a:off x="3494405" y="5554345"/>
+            <a:ext cx="2743200" cy="1059180"/>
+          </a:xfrm>
+          <a:prstGeom prst="roundRect">
+            <a:avLst>
+              <a:gd name="adj" fmla="val 9804"/>
+            </a:avLst>
+          </a:prstGeom>
+          <a:solidFill>
+            <a:srgbClr val="FFFFFF"/>
+          </a:solidFill>
+          <a:ln w="13970">
+            <a:solidFill>
+              <a:srgbClr val="86EFAC"/>
+            </a:solidFill>
+            <a:prstDash val="solid"/>
+          </a:ln>
+          <a:effectLst>
+            <a:outerShdw blurRad="25400" dist="50800" dir="2700000" algn="bl" rotWithShape="0">
+              <a:srgbClr val="172554">
+                <a:alpha val="10000"/>
+              </a:srgbClr>
+            </a:outerShdw>
+          </a:effectLst>
+        </p:spPr>
+      </p:sp>
+      <p:sp>
+        <p:nvSpPr>
+          <p:cNvPr id="68" name="Text 66"/>
+          <p:cNvSpPr/>
+          <p:nvPr/>
+        </p:nvSpPr>
+        <p:spPr>
+          <a:xfrm>
+            <a:off x="3658870" y="5854700"/>
+            <a:ext cx="2414270" cy="732155"/>
+          </a:xfrm>
+          <a:prstGeom prst="rect">
+            <a:avLst/>
+          </a:prstGeom>
+          <a:noFill/>
+        </p:spPr>
+        <p:txBody>
+          <a:bodyPr wrap="square" lIns="127" tIns="127" rIns="127" bIns="127" rtlCol="0" anchor="t">
+            <a:noAutofit/>
+          </a:bodyPr>
+          <a:lstStyle/>
+          <a:p>
+            <a:pPr marL="0" indent="0" algn="l">
+              <a:lnSpc>
+                <a:spcPct val="150000"/>
+              </a:lnSpc>
+              <a:buNone/>
+            </a:pPr>
+            <a:r>
+              <a:rPr lang="en-US" sz="1000" dirty="0">
+                <a:solidFill>
+                  <a:srgbClr val="334155"/>
+                </a:solidFill>
+                <a:latin typeface="微软雅黑" panose="020B0503020204020204" pitchFamily="34" charset="-122"/>
+                <a:ea typeface="微软雅黑" panose="020B0503020204020204" pitchFamily="34" charset="-122"/>
+                <a:cs typeface="微软雅黑" panose="020B0503020204020204" pitchFamily="34" charset="-122"/>
+              </a:rPr>
+              <a:t>• Kubernetes、APISIX 多副本和负载均衡</a:t>
+            </a:r>
+            <a:endParaRPr lang="en-US" sz="1000" dirty="0">
+              <a:latin typeface="微软雅黑" panose="020B0503020204020204" pitchFamily="34" charset="-122"/>
+              <a:ea typeface="微软雅黑" panose="020B0503020204020204" pitchFamily="34" charset="-122"/>
+              <a:cs typeface="微软雅黑" panose="020B0503020204020204" pitchFamily="34" charset="-122"/>
+            </a:endParaRPr>
+          </a:p>
+          <a:p>
+            <a:pPr marL="0" indent="0" algn="l">
+              <a:lnSpc>
+                <a:spcPct val="150000"/>
+              </a:lnSpc>
+              <a:buNone/>
+            </a:pPr>
+            <a:r>
+              <a:rPr lang="en-US" sz="1000" dirty="0">
+                <a:solidFill>
+                  <a:srgbClr val="334155"/>
+                </a:solidFill>
+                <a:latin typeface="微软雅黑" panose="020B0503020204020204" pitchFamily="34" charset="-122"/>
+                <a:ea typeface="微软雅黑" panose="020B0503020204020204" pitchFamily="34" charset="-122"/>
+                <a:cs typeface="微软雅黑" panose="020B0503020204020204" pitchFamily="34" charset="-122"/>
+              </a:rPr>
+              <a:t>• OAuth2、API Key、密码机和访问控制</a:t>
+            </a:r>
+            <a:endParaRPr lang="en-US" sz="1000" dirty="0">
+              <a:latin typeface="微软雅黑" panose="020B0503020204020204" pitchFamily="34" charset="-122"/>
+              <a:ea typeface="微软雅黑" panose="020B0503020204020204" pitchFamily="34" charset="-122"/>
+              <a:cs typeface="微软雅黑" panose="020B0503020204020204" pitchFamily="34" charset="-122"/>
+            </a:endParaRPr>
+          </a:p>
+          <a:p>
+            <a:pPr marL="0" indent="0" algn="l">
+              <a:lnSpc>
+                <a:spcPct val="150000"/>
+              </a:lnSpc>
+              <a:buNone/>
+            </a:pPr>
+            <a:r>
+              <a:rPr lang="en-US" sz="1000" dirty="0">
+                <a:solidFill>
+                  <a:srgbClr val="334155"/>
+                </a:solidFill>
+                <a:latin typeface="微软雅黑" panose="020B0503020204020204" pitchFamily="34" charset="-122"/>
+                <a:ea typeface="微软雅黑" panose="020B0503020204020204" pitchFamily="34" charset="-122"/>
+                <a:cs typeface="微软雅黑" panose="020B0503020204020204" pitchFamily="34" charset="-122"/>
+              </a:rPr>
+              <a:t>• Redis 共享缓存、网络隔离和安全策略</a:t>
+            </a:r>
+            <a:endParaRPr lang="en-US" sz="1000" dirty="0">
+              <a:solidFill>
+                <a:srgbClr val="334155"/>
+              </a:solidFill>
+              <a:latin typeface="微软雅黑" panose="020B0503020204020204" pitchFamily="34" charset="-122"/>
+              <a:ea typeface="微软雅黑" panose="020B0503020204020204" pitchFamily="34" charset="-122"/>
+              <a:cs typeface="微软雅黑" panose="020B0503020204020204" pitchFamily="34" charset="-122"/>
+            </a:endParaRPr>
+          </a:p>
+        </p:txBody>
+      </p:sp>
+      <p:sp>
+        <p:nvSpPr>
+          <p:cNvPr id="69" name="Shape 67"/>
+          <p:cNvSpPr/>
+          <p:nvPr/>
+        </p:nvSpPr>
+        <p:spPr>
+          <a:xfrm>
+            <a:off x="6365240" y="5554345"/>
+            <a:ext cx="2743200" cy="1059815"/>
+          </a:xfrm>
+          <a:prstGeom prst="roundRect">
+            <a:avLst>
+              <a:gd name="adj" fmla="val 9804"/>
+            </a:avLst>
+          </a:prstGeom>
+          <a:solidFill>
+            <a:srgbClr val="FFFFFF"/>
+          </a:solidFill>
+          <a:ln w="13970">
+            <a:solidFill>
+              <a:srgbClr val="86EFAC"/>
+            </a:solidFill>
+            <a:prstDash val="solid"/>
+          </a:ln>
+          <a:effectLst>
+            <a:outerShdw blurRad="25400" dist="50800" dir="2700000" algn="bl" rotWithShape="0">
+              <a:srgbClr val="172554">
+                <a:alpha val="10000"/>
+              </a:srgbClr>
+            </a:outerShdw>
+          </a:effectLst>
+        </p:spPr>
+        <p:txBody>
+          <a:bodyPr/>
+          <a:p>
+            <a:endParaRPr lang="zh-CN" altLang="en-US"/>
+          </a:p>
+        </p:txBody>
+      </p:sp>
+      <p:sp>
+        <p:nvSpPr>
+          <p:cNvPr id="72" name="Text 70"/>
+          <p:cNvSpPr/>
+          <p:nvPr/>
+        </p:nvSpPr>
+        <p:spPr>
+          <a:xfrm>
+            <a:off x="6530340" y="5873750"/>
+            <a:ext cx="2414270" cy="393700"/>
+          </a:xfrm>
+          <a:prstGeom prst="rect">
+            <a:avLst/>
+          </a:prstGeom>
+          <a:noFill/>
+        </p:spPr>
+        <p:txBody>
+          <a:bodyPr wrap="square" lIns="127" tIns="127" rIns="127" bIns="127" rtlCol="0" anchor="t">
+            <a:noAutofit/>
+          </a:bodyPr>
+          <a:lstStyle/>
+          <a:p>
+            <a:pPr marL="0" indent="0" algn="l">
+              <a:lnSpc>
+                <a:spcPct val="150000"/>
+              </a:lnSpc>
+              <a:buNone/>
+            </a:pPr>
+            <a:r>
+              <a:rPr lang="en-US" sz="1000" dirty="0">
+                <a:solidFill>
+                  <a:srgbClr val="334155"/>
+                </a:solidFill>
+                <a:latin typeface="微软雅黑" panose="020B0503020204020204" pitchFamily="34" charset="-122"/>
+                <a:ea typeface="微软雅黑" panose="020B0503020204020204" pitchFamily="34" charset="-122"/>
+                <a:cs typeface="微软雅黑" panose="020B0503020204020204" pitchFamily="34" charset="-122"/>
+              </a:rPr>
+              <a:t>• PostgreSQL 业务和审计数据</a:t>
+            </a:r>
+            <a:endParaRPr lang="en-US" sz="1000" dirty="0">
+              <a:latin typeface="微软雅黑" panose="020B0503020204020204" pitchFamily="34" charset="-122"/>
+              <a:ea typeface="微软雅黑" panose="020B0503020204020204" pitchFamily="34" charset="-122"/>
+              <a:cs typeface="微软雅黑" panose="020B0503020204020204" pitchFamily="34" charset="-122"/>
+            </a:endParaRPr>
+          </a:p>
+          <a:p>
+            <a:pPr marL="0" indent="0" algn="l">
+              <a:lnSpc>
+                <a:spcPct val="150000"/>
+              </a:lnSpc>
+              <a:buNone/>
+            </a:pPr>
+            <a:r>
+              <a:rPr lang="en-US" sz="1000" dirty="0">
+                <a:solidFill>
+                  <a:srgbClr val="334155"/>
+                </a:solidFill>
+                <a:latin typeface="微软雅黑" panose="020B0503020204020204" pitchFamily="34" charset="-122"/>
+                <a:ea typeface="微软雅黑" panose="020B0503020204020204" pitchFamily="34" charset="-122"/>
+                <a:cs typeface="微软雅黑" panose="020B0503020204020204" pitchFamily="34" charset="-122"/>
+              </a:rPr>
+              <a:t>• MinIO 文件、数据集和交付对象存储</a:t>
+            </a:r>
+            <a:endParaRPr lang="en-US" sz="1000" dirty="0">
+              <a:latin typeface="微软雅黑" panose="020B0503020204020204" pitchFamily="34" charset="-122"/>
+              <a:ea typeface="微软雅黑" panose="020B0503020204020204" pitchFamily="34" charset="-122"/>
+              <a:cs typeface="微软雅黑" panose="020B0503020204020204" pitchFamily="34" charset="-122"/>
+            </a:endParaRPr>
+          </a:p>
+          <a:p>
+            <a:pPr marL="0" indent="0" algn="l">
+              <a:lnSpc>
+                <a:spcPct val="150000"/>
+              </a:lnSpc>
+              <a:buNone/>
+            </a:pPr>
+            <a:r>
+              <a:rPr lang="en-US" sz="1000" dirty="0">
+                <a:solidFill>
+                  <a:srgbClr val="334155"/>
+                </a:solidFill>
+                <a:latin typeface="微软雅黑" panose="020B0503020204020204" pitchFamily="34" charset="-122"/>
+                <a:ea typeface="微软雅黑" panose="020B0503020204020204" pitchFamily="34" charset="-122"/>
+                <a:cs typeface="微软雅黑" panose="020B0503020204020204" pitchFamily="34" charset="-122"/>
+              </a:rPr>
+              <a:t>• Redis 配额、Token 和分布式状态缓存</a:t>
+            </a:r>
+            <a:endParaRPr lang="en-US" sz="1000" dirty="0">
+              <a:solidFill>
+                <a:srgbClr val="334155"/>
+              </a:solidFill>
+              <a:latin typeface="微软雅黑" panose="020B0503020204020204" pitchFamily="34" charset="-122"/>
+              <a:ea typeface="微软雅黑" panose="020B0503020204020204" pitchFamily="34" charset="-122"/>
+              <a:cs typeface="微软雅黑" panose="020B0503020204020204" pitchFamily="34" charset="-122"/>
+            </a:endParaRPr>
+          </a:p>
+        </p:txBody>
+      </p:sp>
+      <p:sp>
+        <p:nvSpPr>
+          <p:cNvPr id="73" name="Shape 71"/>
+          <p:cNvSpPr/>
+          <p:nvPr/>
+        </p:nvSpPr>
+        <p:spPr>
+          <a:xfrm>
+            <a:off x="9262110" y="5554345"/>
+            <a:ext cx="2322830" cy="1059180"/>
+          </a:xfrm>
+          <a:prstGeom prst="roundRect">
+            <a:avLst>
+              <a:gd name="adj" fmla="val 9804"/>
+            </a:avLst>
+          </a:prstGeom>
+          <a:solidFill>
+            <a:srgbClr val="FFFFFF"/>
+          </a:solidFill>
+          <a:ln w="13970">
+            <a:solidFill>
+              <a:srgbClr val="86EFAC"/>
+            </a:solidFill>
+            <a:prstDash val="solid"/>
+          </a:ln>
+          <a:effectLst>
+            <a:outerShdw blurRad="25400" dist="50800" dir="2700000" algn="bl" rotWithShape="0">
+              <a:srgbClr val="172554">
+                <a:alpha val="10000"/>
+              </a:srgbClr>
+            </a:outerShdw>
+          </a:effectLst>
+        </p:spPr>
+      </p:sp>
+      <p:sp>
+        <p:nvSpPr>
+          <p:cNvPr id="76" name="Text 74"/>
+          <p:cNvSpPr/>
+          <p:nvPr/>
+        </p:nvSpPr>
+        <p:spPr>
+          <a:xfrm>
+            <a:off x="9279255" y="5864860"/>
+            <a:ext cx="2341880" cy="490220"/>
+          </a:xfrm>
+          <a:prstGeom prst="rect">
+            <a:avLst/>
+          </a:prstGeom>
+          <a:noFill/>
+        </p:spPr>
+        <p:txBody>
+          <a:bodyPr wrap="square" lIns="127" tIns="127" rIns="127" bIns="127" rtlCol="0" anchor="t">
+            <a:noAutofit/>
+          </a:bodyPr>
+          <a:lstStyle/>
+          <a:p>
+            <a:pPr marL="0" indent="0" algn="l">
+              <a:lnSpc>
+                <a:spcPct val="150000"/>
+              </a:lnSpc>
+              <a:buNone/>
+            </a:pPr>
+            <a:r>
+              <a:rPr lang="en-US" sz="1000" dirty="0">
+                <a:solidFill>
+                  <a:srgbClr val="334155"/>
+                </a:solidFill>
+                <a:latin typeface="微软雅黑" panose="020B0503020204020204" pitchFamily="34" charset="-122"/>
+                <a:ea typeface="微软雅黑" panose="020B0503020204020204" pitchFamily="34" charset="-122"/>
+                <a:cs typeface="微软雅黑" panose="020B0503020204020204" pitchFamily="34" charset="-122"/>
+              </a:rPr>
+              <a:t>• Prometheus指标、Alertmanager告警</a:t>
+            </a:r>
+            <a:endParaRPr lang="en-US" sz="1000" dirty="0">
+              <a:latin typeface="微软雅黑" panose="020B0503020204020204" pitchFamily="34" charset="-122"/>
+              <a:ea typeface="微软雅黑" panose="020B0503020204020204" pitchFamily="34" charset="-122"/>
+              <a:cs typeface="微软雅黑" panose="020B0503020204020204" pitchFamily="34" charset="-122"/>
+            </a:endParaRPr>
+          </a:p>
+          <a:p>
+            <a:pPr marL="0" indent="0" algn="l">
+              <a:lnSpc>
+                <a:spcPct val="150000"/>
+              </a:lnSpc>
+              <a:buNone/>
+            </a:pPr>
+            <a:r>
+              <a:rPr lang="en-US" sz="1000" dirty="0">
+                <a:solidFill>
+                  <a:srgbClr val="334155"/>
+                </a:solidFill>
+                <a:latin typeface="微软雅黑" panose="020B0503020204020204" pitchFamily="34" charset="-122"/>
+                <a:ea typeface="微软雅黑" panose="020B0503020204020204" pitchFamily="34" charset="-122"/>
+                <a:cs typeface="微软雅黑" panose="020B0503020204020204" pitchFamily="34" charset="-122"/>
+              </a:rPr>
+              <a:t>• 网关路由、发布、调用和运行日志</a:t>
+            </a:r>
+            <a:endParaRPr lang="en-US" sz="1000" dirty="0">
+              <a:latin typeface="微软雅黑" panose="020B0503020204020204" pitchFamily="34" charset="-122"/>
+              <a:ea typeface="微软雅黑" panose="020B0503020204020204" pitchFamily="34" charset="-122"/>
+              <a:cs typeface="微软雅黑" panose="020B0503020204020204" pitchFamily="34" charset="-122"/>
+            </a:endParaRPr>
+          </a:p>
+          <a:p>
+            <a:pPr marL="0" indent="0" algn="l">
+              <a:lnSpc>
+                <a:spcPct val="150000"/>
+              </a:lnSpc>
+              <a:buNone/>
+            </a:pPr>
+            <a:r>
+              <a:rPr lang="en-US" sz="1000" dirty="0">
+                <a:solidFill>
+                  <a:srgbClr val="334155"/>
+                </a:solidFill>
+                <a:latin typeface="微软雅黑" panose="020B0503020204020204" pitchFamily="34" charset="-122"/>
+                <a:ea typeface="微软雅黑" panose="020B0503020204020204" pitchFamily="34" charset="-122"/>
+                <a:cs typeface="微软雅黑" panose="020B0503020204020204" pitchFamily="34" charset="-122"/>
+              </a:rPr>
+              <a:t>• SLA 报表、审计追踪和运维闭环</a:t>
+            </a:r>
+            <a:endParaRPr lang="en-US" sz="1000" dirty="0">
+              <a:solidFill>
+                <a:srgbClr val="334155"/>
+              </a:solidFill>
+              <a:latin typeface="微软雅黑" panose="020B0503020204020204" pitchFamily="34" charset="-122"/>
+              <a:ea typeface="微软雅黑" panose="020B0503020204020204" pitchFamily="34" charset="-122"/>
+              <a:cs typeface="微软雅黑" panose="020B0503020204020204" pitchFamily="34" charset="-122"/>
+            </a:endParaRPr>
+          </a:p>
+        </p:txBody>
+      </p:sp>
+      <p:sp>
+        <p:nvSpPr>
+          <p:cNvPr id="77" name="Shape 75"/>
+          <p:cNvSpPr/>
+          <p:nvPr/>
+        </p:nvSpPr>
+        <p:spPr>
+          <a:xfrm flipH="1">
+            <a:off x="1647190" y="1251585"/>
+            <a:ext cx="5715" cy="439420"/>
+          </a:xfrm>
+          <a:prstGeom prst="line">
+            <a:avLst/>
+          </a:prstGeom>
+          <a:noFill/>
+          <a:ln w="12700">
+            <a:solidFill>
+              <a:srgbClr val="64748B"/>
+            </a:solidFill>
+            <a:prstDash val="solid"/>
+            <a:tailEnd type="triangle"/>
+          </a:ln>
+        </p:spPr>
+      </p:sp>
+      <p:sp>
+        <p:nvSpPr>
+          <p:cNvPr id="82" name="Shape 80"/>
+          <p:cNvSpPr/>
+          <p:nvPr/>
+        </p:nvSpPr>
+        <p:spPr>
+          <a:xfrm flipV="1">
+            <a:off x="4069080" y="2550795"/>
+            <a:ext cx="247650" cy="5080"/>
+          </a:xfrm>
+          <a:prstGeom prst="line">
+            <a:avLst/>
+          </a:prstGeom>
+          <a:noFill/>
+          <a:ln w="12700">
+            <a:solidFill>
+              <a:srgbClr val="64748B"/>
+            </a:solidFill>
+            <a:prstDash val="solid"/>
+            <a:tailEnd type="triangle"/>
+          </a:ln>
+        </p:spPr>
+      </p:sp>
+      <p:sp>
+        <p:nvSpPr>
+          <p:cNvPr id="83" name="Shape 81"/>
+          <p:cNvSpPr/>
+          <p:nvPr/>
+        </p:nvSpPr>
+        <p:spPr>
+          <a:xfrm>
+            <a:off x="7882255" y="2550160"/>
+            <a:ext cx="240030" cy="635"/>
+          </a:xfrm>
+          <a:prstGeom prst="line">
+            <a:avLst/>
+          </a:prstGeom>
+          <a:noFill/>
+          <a:ln w="12700">
+            <a:solidFill>
+              <a:srgbClr val="64748B"/>
+            </a:solidFill>
+            <a:prstDash val="solid"/>
+            <a:tailEnd type="triangle"/>
+          </a:ln>
+        </p:spPr>
+      </p:sp>
+      <p:sp>
+        <p:nvSpPr>
+          <p:cNvPr id="84" name="Shape 82"/>
+          <p:cNvSpPr/>
+          <p:nvPr/>
+        </p:nvSpPr>
+        <p:spPr>
+          <a:xfrm>
+            <a:off x="4069080" y="4243070"/>
+            <a:ext cx="247650" cy="635"/>
+          </a:xfrm>
+          <a:prstGeom prst="line">
+            <a:avLst/>
+          </a:prstGeom>
+          <a:noFill/>
+          <a:ln w="12700">
+            <a:solidFill>
+              <a:srgbClr val="64748B"/>
+            </a:solidFill>
+            <a:prstDash val="solid"/>
+            <a:tailEnd type="triangle"/>
+          </a:ln>
+        </p:spPr>
+      </p:sp>
+      <p:sp>
+        <p:nvSpPr>
+          <p:cNvPr id="85" name="Shape 83"/>
+          <p:cNvSpPr/>
+          <p:nvPr/>
+        </p:nvSpPr>
+        <p:spPr>
+          <a:xfrm>
+            <a:off x="7882255" y="4243070"/>
+            <a:ext cx="255905" cy="635"/>
+          </a:xfrm>
+          <a:prstGeom prst="line">
+            <a:avLst/>
+          </a:prstGeom>
+          <a:noFill/>
+          <a:ln w="12700">
+            <a:solidFill>
+              <a:srgbClr val="64748B"/>
+            </a:solidFill>
+            <a:prstDash val="solid"/>
+            <a:tailEnd type="triangle"/>
+          </a:ln>
+        </p:spPr>
+      </p:sp>
+      <p:sp>
+        <p:nvSpPr>
+          <p:cNvPr id="86" name="Shape 84"/>
+          <p:cNvSpPr/>
+          <p:nvPr/>
+        </p:nvSpPr>
+        <p:spPr>
+          <a:xfrm>
+            <a:off x="1828800" y="5112385"/>
+            <a:ext cx="635" cy="320040"/>
+          </a:xfrm>
+          <a:prstGeom prst="line">
+            <a:avLst/>
+          </a:prstGeom>
+          <a:noFill/>
+          <a:ln w="12700">
+            <a:solidFill>
+              <a:srgbClr val="64748B"/>
+            </a:solidFill>
+            <a:prstDash val="solid"/>
+            <a:tailEnd type="triangle"/>
+          </a:ln>
+        </p:spPr>
+      </p:sp>
+      <p:sp>
+        <p:nvSpPr>
+          <p:cNvPr id="87" name="Shape 85"/>
+          <p:cNvSpPr/>
+          <p:nvPr/>
+        </p:nvSpPr>
+        <p:spPr>
+          <a:xfrm>
+            <a:off x="6237605" y="5111750"/>
+            <a:ext cx="635" cy="320040"/>
+          </a:xfrm>
+          <a:prstGeom prst="line">
+            <a:avLst/>
+          </a:prstGeom>
+          <a:noFill/>
+          <a:ln w="12700">
+            <a:solidFill>
+              <a:srgbClr val="64748B"/>
+            </a:solidFill>
+            <a:prstDash val="solid"/>
+            <a:tailEnd type="triangle"/>
+          </a:ln>
+        </p:spPr>
+      </p:sp>
+      <p:sp>
+        <p:nvSpPr>
+          <p:cNvPr id="88" name="Shape 86"/>
+          <p:cNvSpPr/>
+          <p:nvPr/>
+        </p:nvSpPr>
+        <p:spPr>
+          <a:xfrm>
+            <a:off x="9875520" y="5101590"/>
+            <a:ext cx="0" cy="365760"/>
+          </a:xfrm>
+          <a:prstGeom prst="line">
+            <a:avLst/>
+          </a:prstGeom>
+          <a:noFill/>
+          <a:ln w="12700">
+            <a:solidFill>
+              <a:srgbClr val="64748B"/>
+            </a:solidFill>
+            <a:prstDash val="solid"/>
+            <a:tailEnd type="triangle"/>
+          </a:ln>
+        </p:spPr>
+      </p:sp>
+      <p:sp>
+        <p:nvSpPr>
+          <p:cNvPr id="90" name="文本框 89"/>
+          <p:cNvSpPr txBox="1"/>
+          <p:nvPr/>
+        </p:nvSpPr>
+        <p:spPr>
+          <a:xfrm>
+            <a:off x="39370" y="614045"/>
+            <a:ext cx="397510" cy="1059180"/>
+          </a:xfrm>
+          <a:prstGeom prst="rect">
+            <a:avLst/>
+          </a:prstGeom>
+          <a:noFill/>
+        </p:spPr>
+        <p:txBody>
+          <a:bodyPr vert="eaVert" wrap="square" rtlCol="0">
+            <a:noAutofit/>
+          </a:bodyPr>
+          <a:p>
+            <a:r>
+              <a:rPr lang="zh-CN" altLang="en-US" sz="1200" b="1">
+                <a:latin typeface="微软雅黑" panose="020B0503020204020204" pitchFamily="34" charset="-122"/>
+                <a:ea typeface="微软雅黑" panose="020B0503020204020204" pitchFamily="34" charset="-122"/>
+              </a:rPr>
+              <a:t>平台服务层</a:t>
+            </a:r>
+            <a:endParaRPr lang="zh-CN" altLang="en-US" sz="1200" b="1">
+              <a:latin typeface="微软雅黑" panose="020B0503020204020204" pitchFamily="34" charset="-122"/>
+              <a:ea typeface="微软雅黑" panose="020B0503020204020204" pitchFamily="34" charset="-122"/>
+            </a:endParaRPr>
+          </a:p>
+        </p:txBody>
+      </p:sp>
+      <p:sp>
+        <p:nvSpPr>
+          <p:cNvPr id="91" name="文本框 90"/>
+          <p:cNvSpPr txBox="1"/>
+          <p:nvPr/>
+        </p:nvSpPr>
+        <p:spPr>
+          <a:xfrm>
+            <a:off x="39370" y="2713355"/>
+            <a:ext cx="398145" cy="1691005"/>
+          </a:xfrm>
+          <a:prstGeom prst="rect">
+            <a:avLst/>
+          </a:prstGeom>
+          <a:noFill/>
+        </p:spPr>
+        <p:txBody>
+          <a:bodyPr vert="eaVert" wrap="square" rtlCol="0">
+            <a:noAutofit/>
+          </a:bodyPr>
+          <a:p>
+            <a:r>
+              <a:rPr lang="zh-CN" altLang="en-US" sz="1200" b="1">
+                <a:latin typeface="微软雅黑" panose="020B0503020204020204" pitchFamily="34" charset="-122"/>
+                <a:ea typeface="微软雅黑" panose="020B0503020204020204" pitchFamily="34" charset="-122"/>
+              </a:rPr>
+              <a:t>核心业务</a:t>
+            </a:r>
+            <a:r>
+              <a:rPr lang="zh-CN" altLang="en-US" sz="1200" b="1">
+                <a:latin typeface="微软雅黑" panose="020B0503020204020204" pitchFamily="34" charset="-122"/>
+                <a:ea typeface="微软雅黑" panose="020B0503020204020204" pitchFamily="34" charset="-122"/>
+              </a:rPr>
+              <a:t>功能层</a:t>
+            </a:r>
+            <a:endParaRPr lang="zh-CN" altLang="en-US" sz="1200" b="1">
+              <a:latin typeface="微软雅黑" panose="020B0503020204020204" pitchFamily="34" charset="-122"/>
+              <a:ea typeface="微软雅黑" panose="020B0503020204020204" pitchFamily="34" charset="-122"/>
+            </a:endParaRPr>
+          </a:p>
+        </p:txBody>
+      </p:sp>
+      <p:sp>
+        <p:nvSpPr>
+          <p:cNvPr id="92" name="文本框 91"/>
+          <p:cNvSpPr txBox="1"/>
+          <p:nvPr/>
+        </p:nvSpPr>
+        <p:spPr>
+          <a:xfrm>
+            <a:off x="39370" y="5293360"/>
+            <a:ext cx="397510" cy="1508760"/>
+          </a:xfrm>
+          <a:prstGeom prst="rect">
+            <a:avLst/>
+          </a:prstGeom>
+          <a:noFill/>
+        </p:spPr>
+        <p:txBody>
+          <a:bodyPr vert="eaVert" wrap="square" rtlCol="0">
+            <a:noAutofit/>
+          </a:bodyPr>
+          <a:p>
+            <a:r>
+              <a:rPr lang="en-US" altLang="zh-CN" sz="1200" b="1">
+                <a:latin typeface="微软雅黑" panose="020B0503020204020204" pitchFamily="34" charset="-122"/>
+                <a:ea typeface="微软雅黑" panose="020B0503020204020204" pitchFamily="34" charset="-122"/>
+              </a:rPr>
+              <a:t>SLA</a:t>
+            </a:r>
+            <a:r>
+              <a:rPr lang="zh-CN" altLang="en-US" sz="1200" b="1">
+                <a:latin typeface="微软雅黑" panose="020B0503020204020204" pitchFamily="34" charset="-122"/>
+                <a:ea typeface="微软雅黑" panose="020B0503020204020204" pitchFamily="34" charset="-122"/>
+              </a:rPr>
+              <a:t>保障及基础</a:t>
+            </a:r>
+            <a:r>
+              <a:rPr lang="zh-CN" altLang="en-US" sz="1200" b="1">
+                <a:latin typeface="微软雅黑" panose="020B0503020204020204" pitchFamily="34" charset="-122"/>
+                <a:ea typeface="微软雅黑" panose="020B0503020204020204" pitchFamily="34" charset="-122"/>
+              </a:rPr>
+              <a:t>设施</a:t>
+            </a:r>
+            <a:endParaRPr lang="zh-CN" altLang="en-US" sz="1200" b="1">
+              <a:latin typeface="微软雅黑" panose="020B0503020204020204" pitchFamily="34" charset="-122"/>
+              <a:ea typeface="微软雅黑" panose="020B0503020204020204" pitchFamily="34" charset="-122"/>
+            </a:endParaRPr>
+          </a:p>
+        </p:txBody>
+      </p:sp>
+      <p:sp>
+        <p:nvSpPr>
+          <p:cNvPr id="94" name="同侧圆角矩形 93"/>
+          <p:cNvSpPr/>
+          <p:nvPr/>
+        </p:nvSpPr>
+        <p:spPr>
+          <a:xfrm>
+            <a:off x="4323715" y="1697355"/>
+            <a:ext cx="3543300" cy="303530"/>
+          </a:xfrm>
+          <a:prstGeom prst="round2SameRect">
+            <a:avLst>
+              <a:gd name="adj1" fmla="val 28659"/>
+              <a:gd name="adj2" fmla="val 0"/>
+            </a:avLst>
+          </a:prstGeom>
+          <a:solidFill>
+            <a:srgbClr val="EDE9FE"/>
+          </a:solidFill>
+          <a:ln>
+            <a:noFill/>
+          </a:ln>
+        </p:spPr>
+        <p:style>
+          <a:lnRef idx="2">
+            <a:schemeClr val="accent1">
+              <a:lumMod val="75000"/>
+            </a:schemeClr>
+          </a:lnRef>
+          <a:fillRef idx="1">
+            <a:schemeClr val="accent1"/>
+          </a:fillRef>
+          <a:effectRef idx="0">
+            <a:srgbClr val="FFFFFF"/>
+          </a:effectRef>
+          <a:fontRef idx="minor">
+            <a:schemeClr val="lt1"/>
+          </a:fontRef>
+        </p:style>
+        <p:txBody>
+          <a:bodyPr rtlCol="0" anchor="ctr"/>
+          <a:p>
+            <a:pPr algn="ctr"/>
+            <a:endParaRPr lang="zh-CN" altLang="en-US"/>
+          </a:p>
+        </p:txBody>
+      </p:sp>
+      <p:sp>
+        <p:nvSpPr>
+          <p:cNvPr id="95" name="同侧圆角矩形 94"/>
+          <p:cNvSpPr/>
+          <p:nvPr/>
+        </p:nvSpPr>
+        <p:spPr>
+          <a:xfrm>
+            <a:off x="8133715" y="1702435"/>
+            <a:ext cx="3543300" cy="303530"/>
+          </a:xfrm>
+          <a:prstGeom prst="round2SameRect">
+            <a:avLst>
+              <a:gd name="adj1" fmla="val 28659"/>
+              <a:gd name="adj2" fmla="val 0"/>
+            </a:avLst>
+          </a:prstGeom>
+          <a:solidFill>
+            <a:srgbClr val="CCFBF1"/>
+          </a:solidFill>
+          <a:ln>
+            <a:noFill/>
+          </a:ln>
+        </p:spPr>
+        <p:style>
+          <a:lnRef idx="2">
+            <a:schemeClr val="accent1">
+              <a:lumMod val="75000"/>
+            </a:schemeClr>
+          </a:lnRef>
+          <a:fillRef idx="1">
+            <a:schemeClr val="accent1"/>
+          </a:fillRef>
+          <a:effectRef idx="0">
+            <a:srgbClr val="FFFFFF"/>
+          </a:effectRef>
+          <a:fontRef idx="minor">
+            <a:schemeClr val="lt1"/>
+          </a:fontRef>
+        </p:style>
+        <p:txBody>
+          <a:bodyPr rtlCol="0" anchor="ctr"/>
+          <a:p>
+            <a:pPr algn="ctr"/>
+            <a:endParaRPr lang="zh-CN" altLang="en-US"/>
+          </a:p>
+        </p:txBody>
+      </p:sp>
+      <p:sp>
+        <p:nvSpPr>
+          <p:cNvPr id="37" name="Text 35"/>
+          <p:cNvSpPr/>
+          <p:nvPr/>
+        </p:nvSpPr>
+        <p:spPr>
+          <a:xfrm>
+            <a:off x="4480560" y="1727835"/>
+            <a:ext cx="1200150" cy="228600"/>
+          </a:xfrm>
+          <a:prstGeom prst="rect">
+            <a:avLst/>
+          </a:prstGeom>
+          <a:noFill/>
+        </p:spPr>
+        <p:txBody>
+          <a:bodyPr wrap="square" lIns="0" tIns="0" rIns="0" bIns="0" rtlCol="0" anchor="ctr">
+            <a:normAutofit/>
+          </a:bodyPr>
+          <a:lstStyle/>
+          <a:p>
+            <a:pPr marL="0" indent="0" algn="l">
+              <a:buNone/>
+            </a:pPr>
+            <a:r>
+              <a:rPr lang="en-US" sz="1300" b="1" dirty="0">
+                <a:solidFill>
+                  <a:srgbClr val="0F172A"/>
+                </a:solidFill>
+                <a:latin typeface="微软雅黑" panose="020B0503020204020204" pitchFamily="34" charset="-122"/>
+                <a:ea typeface="微软雅黑" panose="020B0503020204020204" pitchFamily="34" charset="-122"/>
+                <a:cs typeface="微软雅黑" panose="020B0503020204020204" pitchFamily="34" charset="-120"/>
+              </a:rPr>
+              <a:t>订单管理</a:t>
+            </a:r>
+            <a:endParaRPr lang="en-US" sz="1300" dirty="0"/>
+          </a:p>
+        </p:txBody>
+      </p:sp>
+      <p:sp>
+        <p:nvSpPr>
+          <p:cNvPr id="96" name="同侧圆角矩形 95"/>
+          <p:cNvSpPr/>
+          <p:nvPr/>
+        </p:nvSpPr>
+        <p:spPr>
+          <a:xfrm>
+            <a:off x="8138160" y="3602355"/>
+            <a:ext cx="3543300" cy="303530"/>
+          </a:xfrm>
+          <a:prstGeom prst="round2SameRect">
+            <a:avLst>
+              <a:gd name="adj1" fmla="val 28659"/>
+              <a:gd name="adj2" fmla="val 0"/>
+            </a:avLst>
+          </a:prstGeom>
+          <a:solidFill>
+            <a:srgbClr val="FCE7F3"/>
+          </a:solidFill>
+          <a:ln>
+            <a:noFill/>
+          </a:ln>
+        </p:spPr>
+        <p:style>
+          <a:lnRef idx="2">
+            <a:schemeClr val="accent1">
+              <a:lumMod val="75000"/>
+            </a:schemeClr>
+          </a:lnRef>
+          <a:fillRef idx="1">
+            <a:schemeClr val="accent1"/>
+          </a:fillRef>
+          <a:effectRef idx="0">
+            <a:srgbClr val="FFFFFF"/>
+          </a:effectRef>
+          <a:fontRef idx="minor">
+            <a:schemeClr val="lt1"/>
+          </a:fontRef>
+        </p:style>
+        <p:txBody>
+          <a:bodyPr rtlCol="0" anchor="ctr"/>
+          <a:p>
+            <a:pPr algn="ctr"/>
+            <a:endParaRPr lang="zh-CN" altLang="en-US"/>
+          </a:p>
+        </p:txBody>
+      </p:sp>
+      <p:sp>
+        <p:nvSpPr>
+          <p:cNvPr id="42" name="Text 40"/>
+          <p:cNvSpPr/>
+          <p:nvPr/>
+        </p:nvSpPr>
+        <p:spPr>
+          <a:xfrm>
+            <a:off x="8293608" y="1734058"/>
+            <a:ext cx="3227832" cy="228600"/>
+          </a:xfrm>
+          <a:prstGeom prst="rect">
+            <a:avLst/>
+          </a:prstGeom>
+          <a:noFill/>
+        </p:spPr>
+        <p:txBody>
+          <a:bodyPr wrap="square" lIns="0" tIns="0" rIns="0" bIns="0" rtlCol="0" anchor="ctr">
+            <a:normAutofit/>
+          </a:bodyPr>
+          <a:lstStyle/>
+          <a:p>
+            <a:pPr marL="0" indent="0" algn="l">
+              <a:buNone/>
+            </a:pPr>
+            <a:r>
+              <a:rPr lang="en-US" sz="1300" b="1" dirty="0">
+                <a:solidFill>
+                  <a:srgbClr val="0F172A"/>
+                </a:solidFill>
+                <a:latin typeface="微软雅黑" panose="020B0503020204020204" pitchFamily="34" charset="-122"/>
+                <a:ea typeface="微软雅黑" panose="020B0503020204020204" pitchFamily="34" charset="-122"/>
+                <a:cs typeface="微软雅黑" panose="020B0503020204020204" pitchFamily="34" charset="-120"/>
+              </a:rPr>
+              <a:t>数据及服务交付管理</a:t>
+            </a:r>
+            <a:endParaRPr lang="en-US" sz="1300" dirty="0"/>
+          </a:p>
+        </p:txBody>
+      </p:sp>
+      <p:sp>
+        <p:nvSpPr>
+          <p:cNvPr id="97" name="同侧圆角矩形 96"/>
+          <p:cNvSpPr/>
+          <p:nvPr/>
+        </p:nvSpPr>
+        <p:spPr>
+          <a:xfrm>
+            <a:off x="4329430" y="3602355"/>
+            <a:ext cx="3543300" cy="303530"/>
+          </a:xfrm>
+          <a:prstGeom prst="round2SameRect">
+            <a:avLst>
+              <a:gd name="adj1" fmla="val 28659"/>
+              <a:gd name="adj2" fmla="val 0"/>
+            </a:avLst>
+          </a:prstGeom>
+          <a:solidFill>
+            <a:srgbClr val="E2E8F0"/>
+          </a:solidFill>
+          <a:ln>
+            <a:noFill/>
+          </a:ln>
+        </p:spPr>
+        <p:style>
+          <a:lnRef idx="2">
+            <a:schemeClr val="accent1">
+              <a:lumMod val="75000"/>
+            </a:schemeClr>
+          </a:lnRef>
+          <a:fillRef idx="1">
+            <a:schemeClr val="accent1"/>
+          </a:fillRef>
+          <a:effectRef idx="0">
+            <a:srgbClr val="FFFFFF"/>
+          </a:effectRef>
+          <a:fontRef idx="minor">
+            <a:schemeClr val="lt1"/>
+          </a:fontRef>
+        </p:style>
+        <p:txBody>
+          <a:bodyPr rtlCol="0" anchor="ctr"/>
+          <a:p>
+            <a:pPr algn="ctr"/>
+            <a:endParaRPr lang="zh-CN" altLang="en-US"/>
+          </a:p>
+        </p:txBody>
+      </p:sp>
+      <p:sp>
+        <p:nvSpPr>
+          <p:cNvPr id="57" name="Text 55"/>
+          <p:cNvSpPr/>
+          <p:nvPr/>
+        </p:nvSpPr>
+        <p:spPr>
+          <a:xfrm>
+            <a:off x="8293735" y="3630295"/>
+            <a:ext cx="2414905" cy="228600"/>
+          </a:xfrm>
+          <a:prstGeom prst="rect">
+            <a:avLst/>
+          </a:prstGeom>
+          <a:noFill/>
+        </p:spPr>
+        <p:txBody>
+          <a:bodyPr wrap="square" lIns="0" tIns="0" rIns="0" bIns="0" rtlCol="0" anchor="ctr">
+            <a:normAutofit/>
+          </a:bodyPr>
+          <a:lstStyle/>
+          <a:p>
+            <a:pPr marL="0" indent="0" algn="l">
+              <a:buNone/>
+            </a:pPr>
+            <a:r>
+              <a:rPr lang="en-US" sz="1300" b="1" dirty="0">
+                <a:solidFill>
+                  <a:srgbClr val="0F172A"/>
+                </a:solidFill>
+                <a:latin typeface="微软雅黑" panose="020B0503020204020204" pitchFamily="34" charset="-122"/>
+                <a:ea typeface="微软雅黑" panose="020B0503020204020204" pitchFamily="34" charset="-122"/>
+                <a:cs typeface="微软雅黑" panose="020B0503020204020204" pitchFamily="34" charset="-120"/>
+              </a:rPr>
+              <a:t>运营平台服务</a:t>
+            </a:r>
+            <a:endParaRPr lang="en-US" sz="1300" dirty="0"/>
+          </a:p>
+        </p:txBody>
+      </p:sp>
+      <p:sp>
+        <p:nvSpPr>
+          <p:cNvPr id="98" name="同侧圆角矩形 97"/>
+          <p:cNvSpPr/>
+          <p:nvPr/>
+        </p:nvSpPr>
+        <p:spPr>
+          <a:xfrm>
+            <a:off x="507365" y="3603625"/>
+            <a:ext cx="3543300" cy="303530"/>
+          </a:xfrm>
+          <a:prstGeom prst="round2SameRect">
+            <a:avLst>
+              <a:gd name="adj1" fmla="val 28659"/>
+              <a:gd name="adj2" fmla="val 0"/>
+            </a:avLst>
+          </a:prstGeom>
+          <a:solidFill>
+            <a:srgbClr val="FEF3C7"/>
+          </a:solidFill>
+          <a:ln>
+            <a:noFill/>
+          </a:ln>
+        </p:spPr>
+        <p:style>
+          <a:lnRef idx="2">
+            <a:schemeClr val="accent1">
+              <a:lumMod val="75000"/>
+            </a:schemeClr>
+          </a:lnRef>
+          <a:fillRef idx="1">
+            <a:schemeClr val="accent1"/>
+          </a:fillRef>
+          <a:effectRef idx="0">
+            <a:srgbClr val="FFFFFF"/>
+          </a:effectRef>
+          <a:fontRef idx="minor">
+            <a:schemeClr val="lt1"/>
+          </a:fontRef>
+        </p:style>
+        <p:txBody>
+          <a:bodyPr rtlCol="0" anchor="ctr"/>
+          <a:p>
+            <a:pPr algn="ctr"/>
+            <a:endParaRPr lang="zh-CN" altLang="en-US"/>
+          </a:p>
+        </p:txBody>
+      </p:sp>
+      <p:sp>
+        <p:nvSpPr>
+          <p:cNvPr id="52" name="Text 50"/>
+          <p:cNvSpPr/>
+          <p:nvPr/>
+        </p:nvSpPr>
+        <p:spPr>
+          <a:xfrm>
+            <a:off x="4480560" y="3630295"/>
+            <a:ext cx="2146935" cy="228600"/>
+          </a:xfrm>
+          <a:prstGeom prst="rect">
+            <a:avLst/>
+          </a:prstGeom>
+          <a:noFill/>
+        </p:spPr>
+        <p:txBody>
+          <a:bodyPr wrap="square" lIns="0" tIns="0" rIns="0" bIns="0" rtlCol="0" anchor="ctr">
+            <a:normAutofit/>
+          </a:bodyPr>
+          <a:lstStyle/>
+          <a:p>
+            <a:pPr marL="0" indent="0" algn="l">
+              <a:buNone/>
+            </a:pPr>
+            <a:r>
+              <a:rPr lang="en-US" sz="1300" b="1" dirty="0">
+                <a:solidFill>
+                  <a:srgbClr val="0F172A"/>
+                </a:solidFill>
+                <a:latin typeface="微软雅黑" panose="020B0503020204020204" pitchFamily="34" charset="-122"/>
+                <a:ea typeface="微软雅黑" panose="020B0503020204020204" pitchFamily="34" charset="-122"/>
+                <a:cs typeface="微软雅黑" panose="020B0503020204020204" pitchFamily="34" charset="-120"/>
+              </a:rPr>
+              <a:t>审计管理</a:t>
+            </a:r>
+            <a:endParaRPr lang="en-US" sz="1300" dirty="0"/>
+          </a:p>
+        </p:txBody>
+      </p:sp>
+      <p:sp>
+        <p:nvSpPr>
+          <p:cNvPr id="47" name="Text 45"/>
+          <p:cNvSpPr/>
+          <p:nvPr/>
+        </p:nvSpPr>
+        <p:spPr>
+          <a:xfrm>
+            <a:off x="667385" y="3630295"/>
+            <a:ext cx="1602740" cy="228600"/>
+          </a:xfrm>
+          <a:prstGeom prst="rect">
+            <a:avLst/>
+          </a:prstGeom>
+          <a:noFill/>
+        </p:spPr>
+        <p:txBody>
+          <a:bodyPr wrap="square" lIns="0" tIns="0" rIns="0" bIns="0" rtlCol="0" anchor="ctr">
+            <a:normAutofit/>
+          </a:bodyPr>
+          <a:lstStyle/>
+          <a:p>
+            <a:pPr marL="0" indent="0" algn="l">
+              <a:buNone/>
+            </a:pPr>
+            <a:r>
+              <a:rPr lang="en-US" sz="1300" b="1" dirty="0">
+                <a:solidFill>
+                  <a:srgbClr val="0F172A"/>
+                </a:solidFill>
+                <a:latin typeface="微软雅黑" panose="020B0503020204020204" pitchFamily="34" charset="-122"/>
+                <a:ea typeface="微软雅黑" panose="020B0503020204020204" pitchFamily="34" charset="-122"/>
+                <a:cs typeface="微软雅黑" panose="020B0503020204020204" pitchFamily="34" charset="-120"/>
+              </a:rPr>
+              <a:t>清算管理</a:t>
+            </a:r>
+            <a:endParaRPr lang="en-US" sz="1300" dirty="0"/>
+          </a:p>
+        </p:txBody>
+      </p:sp>
+      <p:sp>
+        <p:nvSpPr>
+          <p:cNvPr id="63" name="Text 61"/>
+          <p:cNvSpPr/>
+          <p:nvPr/>
+        </p:nvSpPr>
+        <p:spPr>
+          <a:xfrm>
+            <a:off x="807085" y="5591175"/>
+            <a:ext cx="1873885" cy="241300"/>
+          </a:xfrm>
+          <a:prstGeom prst="rect">
+            <a:avLst/>
+          </a:prstGeom>
+          <a:noFill/>
+        </p:spPr>
+        <p:txBody>
+          <a:bodyPr wrap="square" lIns="0" tIns="0" rIns="0" bIns="0" rtlCol="0" anchor="ctr">
+            <a:normAutofit/>
+          </a:bodyPr>
+          <a:lstStyle/>
+          <a:p>
+            <a:pPr marL="0" indent="0" algn="l">
+              <a:buNone/>
+            </a:pPr>
+            <a:r>
+              <a:rPr lang="en-US" sz="1300" b="1" dirty="0">
+                <a:solidFill>
+                  <a:srgbClr val="0F172A"/>
+                </a:solidFill>
+                <a:latin typeface="微软雅黑" panose="020B0503020204020204" pitchFamily="34" charset="-122"/>
+                <a:ea typeface="微软雅黑" panose="020B0503020204020204" pitchFamily="34" charset="-122"/>
+                <a:cs typeface="微软雅黑" panose="020B0503020204020204" pitchFamily="34" charset="-120"/>
+              </a:rPr>
+              <a:t>SLA 保障功能</a:t>
+            </a:r>
+            <a:endParaRPr lang="en-US" sz="1300" dirty="0"/>
+          </a:p>
+        </p:txBody>
+      </p:sp>
+      <p:sp>
+        <p:nvSpPr>
+          <p:cNvPr id="75" name="Text 73"/>
+          <p:cNvSpPr/>
+          <p:nvPr/>
+        </p:nvSpPr>
+        <p:spPr>
+          <a:xfrm>
+            <a:off x="9426575" y="5591175"/>
+            <a:ext cx="1395730" cy="228600"/>
+          </a:xfrm>
+          <a:prstGeom prst="rect">
+            <a:avLst/>
+          </a:prstGeom>
+          <a:noFill/>
+        </p:spPr>
+        <p:txBody>
+          <a:bodyPr wrap="square" lIns="0" tIns="0" rIns="0" bIns="0" rtlCol="0" anchor="ctr">
+            <a:normAutofit/>
+          </a:bodyPr>
+          <a:lstStyle/>
+          <a:p>
+            <a:pPr marL="0" indent="0" algn="l">
+              <a:buNone/>
+            </a:pPr>
+            <a:r>
+              <a:rPr lang="en-US" sz="1300" b="1" dirty="0">
+                <a:solidFill>
+                  <a:srgbClr val="0F172A"/>
+                </a:solidFill>
+                <a:latin typeface="微软雅黑" panose="020B0503020204020204" pitchFamily="34" charset="-122"/>
+                <a:ea typeface="微软雅黑" panose="020B0503020204020204" pitchFamily="34" charset="-122"/>
+                <a:cs typeface="微软雅黑" panose="020B0503020204020204" pitchFamily="34" charset="-120"/>
+              </a:rPr>
+              <a:t>监控与运营保障</a:t>
+            </a:r>
+            <a:endParaRPr lang="en-US" sz="1300" dirty="0"/>
+          </a:p>
+        </p:txBody>
+      </p:sp>
+      <p:sp>
+        <p:nvSpPr>
+          <p:cNvPr id="67" name="Text 65"/>
+          <p:cNvSpPr/>
+          <p:nvPr/>
+        </p:nvSpPr>
+        <p:spPr>
+          <a:xfrm>
+            <a:off x="3658870" y="5591175"/>
+            <a:ext cx="1413510" cy="228600"/>
+          </a:xfrm>
+          <a:prstGeom prst="rect">
+            <a:avLst/>
+          </a:prstGeom>
+          <a:noFill/>
+        </p:spPr>
+        <p:txBody>
+          <a:bodyPr wrap="square" lIns="0" tIns="0" rIns="0" bIns="0" rtlCol="0" anchor="ctr">
+            <a:normAutofit/>
+          </a:bodyPr>
+          <a:lstStyle/>
+          <a:p>
+            <a:pPr marL="0" indent="0" algn="l">
+              <a:buNone/>
+            </a:pPr>
+            <a:r>
+              <a:rPr lang="en-US" sz="1300" b="1" dirty="0">
+                <a:solidFill>
+                  <a:srgbClr val="0F172A"/>
+                </a:solidFill>
+                <a:latin typeface="微软雅黑" panose="020B0503020204020204" pitchFamily="34" charset="-122"/>
+                <a:ea typeface="微软雅黑" panose="020B0503020204020204" pitchFamily="34" charset="-122"/>
+                <a:cs typeface="微软雅黑" panose="020B0503020204020204" pitchFamily="34" charset="-120"/>
+              </a:rPr>
+              <a:t>高可用与安全</a:t>
+            </a:r>
+            <a:endParaRPr lang="en-US" sz="1300" dirty="0"/>
+          </a:p>
+        </p:txBody>
+      </p:sp>
+      <p:sp>
+        <p:nvSpPr>
+          <p:cNvPr id="71" name="Text 69"/>
+          <p:cNvSpPr/>
+          <p:nvPr/>
+        </p:nvSpPr>
+        <p:spPr>
+          <a:xfrm>
+            <a:off x="6530340" y="5591175"/>
+            <a:ext cx="1532890" cy="228600"/>
+          </a:xfrm>
+          <a:prstGeom prst="rect">
+            <a:avLst/>
+          </a:prstGeom>
+          <a:noFill/>
+        </p:spPr>
+        <p:txBody>
+          <a:bodyPr wrap="square" lIns="0" tIns="0" rIns="0" bIns="0" rtlCol="0" anchor="ctr">
+            <a:normAutofit/>
+          </a:bodyPr>
+          <a:lstStyle/>
+          <a:p>
+            <a:pPr marL="0" indent="0" algn="l">
+              <a:buNone/>
+            </a:pPr>
+            <a:r>
+              <a:rPr lang="en-US" sz="1300" b="1" dirty="0">
+                <a:solidFill>
+                  <a:srgbClr val="0F172A"/>
+                </a:solidFill>
+                <a:latin typeface="微软雅黑" panose="020B0503020204020204" pitchFamily="34" charset="-122"/>
+                <a:ea typeface="微软雅黑" panose="020B0503020204020204" pitchFamily="34" charset="-122"/>
+                <a:cs typeface="微软雅黑" panose="020B0503020204020204" pitchFamily="34" charset="-120"/>
+              </a:rPr>
+              <a:t>数据与存储支撑</a:t>
+            </a:r>
+            <a:endParaRPr lang="en-US" sz="1300" dirty="0"/>
+          </a:p>
+        </p:txBody>
+      </p:sp>
+      <p:sp>
+        <p:nvSpPr>
+          <p:cNvPr id="107" name="同侧圆角矩形 106"/>
+          <p:cNvSpPr/>
+          <p:nvPr/>
+        </p:nvSpPr>
+        <p:spPr>
+          <a:xfrm>
+            <a:off x="519430" y="1691005"/>
+            <a:ext cx="3543300" cy="303530"/>
+          </a:xfrm>
+          <a:prstGeom prst="round2SameRect">
+            <a:avLst>
+              <a:gd name="adj1" fmla="val 28659"/>
+              <a:gd name="adj2" fmla="val 0"/>
+            </a:avLst>
+          </a:prstGeom>
+          <a:solidFill>
+            <a:srgbClr val="D1E5FD"/>
+          </a:solidFill>
+          <a:ln>
+            <a:noFill/>
+          </a:ln>
+        </p:spPr>
+        <p:style>
+          <a:lnRef idx="2">
+            <a:schemeClr val="accent1">
+              <a:lumMod val="75000"/>
+            </a:schemeClr>
+          </a:lnRef>
+          <a:fillRef idx="1">
+            <a:schemeClr val="accent1"/>
+          </a:fillRef>
+          <a:effectRef idx="0">
+            <a:srgbClr val="FFFFFF"/>
+          </a:effectRef>
+          <a:fontRef idx="minor">
+            <a:schemeClr val="lt1"/>
+          </a:fontRef>
+        </p:style>
+        <p:txBody>
+          <a:bodyPr rtlCol="0" anchor="ctr"/>
+          <a:p>
+            <a:pPr algn="ctr"/>
+            <a:endParaRPr lang="zh-CN" altLang="en-US"/>
+          </a:p>
+        </p:txBody>
+      </p:sp>
+      <p:sp>
+        <p:nvSpPr>
+          <p:cNvPr id="32" name="Text 30"/>
+          <p:cNvSpPr/>
+          <p:nvPr/>
+        </p:nvSpPr>
+        <p:spPr>
+          <a:xfrm>
+            <a:off x="636397" y="1727708"/>
+            <a:ext cx="3236976" cy="228600"/>
+          </a:xfrm>
+          <a:prstGeom prst="rect">
+            <a:avLst/>
+          </a:prstGeom>
+          <a:noFill/>
+        </p:spPr>
+        <p:txBody>
+          <a:bodyPr wrap="square" lIns="0" tIns="0" rIns="0" bIns="0" rtlCol="0" anchor="ctr">
+            <a:normAutofit/>
+          </a:bodyPr>
+          <a:lstStyle/>
+          <a:p>
+            <a:pPr marL="0" indent="0" algn="l">
+              <a:buNone/>
+            </a:pPr>
+            <a:r>
+              <a:rPr lang="en-US" sz="1300" b="1" dirty="0">
+                <a:solidFill>
+                  <a:srgbClr val="0F172A"/>
+                </a:solidFill>
+                <a:latin typeface="微软雅黑" panose="020B0503020204020204" pitchFamily="34" charset="-122"/>
+                <a:ea typeface="微软雅黑" panose="020B0503020204020204" pitchFamily="34" charset="-122"/>
+                <a:cs typeface="微软雅黑" panose="020B0503020204020204" pitchFamily="34" charset="-120"/>
+              </a:rPr>
+              <a:t>数据及服务管理</a:t>
+            </a:r>
+            <a:endParaRPr lang="en-US" sz="1300" dirty="0"/>
+          </a:p>
+        </p:txBody>
+      </p:sp>
+      <p:sp>
+        <p:nvSpPr>
+          <p:cNvPr id="108" name="Shape 81"/>
+          <p:cNvSpPr/>
+          <p:nvPr/>
+        </p:nvSpPr>
+        <p:spPr>
+          <a:xfrm flipH="1">
+            <a:off x="6071235" y="3199130"/>
+            <a:ext cx="1270" cy="393700"/>
+          </a:xfrm>
+          <a:prstGeom prst="line">
+            <a:avLst/>
+          </a:prstGeom>
+          <a:noFill/>
+          <a:ln w="12700">
+            <a:solidFill>
+              <a:srgbClr val="64748B"/>
+            </a:solidFill>
+            <a:prstDash val="solid"/>
+            <a:tailEnd type="triangle"/>
+          </a:ln>
+        </p:spPr>
+      </p:sp>
+      <p:sp>
+        <p:nvSpPr>
+          <p:cNvPr id="109" name="Shape 81"/>
+          <p:cNvSpPr/>
+          <p:nvPr/>
+        </p:nvSpPr>
+        <p:spPr>
+          <a:xfrm>
+            <a:off x="9875520" y="3216910"/>
+            <a:ext cx="635" cy="376555"/>
+          </a:xfrm>
+          <a:prstGeom prst="line">
+            <a:avLst/>
+          </a:prstGeom>
+          <a:noFill/>
+          <a:ln w="12700">
+            <a:solidFill>
+              <a:srgbClr val="64748B"/>
+            </a:solidFill>
+            <a:prstDash val="solid"/>
+            <a:tailEnd type="triangle"/>
+          </a:ln>
+        </p:spPr>
+      </p:sp>
+      <p:sp>
+        <p:nvSpPr>
+          <p:cNvPr id="110" name="Shape 75"/>
+          <p:cNvSpPr/>
+          <p:nvPr/>
+        </p:nvSpPr>
+        <p:spPr>
+          <a:xfrm>
+            <a:off x="5995035" y="1256665"/>
+            <a:ext cx="635" cy="445770"/>
+          </a:xfrm>
+          <a:prstGeom prst="line">
+            <a:avLst/>
+          </a:prstGeom>
+          <a:noFill/>
+          <a:ln w="12700">
+            <a:solidFill>
+              <a:srgbClr val="64748B"/>
+            </a:solidFill>
+            <a:prstDash val="solid"/>
+            <a:tailEnd type="triangle"/>
+          </a:ln>
+        </p:spPr>
+      </p:sp>
+      <p:sp>
+        <p:nvSpPr>
+          <p:cNvPr id="111" name="Shape 75"/>
+          <p:cNvSpPr/>
+          <p:nvPr/>
+        </p:nvSpPr>
+        <p:spPr>
+          <a:xfrm>
+            <a:off x="10015220" y="1256665"/>
+            <a:ext cx="635" cy="445770"/>
+          </a:xfrm>
+          <a:prstGeom prst="line">
+            <a:avLst/>
+          </a:prstGeom>
+          <a:noFill/>
+          <a:ln w="12700">
+            <a:solidFill>
+              <a:srgbClr val="64748B"/>
+            </a:solidFill>
+            <a:prstDash val="solid"/>
+            <a:tailEnd type="triangle"/>
+          </a:ln>
+        </p:spPr>
       </p:sp>
     </p:spTree>
   </p:cSld>
@@ -4533,23 +8194,6 @@
         <a:font script="Viet" typeface="Times New Roman"/>
         <a:font script="Uigh" typeface="Microsoft Uighur"/>
         <a:font script="Geor" typeface="Sylfaen"/>
-        <a:font script="Armn" typeface="Arial"/>
-        <a:font script="Bugi" typeface="Leelawadee UI"/>
-        <a:font script="Bopo" typeface="Microsoft JhengHei"/>
-        <a:font script="Java" typeface="Javanese Text"/>
-        <a:font script="Lisu" typeface="Segoe UI"/>
-        <a:font script="Mymr" typeface="Myanmar Text"/>
-        <a:font script="Nkoo" typeface="Ebrima"/>
-        <a:font script="Olck" typeface="Nirmala UI"/>
-        <a:font script="Osma" typeface="Ebrima"/>
-        <a:font script="Phag" typeface="Phagspa"/>
-        <a:font script="Syrn" typeface="Estrangelo Edessa"/>
-        <a:font script="Syrj" typeface="Estrangelo Edessa"/>
-        <a:font script="Syre" typeface="Estrangelo Edessa"/>
-        <a:font script="Sora" typeface="Nirmala UI"/>
-        <a:font script="Tale" typeface="Microsoft Tai Le"/>
-        <a:font script="Talu" typeface="Microsoft New Tai Lue"/>
-        <a:font script="Tfng" typeface="Ebrima"/>
       </a:majorFont>
       <a:minorFont>
         <a:latin typeface="Microsoft YaHei"/>
@@ -4585,23 +8229,6 @@
         <a:font script="Viet" typeface="Arial"/>
         <a:font script="Uigh" typeface="Microsoft Uighur"/>
         <a:font script="Geor" typeface="Sylfaen"/>
-        <a:font script="Armn" typeface="Arial"/>
-        <a:font script="Bugi" typeface="Leelawadee UI"/>
-        <a:font script="Bopo" typeface="Microsoft JhengHei"/>
-        <a:font script="Java" typeface="Javanese Text"/>
-        <a:font script="Lisu" typeface="Segoe UI"/>
-        <a:font script="Mymr" typeface="Myanmar Text"/>
-        <a:font script="Nkoo" typeface="Ebrima"/>
-        <a:font script="Olck" typeface="Nirmala UI"/>
-        <a:font script="Osma" typeface="Ebrima"/>
-        <a:font script="Phag" typeface="Phagspa"/>
-        <a:font script="Syrn" typeface="Estrangelo Edessa"/>
-        <a:font script="Syrj" typeface="Estrangelo Edessa"/>
-        <a:font script="Syre" typeface="Estrangelo Edessa"/>
-        <a:font script="Sora" typeface="Nirmala UI"/>
-        <a:font script="Tale" typeface="Microsoft Tai Le"/>
-        <a:font script="Talu" typeface="Microsoft New Tai Lue"/>
-        <a:font script="Tfng" typeface="Ebrima"/>
       </a:minorFont>
     </a:fontScheme>
     <a:fmtScheme name="Office">
@@ -4742,8 +8369,265 @@
       </a:bgFillStyleLst>
     </a:fmtScheme>
   </a:themeElements>
-  <a:objectDefaults/>
-  <a:extraClrSchemeLst/>
+  <a:extLst>
+    <a:ext uri="{05A4C25C-085E-4340-85A3-A5531E510DB2}">
+      <thm15:themeFamily xmlns:thm15="http://schemas.microsoft.com/office/thememl/2012/main" name="Office Theme" id="{62F939B6-93AF-4DB8-9C6B-D6C7DFDC589F}" vid="{4A3C46E8-61CC-4603-A589-7422A47A8E4A}"/>
+    </a:ext>
+  </a:extLst>
+</a:theme>
+</file>
+
+<file path=ppt/theme/theme2.xml><?xml version="1.0" encoding="utf-8"?>
+<a:theme xmlns:a="http://schemas.openxmlformats.org/drawingml/2006/main" name="Office Theme">
+  <a:themeElements>
+    <a:clrScheme name="Office">
+      <a:dk1>
+        <a:sysClr val="windowText" lastClr="000000"/>
+      </a:dk1>
+      <a:lt1>
+        <a:sysClr val="window" lastClr="FFFFFF"/>
+      </a:lt1>
+      <a:dk2>
+        <a:srgbClr val="44546A"/>
+      </a:dk2>
+      <a:lt2>
+        <a:srgbClr val="E7E6E6"/>
+      </a:lt2>
+      <a:accent1>
+        <a:srgbClr val="4472C4"/>
+      </a:accent1>
+      <a:accent2>
+        <a:srgbClr val="ED7D31"/>
+      </a:accent2>
+      <a:accent3>
+        <a:srgbClr val="A5A5A5"/>
+      </a:accent3>
+      <a:accent4>
+        <a:srgbClr val="FFC000"/>
+      </a:accent4>
+      <a:accent5>
+        <a:srgbClr val="5B9BD5"/>
+      </a:accent5>
+      <a:accent6>
+        <a:srgbClr val="70AD47"/>
+      </a:accent6>
+      <a:hlink>
+        <a:srgbClr val="0563C1"/>
+      </a:hlink>
+      <a:folHlink>
+        <a:srgbClr val="954F72"/>
+      </a:folHlink>
+    </a:clrScheme>
+    <a:fontScheme name="Office">
+      <a:majorFont>
+        <a:latin typeface="Microsoft YaHei"/>
+        <a:ea typeface=""/>
+        <a:cs typeface=""/>
+        <a:font script="Jpan" typeface="游ゴシック Light"/>
+        <a:font script="Hang" typeface="맑은 고딕"/>
+        <a:font script="Hans" typeface="等线 Light"/>
+        <a:font script="Hant" typeface="新細明體"/>
+        <a:font script="Arab" typeface="Times New Roman"/>
+        <a:font script="Hebr" typeface="Times New Roman"/>
+        <a:font script="Thai" typeface="Angsana New"/>
+        <a:font script="Ethi" typeface="Nyala"/>
+        <a:font script="Beng" typeface="Vrinda"/>
+        <a:font script="Gujr" typeface="Shruti"/>
+        <a:font script="Khmr" typeface="MoolBoran"/>
+        <a:font script="Knda" typeface="Tunga"/>
+        <a:font script="Guru" typeface="Raavi"/>
+        <a:font script="Cans" typeface="Euphemia"/>
+        <a:font script="Cher" typeface="Plantagenet Cherokee"/>
+        <a:font script="Yiii" typeface="Microsoft Yi Baiti"/>
+        <a:font script="Tibt" typeface="Microsoft Himalaya"/>
+        <a:font script="Thaa" typeface="MV Boli"/>
+        <a:font script="Deva" typeface="Mangal"/>
+        <a:font script="Telu" typeface="Gautami"/>
+        <a:font script="Taml" typeface="Latha"/>
+        <a:font script="Syrc" typeface="Estrangelo Edessa"/>
+        <a:font script="Orya" typeface="Kalinga"/>
+        <a:font script="Mlym" typeface="Kartika"/>
+        <a:font script="Laoo" typeface="DokChampa"/>
+        <a:font script="Sinh" typeface="Iskoola Pota"/>
+        <a:font script="Mong" typeface="Mongolian Baiti"/>
+        <a:font script="Viet" typeface="Times New Roman"/>
+        <a:font script="Uigh" typeface="Microsoft Uighur"/>
+        <a:font script="Geor" typeface="Sylfaen"/>
+      </a:majorFont>
+      <a:minorFont>
+        <a:latin typeface="Microsoft YaHei"/>
+        <a:ea typeface=""/>
+        <a:cs typeface=""/>
+        <a:font script="Jpan" typeface="游ゴシック"/>
+        <a:font script="Hang" typeface="맑은 고딕"/>
+        <a:font script="Hans" typeface="等线"/>
+        <a:font script="Hant" typeface="新細明體"/>
+        <a:font script="Arab" typeface="Arial"/>
+        <a:font script="Hebr" typeface="Arial"/>
+        <a:font script="Thai" typeface="Cordia New"/>
+        <a:font script="Ethi" typeface="Nyala"/>
+        <a:font script="Beng" typeface="Vrinda"/>
+        <a:font script="Gujr" typeface="Shruti"/>
+        <a:font script="Khmr" typeface="DaunPenh"/>
+        <a:font script="Knda" typeface="Tunga"/>
+        <a:font script="Guru" typeface="Raavi"/>
+        <a:font script="Cans" typeface="Euphemia"/>
+        <a:font script="Cher" typeface="Plantagenet Cherokee"/>
+        <a:font script="Yiii" typeface="Microsoft Yi Baiti"/>
+        <a:font script="Tibt" typeface="Microsoft Himalaya"/>
+        <a:font script="Thaa" typeface="MV Boli"/>
+        <a:font script="Deva" typeface="Mangal"/>
+        <a:font script="Telu" typeface="Gautami"/>
+        <a:font script="Taml" typeface="Latha"/>
+        <a:font script="Syrc" typeface="Estrangelo Edessa"/>
+        <a:font script="Orya" typeface="Kalinga"/>
+        <a:font script="Mlym" typeface="Kartika"/>
+        <a:font script="Laoo" typeface="DokChampa"/>
+        <a:font script="Sinh" typeface="Iskoola Pota"/>
+        <a:font script="Mong" typeface="Mongolian Baiti"/>
+        <a:font script="Viet" typeface="Arial"/>
+        <a:font script="Uigh" typeface="Microsoft Uighur"/>
+        <a:font script="Geor" typeface="Sylfaen"/>
+      </a:minorFont>
+    </a:fontScheme>
+    <a:fmtScheme name="Office">
+      <a:fillStyleLst>
+        <a:solidFill>
+          <a:schemeClr val="phClr"/>
+        </a:solidFill>
+        <a:gradFill rotWithShape="1">
+          <a:gsLst>
+            <a:gs pos="0">
+              <a:schemeClr val="phClr">
+                <a:lumMod val="110000"/>
+                <a:satMod val="105000"/>
+                <a:tint val="67000"/>
+              </a:schemeClr>
+            </a:gs>
+            <a:gs pos="50000">
+              <a:schemeClr val="phClr">
+                <a:lumMod val="105000"/>
+                <a:satMod val="103000"/>
+                <a:tint val="73000"/>
+              </a:schemeClr>
+            </a:gs>
+            <a:gs pos="100000">
+              <a:schemeClr val="phClr">
+                <a:lumMod val="105000"/>
+                <a:satMod val="109000"/>
+                <a:tint val="81000"/>
+              </a:schemeClr>
+            </a:gs>
+          </a:gsLst>
+          <a:lin ang="5400000" scaled="0"/>
+        </a:gradFill>
+        <a:gradFill rotWithShape="1">
+          <a:gsLst>
+            <a:gs pos="0">
+              <a:schemeClr val="phClr">
+                <a:satMod val="103000"/>
+                <a:lumMod val="102000"/>
+                <a:tint val="94000"/>
+              </a:schemeClr>
+            </a:gs>
+            <a:gs pos="50000">
+              <a:schemeClr val="phClr">
+                <a:satMod val="110000"/>
+                <a:lumMod val="100000"/>
+                <a:shade val="100000"/>
+              </a:schemeClr>
+            </a:gs>
+            <a:gs pos="100000">
+              <a:schemeClr val="phClr">
+                <a:lumMod val="99000"/>
+                <a:satMod val="120000"/>
+                <a:shade val="78000"/>
+              </a:schemeClr>
+            </a:gs>
+          </a:gsLst>
+          <a:lin ang="5400000" scaled="0"/>
+        </a:gradFill>
+      </a:fillStyleLst>
+      <a:lnStyleLst>
+        <a:ln w="6350" cap="flat" cmpd="sng" algn="ctr">
+          <a:solidFill>
+            <a:schemeClr val="phClr"/>
+          </a:solidFill>
+          <a:prstDash val="solid"/>
+          <a:miter lim="800000"/>
+        </a:ln>
+        <a:ln w="12700" cap="flat" cmpd="sng" algn="ctr">
+          <a:solidFill>
+            <a:schemeClr val="phClr"/>
+          </a:solidFill>
+          <a:prstDash val="solid"/>
+          <a:miter lim="800000"/>
+        </a:ln>
+        <a:ln w="19050" cap="flat" cmpd="sng" algn="ctr">
+          <a:solidFill>
+            <a:schemeClr val="phClr"/>
+          </a:solidFill>
+          <a:prstDash val="solid"/>
+          <a:miter lim="800000"/>
+        </a:ln>
+      </a:lnStyleLst>
+      <a:effectStyleLst>
+        <a:effectStyle>
+          <a:effectLst/>
+        </a:effectStyle>
+        <a:effectStyle>
+          <a:effectLst/>
+        </a:effectStyle>
+        <a:effectStyle>
+          <a:effectLst>
+            <a:outerShdw blurRad="57150" dist="19050" dir="5400000" algn="ctr" rotWithShape="0">
+              <a:srgbClr val="000000">
+                <a:alpha val="63000"/>
+              </a:srgbClr>
+            </a:outerShdw>
+          </a:effectLst>
+        </a:effectStyle>
+      </a:effectStyleLst>
+      <a:bgFillStyleLst>
+        <a:solidFill>
+          <a:schemeClr val="phClr"/>
+        </a:solidFill>
+        <a:solidFill>
+          <a:schemeClr val="phClr">
+            <a:tint val="95000"/>
+            <a:satMod val="170000"/>
+          </a:schemeClr>
+        </a:solidFill>
+        <a:gradFill rotWithShape="1">
+          <a:gsLst>
+            <a:gs pos="0">
+              <a:schemeClr val="phClr">
+                <a:tint val="93000"/>
+                <a:satMod val="150000"/>
+                <a:shade val="98000"/>
+                <a:lumMod val="102000"/>
+              </a:schemeClr>
+            </a:gs>
+            <a:gs pos="50000">
+              <a:schemeClr val="phClr">
+                <a:tint val="98000"/>
+                <a:satMod val="130000"/>
+                <a:shade val="90000"/>
+                <a:lumMod val="103000"/>
+              </a:schemeClr>
+            </a:gs>
+            <a:gs pos="100000">
+              <a:schemeClr val="phClr">
+                <a:shade val="63000"/>
+                <a:satMod val="120000"/>
+              </a:schemeClr>
+            </a:gs>
+          </a:gsLst>
+          <a:lin ang="5400000" scaled="0"/>
+        </a:gradFill>
+      </a:bgFillStyleLst>
+    </a:fmtScheme>
+  </a:themeElements>
   <a:extLst>
     <a:ext uri="{05A4C25C-085E-4340-85A3-A5531E510DB2}">
       <thm15:themeFamily xmlns:thm15="http://schemas.microsoft.com/office/thememl/2012/main" name="Office Theme" id="{62F939B6-93AF-4DB8-9C6B-D6C7DFDC589F}" vid="{4A3C46E8-61CC-4603-A589-7422A47A8E4A}"/>
